--- a/reports/exp3_poetry_lstm.pptx
+++ b/reports/exp3_poetry_lstm.pptx
@@ -3091,7 +3091,7 @@
     <p:bg>
       <p:bgPr>
         <a:solidFill>
-          <a:srgbClr val="1F497D"/>
+          <a:srgbClr val="1A335C"/>
         </a:solidFill>
         <a:effectLst/>
       </p:bgPr>
@@ -3112,13 +3112,13 @@
         <p:spPr>
           <a:xfrm>
             <a:off x="0" y="0"/>
-            <a:ext cx="12188952" cy="137160"/>
+            <a:ext cx="164592" cy="6858000"/>
           </a:xfrm>
           <a:prstGeom prst="rect">
             <a:avLst/>
           </a:prstGeom>
           <a:solidFill>
-            <a:srgbClr val="C89620"/>
+            <a:srgbClr val="B8860B"/>
           </a:solidFill>
           <a:ln>
             <a:noFill/>
@@ -3146,22 +3146,80 @@
           </a:p>
         </p:txBody>
       </p:sp>
-      <p:sp>
-        <p:nvSpPr>
-          <p:cNvPr id="3" name="Rectangle 2"/>
+      <p:pic>
+        <p:nvPicPr>
+          <p:cNvPr id="3" name="Picture 2" descr="ucas_seal.png"/>
+          <p:cNvPicPr>
+            <a:picLocks noChangeAspect="1"/>
+          </p:cNvPicPr>
+          <p:nvPr/>
+        </p:nvPicPr>
+        <p:blipFill>
+          <a:blip r:embed="rId2"/>
+          <a:stretch>
+            <a:fillRect/>
+          </a:stretch>
+        </p:blipFill>
+        <p:spPr>
+          <a:xfrm>
+            <a:off x="10771632" y="228600"/>
+            <a:ext cx="1188720" cy="1069848"/>
+          </a:xfrm>
+          <a:prstGeom prst="rect">
+            <a:avLst/>
+          </a:prstGeom>
+        </p:spPr>
+      </p:pic>
+      <p:sp>
+        <p:nvSpPr>
+          <p:cNvPr id="4" name="TextBox 3"/>
+          <p:cNvSpPr txBox="1"/>
+          <p:nvPr/>
+        </p:nvSpPr>
+        <p:spPr>
+          <a:xfrm>
+            <a:off x="502920" y="1737360"/>
+            <a:ext cx="10515600" cy="1280160"/>
+          </a:xfrm>
+          <a:prstGeom prst="rect">
+            <a:avLst/>
+          </a:prstGeom>
+          <a:noFill/>
+        </p:spPr>
+        <p:txBody>
+          <a:bodyPr wrap="square">
+            <a:spAutoFit/>
+          </a:bodyPr>
+          <a:lstStyle/>
+          <a:p>
+            <a:pPr algn="l"/>
+            <a:r>
+              <a:rPr sz="3400" b="1" i="0">
+                <a:solidFill>
+                  <a:srgbClr val="FFFFFF"/>
+                </a:solidFill>
+              </a:rPr>
+              <a:t>实验三：自动写诗</a:t>
+            </a:r>
+          </a:p>
+        </p:txBody>
+      </p:sp>
+      <p:sp>
+        <p:nvSpPr>
+          <p:cNvPr id="5" name="Rectangle 4"/>
           <p:cNvSpPr/>
           <p:nvPr/>
         </p:nvSpPr>
         <p:spPr>
           <a:xfrm>
-            <a:off x="0" y="6720840"/>
-            <a:ext cx="12188952" cy="137160"/>
+            <a:off x="502920" y="3154680"/>
+            <a:ext cx="8686800" cy="36576"/>
           </a:xfrm>
           <a:prstGeom prst="rect">
             <a:avLst/>
           </a:prstGeom>
           <a:solidFill>
-            <a:srgbClr val="C89620"/>
+            <a:srgbClr val="B8860B"/>
           </a:solidFill>
           <a:ln>
             <a:noFill/>
@@ -3191,14 +3249,14 @@
       </p:sp>
       <p:sp>
         <p:nvSpPr>
-          <p:cNvPr id="4" name="TextBox 3"/>
+          <p:cNvPr id="6" name="TextBox 5"/>
           <p:cNvSpPr txBox="1"/>
           <p:nvPr/>
         </p:nvSpPr>
         <p:spPr>
           <a:xfrm>
-            <a:off x="914400" y="2011680"/>
-            <a:ext cx="10360152" cy="1371600"/>
+            <a:off x="502920" y="3291840"/>
+            <a:ext cx="10058400" cy="731520"/>
           </a:xfrm>
           <a:prstGeom prst="rect">
             <a:avLst/>
@@ -3211,28 +3269,28 @@
           </a:bodyPr>
           <a:lstStyle/>
           <a:p>
-            <a:pPr algn="ctr"/>
-            <a:r>
-              <a:rPr sz="3600" b="1">
-                <a:solidFill>
-                  <a:srgbClr val="FFFFFF"/>
+            <a:pPr algn="l"/>
+            <a:r>
+              <a:rPr sz="2000" b="0" i="0">
+                <a:solidFill>
+                  <a:srgbClr val="C8D8F0"/>
                 </a:solidFill>
               </a:rPr>
-              <a:t>实验三：自动写诗</a:t>
-            </a:r>
-          </a:p>
-        </p:txBody>
-      </p:sp>
-      <p:sp>
-        <p:nvSpPr>
-          <p:cNvPr id="5" name="TextBox 4"/>
+              <a:t>基于双层 LSTM 的唐诗语言模型 | PyTorch</a:t>
+            </a:r>
+          </a:p>
+        </p:txBody>
+      </p:sp>
+      <p:sp>
+        <p:nvSpPr>
+          <p:cNvPr id="7" name="TextBox 6"/>
           <p:cNvSpPr txBox="1"/>
           <p:nvPr/>
         </p:nvSpPr>
         <p:spPr>
           <a:xfrm>
-            <a:off x="914400" y="3566160"/>
-            <a:ext cx="10360152" cy="914400"/>
+            <a:off x="502920" y="5989320"/>
+            <a:ext cx="10058400" cy="502920"/>
           </a:xfrm>
           <a:prstGeom prst="rect">
             <a:avLst/>
@@ -3245,48 +3303,14 @@
           </a:bodyPr>
           <a:lstStyle/>
           <a:p>
-            <a:pPr algn="ctr"/>
-            <a:r>
-              <a:rPr sz="2200" b="0">
-                <a:solidFill>
-                  <a:srgbClr val="D6E4F0"/>
+            <a:pPr algn="l"/>
+            <a:r>
+              <a:rPr sz="1500" b="0" i="0">
+                <a:solidFill>
+                  <a:srgbClr val="A0B8D0"/>
                 </a:solidFill>
               </a:rPr>
-              <a:t>基于双层 LSTM 的唐诗语言模型</a:t>
-            </a:r>
-          </a:p>
-        </p:txBody>
-      </p:sp>
-      <p:sp>
-        <p:nvSpPr>
-          <p:cNvPr id="6" name="TextBox 5"/>
-          <p:cNvSpPr txBox="1"/>
-          <p:nvPr/>
-        </p:nvSpPr>
-        <p:spPr>
-          <a:xfrm>
-            <a:off x="914400" y="5760720"/>
-            <a:ext cx="10360152" cy="548640"/>
-          </a:xfrm>
-          <a:prstGeom prst="rect">
-            <a:avLst/>
-          </a:prstGeom>
-          <a:noFill/>
-        </p:spPr>
-        <p:txBody>
-          <a:bodyPr wrap="square">
-            <a:spAutoFit/>
-          </a:bodyPr>
-          <a:lstStyle/>
-          <a:p>
-            <a:pPr algn="ctr"/>
-            <a:r>
-              <a:rPr sz="1600" b="0">
-                <a:solidFill>
-                  <a:srgbClr val="FFFFFF"/>
-                </a:solidFill>
-              </a:rPr>
-              <a:t>华为云 Tesla T4 · PyTorch 2.2 · 2026-05-18</a:t>
+              <a:t>WevYang　|　中国科学院大学  深度学习</a:t>
             </a:r>
           </a:p>
         </p:txBody>
@@ -3326,13 +3350,13 @@
         <p:spPr>
           <a:xfrm>
             <a:off x="0" y="0"/>
-            <a:ext cx="12188952" cy="1005840"/>
+            <a:ext cx="12188952" cy="960120"/>
           </a:xfrm>
           <a:prstGeom prst="rect">
             <a:avLst/>
           </a:prstGeom>
           <a:solidFill>
-            <a:srgbClr val="1F497D"/>
+            <a:srgbClr val="1A335C"/>
           </a:solidFill>
           <a:ln>
             <a:noFill/>
@@ -3362,14 +3386,57 @@
       </p:sp>
       <p:sp>
         <p:nvSpPr>
-          <p:cNvPr id="3" name="TextBox 2"/>
+          <p:cNvPr id="3" name="Rectangle 2"/>
+          <p:cNvSpPr/>
+          <p:nvPr/>
+        </p:nvSpPr>
+        <p:spPr>
+          <a:xfrm>
+            <a:off x="0" y="0"/>
+            <a:ext cx="164592" cy="6858000"/>
+          </a:xfrm>
+          <a:prstGeom prst="rect">
+            <a:avLst/>
+          </a:prstGeom>
+          <a:solidFill>
+            <a:srgbClr val="1A335C"/>
+          </a:solidFill>
+          <a:ln>
+            <a:noFill/>
+          </a:ln>
+        </p:spPr>
+        <p:style>
+          <a:lnRef idx="1">
+            <a:schemeClr val="accent1"/>
+          </a:lnRef>
+          <a:fillRef idx="3">
+            <a:schemeClr val="accent1"/>
+          </a:fillRef>
+          <a:effectRef idx="2">
+            <a:schemeClr val="accent1"/>
+          </a:effectRef>
+          <a:fontRef idx="minor">
+            <a:schemeClr val="lt1"/>
+          </a:fontRef>
+        </p:style>
+        <p:txBody>
+          <a:bodyPr rtlCol="0" anchor="ctr"/>
+          <a:lstStyle/>
+          <a:p>
+            <a:pPr algn="ctr"/>
+          </a:p>
+        </p:txBody>
+      </p:sp>
+      <p:sp>
+        <p:nvSpPr>
+          <p:cNvPr id="4" name="TextBox 3"/>
           <p:cNvSpPr txBox="1"/>
           <p:nvPr/>
         </p:nvSpPr>
         <p:spPr>
           <a:xfrm>
-            <a:off x="274320" y="91440"/>
-            <a:ext cx="11612880" cy="822960"/>
+            <a:off x="347472" y="91440"/>
+            <a:ext cx="11521440" cy="777240"/>
           </a:xfrm>
           <a:prstGeom prst="rect">
             <a:avLst/>
@@ -3384,26 +3451,26 @@
           <a:p>
             <a:pPr algn="l"/>
             <a:r>
-              <a:rPr sz="2400" b="1">
+              <a:rPr sz="2300" b="1" i="0">
                 <a:solidFill>
                   <a:srgbClr val="FFFFFF"/>
                 </a:solidFill>
               </a:rPr>
-              <a:t>实验目的与要求</a:t>
-            </a:r>
-          </a:p>
-        </p:txBody>
-      </p:sp>
-      <p:sp>
-        <p:nvSpPr>
-          <p:cNvPr id="4" name="TextBox 3"/>
+              <a:t>概述</a:t>
+            </a:r>
+          </a:p>
+        </p:txBody>
+      </p:sp>
+      <p:sp>
+        <p:nvSpPr>
+          <p:cNvPr id="5" name="TextBox 4"/>
           <p:cNvSpPr txBox="1"/>
           <p:nvPr/>
         </p:nvSpPr>
         <p:spPr>
           <a:xfrm>
-            <a:off x="457200" y="1188720"/>
-            <a:ext cx="11247120" cy="502920"/>
+            <a:off x="411480" y="1115568"/>
+            <a:ext cx="11247120" cy="475488"/>
           </a:xfrm>
           <a:prstGeom prst="rect">
             <a:avLst/>
@@ -3418,26 +3485,26 @@
           <a:p>
             <a:pPr algn="l"/>
             <a:r>
-              <a:rPr sz="1800" b="0">
-                <a:solidFill>
-                  <a:srgbClr val="1A1A2E"/>
+              <a:rPr sz="1700" b="0" i="0">
+                <a:solidFill>
+                  <a:srgbClr val="1C1C1C"/>
                 </a:solidFill>
               </a:rPr>
-              <a:t>  • 掌握循环神经网络（LSTM）的原理与实现</a:t>
-            </a:r>
-          </a:p>
-        </p:txBody>
-      </p:sp>
-      <p:sp>
-        <p:nvSpPr>
-          <p:cNvPr id="5" name="TextBox 4"/>
+              <a:t>▸ 任务：训练语言模型，给定首句自动续写唐诗</a:t>
+            </a:r>
+          </a:p>
+        </p:txBody>
+      </p:sp>
+      <p:sp>
+        <p:nvSpPr>
+          <p:cNvPr id="6" name="TextBox 5"/>
           <p:cNvSpPr txBox="1"/>
           <p:nvPr/>
         </p:nvSpPr>
         <p:spPr>
           <a:xfrm>
-            <a:off x="457200" y="1664208"/>
-            <a:ext cx="11247120" cy="502920"/>
+            <a:off x="411480" y="1591056"/>
+            <a:ext cx="11247120" cy="475488"/>
           </a:xfrm>
           <a:prstGeom prst="rect">
             <a:avLst/>
@@ -3452,26 +3519,26 @@
           <a:p>
             <a:pPr algn="l"/>
             <a:r>
-              <a:rPr sz="1800" b="0">
-                <a:solidFill>
-                  <a:srgbClr val="1A1A2E"/>
+              <a:rPr sz="1700" b="0" i="0">
+                <a:solidFill>
+                  <a:srgbClr val="1C1C1C"/>
                 </a:solidFill>
               </a:rPr>
-              <a:t>  • 完成数据读取、网络设计、训练和预测全流程</a:t>
-            </a:r>
-          </a:p>
-        </p:txBody>
-      </p:sp>
-      <p:sp>
-        <p:nvSpPr>
-          <p:cNvPr id="6" name="TextBox 5"/>
+              <a:t>▸ 数据集：预处理后的 tang.npz，含 57,580 首唐诗</a:t>
+            </a:r>
+          </a:p>
+        </p:txBody>
+      </p:sp>
+      <p:sp>
+        <p:nvSpPr>
+          <p:cNvPr id="7" name="TextBox 6"/>
           <p:cNvSpPr txBox="1"/>
           <p:nvPr/>
         </p:nvSpPr>
         <p:spPr>
           <a:xfrm>
-            <a:off x="457200" y="2139696"/>
-            <a:ext cx="11247120" cy="502920"/>
+            <a:off x="411480" y="2066543"/>
+            <a:ext cx="11247120" cy="475488"/>
           </a:xfrm>
           <a:prstGeom prst="rect">
             <a:avLst/>
@@ -3486,26 +3553,26 @@
           <a:p>
             <a:pPr algn="l"/>
             <a:r>
-              <a:rPr sz="1800" b="0">
-                <a:solidFill>
-                  <a:srgbClr val="1A1A2E"/>
+              <a:rPr sz="1700" b="0" i="0">
+                <a:solidFill>
+                  <a:srgbClr val="1C1C1C"/>
                 </a:solidFill>
               </a:rPr>
-              <a:t>  • 网络结构须有自己的方案，不能与指导书完全相同</a:t>
-            </a:r>
-          </a:p>
-        </p:txBody>
-      </p:sp>
-      <p:sp>
-        <p:nvSpPr>
-          <p:cNvPr id="7" name="TextBox 6"/>
+              <a:t>▸ 解决方案（自己方案）：双层 LSTM + Dropout + temperature/top-k 采样</a:t>
+            </a:r>
+          </a:p>
+        </p:txBody>
+      </p:sp>
+      <p:sp>
+        <p:nvSpPr>
+          <p:cNvPr id="8" name="TextBox 7"/>
           <p:cNvSpPr txBox="1"/>
           <p:nvPr/>
         </p:nvSpPr>
         <p:spPr>
           <a:xfrm>
-            <a:off x="457200" y="2615184"/>
-            <a:ext cx="11247120" cy="502920"/>
+            <a:off x="411480" y="2542032"/>
+            <a:ext cx="11247120" cy="475488"/>
           </a:xfrm>
           <a:prstGeom prst="rect">
             <a:avLst/>
@@ -3520,32 +3587,100 @@
           <a:p>
             <a:pPr algn="l"/>
             <a:r>
-              <a:rPr sz="1800" b="0">
-                <a:solidFill>
-                  <a:srgbClr val="1A1A2E"/>
+              <a:rPr sz="1600" b="0" i="0">
+                <a:solidFill>
+                  <a:srgbClr val="555555"/>
                 </a:solidFill>
               </a:rPr>
-              <a:t>  • 给定首句，输出模型续写的诗句，满足语法和表达习惯</a:t>
-            </a:r>
-          </a:p>
-        </p:txBody>
-      </p:sp>
-      <p:sp>
-        <p:nvSpPr>
-          <p:cNvPr id="8" name="Rectangle 7"/>
+              <a:t>    – 相比指导书示例（单层 LSTM + 贪心解码）做了三处改进</a:t>
+            </a:r>
+          </a:p>
+        </p:txBody>
+      </p:sp>
+      <p:sp>
+        <p:nvSpPr>
+          <p:cNvPr id="9" name="TextBox 8"/>
+          <p:cNvSpPr txBox="1"/>
+          <p:nvPr/>
+        </p:nvSpPr>
+        <p:spPr>
+          <a:xfrm>
+            <a:off x="411480" y="3017520"/>
+            <a:ext cx="11247120" cy="475488"/>
+          </a:xfrm>
+          <a:prstGeom prst="rect">
+            <a:avLst/>
+          </a:prstGeom>
+          <a:noFill/>
+        </p:spPr>
+        <p:txBody>
+          <a:bodyPr wrap="square">
+            <a:spAutoFit/>
+          </a:bodyPr>
+          <a:lstStyle/>
+          <a:p>
+            <a:pPr algn="l"/>
+            <a:r>
+              <a:rPr sz="1700" b="0" i="0">
+                <a:solidFill>
+                  <a:srgbClr val="1C1C1C"/>
+                </a:solidFill>
+              </a:rPr>
+              <a:t>▸ 评估指标：验证集困惑度 PPL = exp(val_loss)（越低越好）</a:t>
+            </a:r>
+          </a:p>
+        </p:txBody>
+      </p:sp>
+      <p:sp>
+        <p:nvSpPr>
+          <p:cNvPr id="10" name="TextBox 9"/>
+          <p:cNvSpPr txBox="1"/>
+          <p:nvPr/>
+        </p:nvSpPr>
+        <p:spPr>
+          <a:xfrm>
+            <a:off x="411480" y="3493008"/>
+            <a:ext cx="11247120" cy="475488"/>
+          </a:xfrm>
+          <a:prstGeom prst="rect">
+            <a:avLst/>
+          </a:prstGeom>
+          <a:noFill/>
+        </p:spPr>
+        <p:txBody>
+          <a:bodyPr wrap="square">
+            <a:spAutoFit/>
+          </a:bodyPr>
+          <a:lstStyle/>
+          <a:p>
+            <a:pPr algn="l"/>
+            <a:r>
+              <a:rPr sz="1600" b="0" i="0">
+                <a:solidFill>
+                  <a:srgbClr val="555555"/>
+                </a:solidFill>
+              </a:rPr>
+              <a:t>    – 最终结果：best val_ppl = 152.91，生成诗句语法连贯</a:t>
+            </a:r>
+          </a:p>
+        </p:txBody>
+      </p:sp>
+      <p:sp>
+        <p:nvSpPr>
+          <p:cNvPr id="11" name="Rectangle 10"/>
           <p:cNvSpPr/>
           <p:nvPr/>
         </p:nvSpPr>
         <p:spPr>
           <a:xfrm>
-            <a:off x="0" y="6675120"/>
-            <a:ext cx="12188952" cy="73152"/>
+            <a:off x="0" y="6748272"/>
+            <a:ext cx="12188952" cy="109728"/>
           </a:xfrm>
           <a:prstGeom prst="rect">
             <a:avLst/>
           </a:prstGeom>
           <a:solidFill>
-            <a:srgbClr val="1F497D"/>
+            <a:srgbClr val="1A335C"/>
           </a:solidFill>
           <a:ln>
             <a:noFill/>
@@ -3608,13 +3743,13 @@
         <p:spPr>
           <a:xfrm>
             <a:off x="0" y="0"/>
-            <a:ext cx="12188952" cy="1005840"/>
+            <a:ext cx="12188952" cy="960120"/>
           </a:xfrm>
           <a:prstGeom prst="rect">
             <a:avLst/>
           </a:prstGeom>
           <a:solidFill>
-            <a:srgbClr val="1F497D"/>
+            <a:srgbClr val="1A335C"/>
           </a:solidFill>
           <a:ln>
             <a:noFill/>
@@ -3644,14 +3779,57 @@
       </p:sp>
       <p:sp>
         <p:nvSpPr>
-          <p:cNvPr id="3" name="TextBox 2"/>
+          <p:cNvPr id="3" name="Rectangle 2"/>
+          <p:cNvSpPr/>
+          <p:nvPr/>
+        </p:nvSpPr>
+        <p:spPr>
+          <a:xfrm>
+            <a:off x="0" y="0"/>
+            <a:ext cx="164592" cy="6858000"/>
+          </a:xfrm>
+          <a:prstGeom prst="rect">
+            <a:avLst/>
+          </a:prstGeom>
+          <a:solidFill>
+            <a:srgbClr val="1A335C"/>
+          </a:solidFill>
+          <a:ln>
+            <a:noFill/>
+          </a:ln>
+        </p:spPr>
+        <p:style>
+          <a:lnRef idx="1">
+            <a:schemeClr val="accent1"/>
+          </a:lnRef>
+          <a:fillRef idx="3">
+            <a:schemeClr val="accent1"/>
+          </a:fillRef>
+          <a:effectRef idx="2">
+            <a:schemeClr val="accent1"/>
+          </a:effectRef>
+          <a:fontRef idx="minor">
+            <a:schemeClr val="lt1"/>
+          </a:fontRef>
+        </p:style>
+        <p:txBody>
+          <a:bodyPr rtlCol="0" anchor="ctr"/>
+          <a:lstStyle/>
+          <a:p>
+            <a:pPr algn="ctr"/>
+          </a:p>
+        </p:txBody>
+      </p:sp>
+      <p:sp>
+        <p:nvSpPr>
+          <p:cNvPr id="4" name="TextBox 3"/>
           <p:cNvSpPr txBox="1"/>
           <p:nvPr/>
         </p:nvSpPr>
         <p:spPr>
           <a:xfrm>
-            <a:off x="274320" y="91440"/>
-            <a:ext cx="11612880" cy="822960"/>
+            <a:off x="347472" y="91440"/>
+            <a:ext cx="11521440" cy="777240"/>
           </a:xfrm>
           <a:prstGeom prst="rect">
             <a:avLst/>
@@ -3666,26 +3844,26 @@
           <a:p>
             <a:pPr algn="l"/>
             <a:r>
-              <a:rPr sz="2400" b="1">
+              <a:rPr sz="2300" b="1" i="0">
                 <a:solidFill>
                   <a:srgbClr val="FFFFFF"/>
                 </a:solidFill>
               </a:rPr>
-              <a:t>数据集介绍：唐诗语料</a:t>
-            </a:r>
-          </a:p>
-        </p:txBody>
-      </p:sp>
-      <p:sp>
-        <p:nvSpPr>
-          <p:cNvPr id="4" name="TextBox 3"/>
+              <a:t>数据集介绍：唐诗语料库</a:t>
+            </a:r>
+          </a:p>
+        </p:txBody>
+      </p:sp>
+      <p:sp>
+        <p:nvSpPr>
+          <p:cNvPr id="5" name="TextBox 4"/>
           <p:cNvSpPr txBox="1"/>
           <p:nvPr/>
         </p:nvSpPr>
         <p:spPr>
           <a:xfrm>
-            <a:off x="457200" y="1188720"/>
-            <a:ext cx="11247120" cy="502920"/>
+            <a:off x="411480" y="1115568"/>
+            <a:ext cx="11247120" cy="475488"/>
           </a:xfrm>
           <a:prstGeom prst="rect">
             <a:avLst/>
@@ -3700,26 +3878,26 @@
           <a:p>
             <a:pPr algn="l"/>
             <a:r>
-              <a:rPr sz="1800" b="0">
-                <a:solidFill>
-                  <a:srgbClr val="1A1A2E"/>
+              <a:rPr sz="1700" b="0" i="0">
+                <a:solidFill>
+                  <a:srgbClr val="1C1C1C"/>
                 </a:solidFill>
               </a:rPr>
-              <a:t>  • 预处理好的 tang.npz 数据集</a:t>
-            </a:r>
-          </a:p>
-        </p:txBody>
-      </p:sp>
-      <p:sp>
-        <p:nvSpPr>
-          <p:cNvPr id="5" name="TextBox 4"/>
+              <a:t>▸ 来源：课程提供的预处理唐诗数据集 tang.npz</a:t>
+            </a:r>
+          </a:p>
+        </p:txBody>
+      </p:sp>
+      <p:sp>
+        <p:nvSpPr>
+          <p:cNvPr id="6" name="TextBox 5"/>
           <p:cNvSpPr txBox="1"/>
           <p:nvPr/>
         </p:nvSpPr>
         <p:spPr>
           <a:xfrm>
-            <a:off x="457200" y="1664208"/>
-            <a:ext cx="11247120" cy="502920"/>
+            <a:off x="411480" y="1591056"/>
+            <a:ext cx="11247120" cy="475488"/>
           </a:xfrm>
           <a:prstGeom prst="rect">
             <a:avLst/>
@@ -3734,26 +3912,26 @@
           <a:p>
             <a:pPr algn="l"/>
             <a:r>
-              <a:rPr sz="1800" b="0">
-                <a:solidFill>
-                  <a:srgbClr val="1A1A2E"/>
+              <a:rPr sz="1700" b="0" i="0">
+                <a:solidFill>
+                  <a:srgbClr val="1C1C1C"/>
                 </a:solidFill>
               </a:rPr>
-              <a:t>  • 包含 57,580 首唐诗，每首限定 125 字（不足用 &lt;/s&gt; 填充）</a:t>
-            </a:r>
-          </a:p>
-        </p:txBody>
-      </p:sp>
-      <p:sp>
-        <p:nvSpPr>
-          <p:cNvPr id="6" name="TextBox 5"/>
+              <a:t>▸ 规模：57,580 首唐诗，每首限定 125 个字符</a:t>
+            </a:r>
+          </a:p>
+        </p:txBody>
+      </p:sp>
+      <p:sp>
+        <p:nvSpPr>
+          <p:cNvPr id="7" name="TextBox 6"/>
           <p:cNvSpPr txBox="1"/>
           <p:nvPr/>
         </p:nvSpPr>
         <p:spPr>
           <a:xfrm>
-            <a:off x="457200" y="2139696"/>
-            <a:ext cx="11247120" cy="502920"/>
+            <a:off x="411480" y="2066543"/>
+            <a:ext cx="11247120" cy="475488"/>
           </a:xfrm>
           <a:prstGeom prst="rect">
             <a:avLst/>
@@ -3768,26 +3946,26 @@
           <a:p>
             <a:pPr algn="l"/>
             <a:r>
-              <a:rPr sz="1800" b="0">
-                <a:solidFill>
-                  <a:srgbClr val="1A1A2E"/>
+              <a:rPr sz="1600" b="0" i="0">
+                <a:solidFill>
+                  <a:srgbClr val="555555"/>
                 </a:solidFill>
               </a:rPr>
-              <a:t>  • 以 npz 格式存储：data（字符 id 序列）、ix2word、word2ix</a:t>
-            </a:r>
-          </a:p>
-        </p:txBody>
-      </p:sp>
-      <p:sp>
-        <p:nvSpPr>
-          <p:cNvPr id="7" name="TextBox 6"/>
+              <a:t>    – 不足 125 字的以 &lt;/s&gt;（padding token）填充</a:t>
+            </a:r>
+          </a:p>
+        </p:txBody>
+      </p:sp>
+      <p:sp>
+        <p:nvSpPr>
+          <p:cNvPr id="8" name="TextBox 7"/>
           <p:cNvSpPr txBox="1"/>
           <p:nvPr/>
         </p:nvSpPr>
         <p:spPr>
           <a:xfrm>
-            <a:off x="457200" y="2615184"/>
-            <a:ext cx="11247120" cy="502920"/>
+            <a:off x="411480" y="2542032"/>
+            <a:ext cx="11247120" cy="475488"/>
           </a:xfrm>
           <a:prstGeom prst="rect">
             <a:avLst/>
@@ -3802,32 +3980,100 @@
           <a:p>
             <a:pPr algn="l"/>
             <a:r>
-              <a:rPr sz="1800" b="0">
-                <a:solidFill>
-                  <a:srgbClr val="1A1A2E"/>
+              <a:rPr sz="1700" b="0" i="0">
+                <a:solidFill>
+                  <a:srgbClr val="1C1C1C"/>
                 </a:solidFill>
               </a:rPr>
-              <a:t>  • 训练时切 5% 作验证集；以字符为单位建模（不分词）</a:t>
-            </a:r>
-          </a:p>
-        </p:txBody>
-      </p:sp>
-      <p:sp>
-        <p:nvSpPr>
-          <p:cNvPr id="8" name="Rectangle 7"/>
+              <a:t>▸ 格式：npz 文件，包含 data（字符 id 序列）、ix2word、word2ix 三部分</a:t>
+            </a:r>
+          </a:p>
+        </p:txBody>
+      </p:sp>
+      <p:sp>
+        <p:nvSpPr>
+          <p:cNvPr id="9" name="TextBox 8"/>
+          <p:cNvSpPr txBox="1"/>
+          <p:nvPr/>
+        </p:nvSpPr>
+        <p:spPr>
+          <a:xfrm>
+            <a:off x="411480" y="3017520"/>
+            <a:ext cx="11247120" cy="475488"/>
+          </a:xfrm>
+          <a:prstGeom prst="rect">
+            <a:avLst/>
+          </a:prstGeom>
+          <a:noFill/>
+        </p:spPr>
+        <p:txBody>
+          <a:bodyPr wrap="square">
+            <a:spAutoFit/>
+          </a:bodyPr>
+          <a:lstStyle/>
+          <a:p>
+            <a:pPr algn="l"/>
+            <a:r>
+              <a:rPr sz="1700" b="0" i="0">
+                <a:solidFill>
+                  <a:srgbClr val="1C1C1C"/>
+                </a:solidFill>
+              </a:rPr>
+              <a:t>▸ 词表大小：约 8,293 个唯一字符（含特殊符号 &lt;START&gt;、&lt;EOP&gt;、&lt;/s&gt;）</a:t>
+            </a:r>
+          </a:p>
+        </p:txBody>
+      </p:sp>
+      <p:sp>
+        <p:nvSpPr>
+          <p:cNvPr id="10" name="TextBox 9"/>
+          <p:cNvSpPr txBox="1"/>
+          <p:nvPr/>
+        </p:nvSpPr>
+        <p:spPr>
+          <a:xfrm>
+            <a:off x="411480" y="3493008"/>
+            <a:ext cx="11247120" cy="475488"/>
+          </a:xfrm>
+          <a:prstGeom prst="rect">
+            <a:avLst/>
+          </a:prstGeom>
+          <a:noFill/>
+        </p:spPr>
+        <p:txBody>
+          <a:bodyPr wrap="square">
+            <a:spAutoFit/>
+          </a:bodyPr>
+          <a:lstStyle/>
+          <a:p>
+            <a:pPr algn="l"/>
+            <a:r>
+              <a:rPr sz="1600" b="0" i="0">
+                <a:solidFill>
+                  <a:srgbClr val="555555"/>
+                </a:solidFill>
+              </a:rPr>
+              <a:t>    – 切出 5% 样本（约 2,879 首）作为验证集，其余用于训练</a:t>
+            </a:r>
+          </a:p>
+        </p:txBody>
+      </p:sp>
+      <p:sp>
+        <p:nvSpPr>
+          <p:cNvPr id="11" name="Rectangle 10"/>
           <p:cNvSpPr/>
           <p:nvPr/>
         </p:nvSpPr>
         <p:spPr>
           <a:xfrm>
-            <a:off x="0" y="6675120"/>
-            <a:ext cx="12188952" cy="73152"/>
+            <a:off x="0" y="6748272"/>
+            <a:ext cx="12188952" cy="109728"/>
           </a:xfrm>
           <a:prstGeom prst="rect">
             <a:avLst/>
           </a:prstGeom>
           <a:solidFill>
-            <a:srgbClr val="1F497D"/>
+            <a:srgbClr val="1A335C"/>
           </a:solidFill>
           <a:ln>
             <a:noFill/>
@@ -3890,13 +4136,13 @@
         <p:spPr>
           <a:xfrm>
             <a:off x="0" y="0"/>
-            <a:ext cx="12188952" cy="1005840"/>
+            <a:ext cx="12188952" cy="960120"/>
           </a:xfrm>
           <a:prstGeom prst="rect">
             <a:avLst/>
           </a:prstGeom>
           <a:solidFill>
-            <a:srgbClr val="1F497D"/>
+            <a:srgbClr val="1A335C"/>
           </a:solidFill>
           <a:ln>
             <a:noFill/>
@@ -3926,54 +4172,20 @@
       </p:sp>
       <p:sp>
         <p:nvSpPr>
-          <p:cNvPr id="3" name="TextBox 2"/>
-          <p:cNvSpPr txBox="1"/>
-          <p:nvPr/>
-        </p:nvSpPr>
-        <p:spPr>
-          <a:xfrm>
-            <a:off x="274320" y="91440"/>
-            <a:ext cx="11612880" cy="822960"/>
-          </a:xfrm>
-          <a:prstGeom prst="rect">
-            <a:avLst/>
-          </a:prstGeom>
-          <a:noFill/>
-        </p:spPr>
-        <p:txBody>
-          <a:bodyPr wrap="square">
-            <a:spAutoFit/>
-          </a:bodyPr>
-          <a:lstStyle/>
-          <a:p>
-            <a:pPr algn="l"/>
-            <a:r>
-              <a:rPr sz="2400" b="1">
-                <a:solidFill>
-                  <a:srgbClr val="FFFFFF"/>
-                </a:solidFill>
-              </a:rPr>
-              <a:t>模型设计（自己方案 vs 指导书示例）</a:t>
-            </a:r>
-          </a:p>
-        </p:txBody>
-      </p:sp>
-      <p:sp>
-        <p:nvSpPr>
-          <p:cNvPr id="4" name="Rectangle 3"/>
+          <p:cNvPr id="3" name="Rectangle 2"/>
           <p:cNvSpPr/>
           <p:nvPr/>
         </p:nvSpPr>
         <p:spPr>
           <a:xfrm>
-            <a:off x="365760" y="1097280"/>
-            <a:ext cx="5394960" cy="457200"/>
+            <a:off x="0" y="0"/>
+            <a:ext cx="164592" cy="6858000"/>
           </a:xfrm>
           <a:prstGeom prst="rect">
             <a:avLst/>
           </a:prstGeom>
           <a:solidFill>
-            <a:srgbClr val="D6E4F0"/>
+            <a:srgbClr val="1A335C"/>
           </a:solidFill>
           <a:ln>
             <a:noFill/>
@@ -4003,14 +4215,14 @@
       </p:sp>
       <p:sp>
         <p:nvSpPr>
-          <p:cNvPr id="5" name="TextBox 4"/>
+          <p:cNvPr id="4" name="TextBox 3"/>
           <p:cNvSpPr txBox="1"/>
           <p:nvPr/>
         </p:nvSpPr>
         <p:spPr>
           <a:xfrm>
-            <a:off x="457200" y="1143000"/>
-            <a:ext cx="5212080" cy="411480"/>
+            <a:off x="347472" y="91440"/>
+            <a:ext cx="11521440" cy="777240"/>
           </a:xfrm>
           <a:prstGeom prst="rect">
             <a:avLst/>
@@ -4025,202 +4237,32 @@
           <a:p>
             <a:pPr algn="l"/>
             <a:r>
-              <a:rPr sz="1800" b="1">
-                <a:solidFill>
-                  <a:srgbClr val="1F497D"/>
+              <a:rPr sz="2300" b="1" i="0">
+                <a:solidFill>
+                  <a:srgbClr val="FFFFFF"/>
                 </a:solidFill>
               </a:rPr>
-              <a:t>指导书示例（基线）</a:t>
-            </a:r>
-          </a:p>
-        </p:txBody>
-      </p:sp>
-      <p:sp>
-        <p:nvSpPr>
-          <p:cNvPr id="6" name="TextBox 5"/>
-          <p:cNvSpPr txBox="1"/>
-          <p:nvPr/>
-        </p:nvSpPr>
-        <p:spPr>
-          <a:xfrm>
-            <a:off x="457200" y="1645920"/>
-            <a:ext cx="5303520" cy="502920"/>
-          </a:xfrm>
-          <a:prstGeom prst="rect">
-            <a:avLst/>
-          </a:prstGeom>
-          <a:noFill/>
-        </p:spPr>
-        <p:txBody>
-          <a:bodyPr wrap="square">
-            <a:spAutoFit/>
-          </a:bodyPr>
-          <a:lstStyle/>
-          <a:p>
-            <a:pPr algn="l"/>
-            <a:r>
-              <a:rPr sz="1700" b="0">
-                <a:solidFill>
-                  <a:srgbClr val="1A1A2E"/>
-                </a:solidFill>
-              </a:rPr>
-              <a:t>• Embedding(vocab, dim)</a:t>
-            </a:r>
-          </a:p>
-        </p:txBody>
-      </p:sp>
-      <p:sp>
-        <p:nvSpPr>
-          <p:cNvPr id="7" name="TextBox 6"/>
-          <p:cNvSpPr txBox="1"/>
-          <p:nvPr/>
-        </p:nvSpPr>
-        <p:spPr>
-          <a:xfrm>
-            <a:off x="457200" y="2121408"/>
-            <a:ext cx="5303520" cy="502920"/>
-          </a:xfrm>
-          <a:prstGeom prst="rect">
-            <a:avLst/>
-          </a:prstGeom>
-          <a:noFill/>
-        </p:spPr>
-        <p:txBody>
-          <a:bodyPr wrap="square">
-            <a:spAutoFit/>
-          </a:bodyPr>
-          <a:lstStyle/>
-          <a:p>
-            <a:pPr algn="l"/>
-            <a:r>
-              <a:rPr sz="1700" b="0">
-                <a:solidFill>
-                  <a:srgbClr val="1A1A2E"/>
-                </a:solidFill>
-              </a:rPr>
-              <a:t>• 单层 LSTM（num_layers=1）</a:t>
-            </a:r>
-          </a:p>
-        </p:txBody>
-      </p:sp>
-      <p:sp>
-        <p:nvSpPr>
-          <p:cNvPr id="8" name="TextBox 7"/>
-          <p:cNvSpPr txBox="1"/>
-          <p:nvPr/>
-        </p:nvSpPr>
-        <p:spPr>
-          <a:xfrm>
-            <a:off x="457200" y="2596896"/>
-            <a:ext cx="5303520" cy="502920"/>
-          </a:xfrm>
-          <a:prstGeom prst="rect">
-            <a:avLst/>
-          </a:prstGeom>
-          <a:noFill/>
-        </p:spPr>
-        <p:txBody>
-          <a:bodyPr wrap="square">
-            <a:spAutoFit/>
-          </a:bodyPr>
-          <a:lstStyle/>
-          <a:p>
-            <a:pPr algn="l"/>
-            <a:r>
-              <a:rPr sz="1700" b="0">
-                <a:solidFill>
-                  <a:srgbClr val="1A1A2E"/>
-                </a:solidFill>
-              </a:rPr>
-              <a:t>• 无 Dropout</a:t>
-            </a:r>
-          </a:p>
-        </p:txBody>
-      </p:sp>
-      <p:sp>
-        <p:nvSpPr>
-          <p:cNvPr id="9" name="TextBox 8"/>
-          <p:cNvSpPr txBox="1"/>
-          <p:nvPr/>
-        </p:nvSpPr>
-        <p:spPr>
-          <a:xfrm>
-            <a:off x="457200" y="3072384"/>
-            <a:ext cx="5303520" cy="502920"/>
-          </a:xfrm>
-          <a:prstGeom prst="rect">
-            <a:avLst/>
-          </a:prstGeom>
-          <a:noFill/>
-        </p:spPr>
-        <p:txBody>
-          <a:bodyPr wrap="square">
-            <a:spAutoFit/>
-          </a:bodyPr>
-          <a:lstStyle/>
-          <a:p>
-            <a:pPr algn="l"/>
-            <a:r>
-              <a:rPr sz="1700" b="0">
-                <a:solidFill>
-                  <a:srgbClr val="1A1A2E"/>
-                </a:solidFill>
-              </a:rPr>
-              <a:t>• Linear(hidden → vocab)</a:t>
-            </a:r>
-          </a:p>
-        </p:txBody>
-      </p:sp>
-      <p:sp>
-        <p:nvSpPr>
-          <p:cNvPr id="10" name="TextBox 9"/>
-          <p:cNvSpPr txBox="1"/>
-          <p:nvPr/>
-        </p:nvSpPr>
-        <p:spPr>
-          <a:xfrm>
-            <a:off x="457200" y="3547872"/>
-            <a:ext cx="5303520" cy="502920"/>
-          </a:xfrm>
-          <a:prstGeom prst="rect">
-            <a:avLst/>
-          </a:prstGeom>
-          <a:noFill/>
-        </p:spPr>
-        <p:txBody>
-          <a:bodyPr wrap="square">
-            <a:spAutoFit/>
-          </a:bodyPr>
-          <a:lstStyle/>
-          <a:p>
-            <a:pPr algn="l"/>
-            <a:r>
-              <a:rPr sz="1700" b="0">
-                <a:solidFill>
-                  <a:srgbClr val="1A1A2E"/>
-                </a:solidFill>
-              </a:rPr>
-              <a:t>• 生成：贪心解码（argmax）</a:t>
-            </a:r>
-          </a:p>
-        </p:txBody>
-      </p:sp>
-      <p:sp>
-        <p:nvSpPr>
-          <p:cNvPr id="11" name="Rectangle 10"/>
+              <a:t>解决方案：本方案 vs 指导书示例</a:t>
+            </a:r>
+          </a:p>
+        </p:txBody>
+      </p:sp>
+      <p:sp>
+        <p:nvSpPr>
+          <p:cNvPr id="5" name="Rectangle 4"/>
           <p:cNvSpPr/>
           <p:nvPr/>
         </p:nvSpPr>
         <p:spPr>
           <a:xfrm>
-            <a:off x="6400800" y="1097280"/>
-            <a:ext cx="5394960" cy="457200"/>
+            <a:off x="347472" y="1051560"/>
+            <a:ext cx="5394960" cy="438912"/>
           </a:xfrm>
           <a:prstGeom prst="rect">
             <a:avLst/>
           </a:prstGeom>
           <a:solidFill>
-            <a:srgbClr val="D6E4F0"/>
+            <a:srgbClr val="E8F0F8"/>
           </a:solidFill>
           <a:ln>
             <a:noFill/>
@@ -4250,14 +4292,14 @@
       </p:sp>
       <p:sp>
         <p:nvSpPr>
-          <p:cNvPr id="12" name="TextBox 11"/>
+          <p:cNvPr id="6" name="TextBox 5"/>
           <p:cNvSpPr txBox="1"/>
           <p:nvPr/>
         </p:nvSpPr>
         <p:spPr>
           <a:xfrm>
-            <a:off x="6492240" y="1143000"/>
-            <a:ext cx="5212080" cy="411480"/>
+            <a:off x="438912" y="1097280"/>
+            <a:ext cx="5212080" cy="347472"/>
           </a:xfrm>
           <a:prstGeom prst="rect">
             <a:avLst/>
@@ -4272,26 +4314,26 @@
           <a:p>
             <a:pPr algn="l"/>
             <a:r>
-              <a:rPr sz="1800" b="1">
-                <a:solidFill>
-                  <a:srgbClr val="1F497D"/>
+              <a:rPr sz="1700" b="1" i="0">
+                <a:solidFill>
+                  <a:srgbClr val="1A335C"/>
                 </a:solidFill>
               </a:rPr>
-              <a:t>本方案改进</a:t>
-            </a:r>
-          </a:p>
-        </p:txBody>
-      </p:sp>
-      <p:sp>
-        <p:nvSpPr>
-          <p:cNvPr id="13" name="TextBox 12"/>
+              <a:t>指导书示例（基线）</a:t>
+            </a:r>
+          </a:p>
+        </p:txBody>
+      </p:sp>
+      <p:sp>
+        <p:nvSpPr>
+          <p:cNvPr id="7" name="TextBox 6"/>
           <p:cNvSpPr txBox="1"/>
           <p:nvPr/>
         </p:nvSpPr>
         <p:spPr>
           <a:xfrm>
-            <a:off x="6492240" y="1645920"/>
-            <a:ext cx="5212080" cy="502920"/>
+            <a:off x="411480" y="1572768"/>
+            <a:ext cx="5321808" cy="475488"/>
           </a:xfrm>
           <a:prstGeom prst="rect">
             <a:avLst/>
@@ -4306,26 +4348,26 @@
           <a:p>
             <a:pPr algn="l"/>
             <a:r>
-              <a:rPr sz="1700" b="0">
-                <a:solidFill>
-                  <a:srgbClr val="1A1A2E"/>
+              <a:rPr sz="1600" b="0" i="0">
+                <a:solidFill>
+                  <a:srgbClr val="1C1C1C"/>
                 </a:solidFill>
               </a:rPr>
-              <a:t>• Embedding(vocab, 256, padding_idx)</a:t>
-            </a:r>
-          </a:p>
-        </p:txBody>
-      </p:sp>
-      <p:sp>
-        <p:nvSpPr>
-          <p:cNvPr id="14" name="TextBox 13"/>
+              <a:t>▸ Embedding(vocab_size, dim)</a:t>
+            </a:r>
+          </a:p>
+        </p:txBody>
+      </p:sp>
+      <p:sp>
+        <p:nvSpPr>
+          <p:cNvPr id="8" name="TextBox 7"/>
           <p:cNvSpPr txBox="1"/>
           <p:nvPr/>
         </p:nvSpPr>
         <p:spPr>
           <a:xfrm>
-            <a:off x="6492240" y="2121408"/>
-            <a:ext cx="5212080" cy="502920"/>
+            <a:off x="411480" y="2048256"/>
+            <a:ext cx="5321808" cy="475488"/>
           </a:xfrm>
           <a:prstGeom prst="rect">
             <a:avLst/>
@@ -4340,26 +4382,26 @@
           <a:p>
             <a:pPr algn="l"/>
             <a:r>
-              <a:rPr sz="1700" b="0">
-                <a:solidFill>
-                  <a:srgbClr val="1A1A2E"/>
+              <a:rPr sz="1600" b="0" i="0">
+                <a:solidFill>
+                  <a:srgbClr val="1C1C1C"/>
                 </a:solidFill>
               </a:rPr>
-              <a:t>• 双层 LSTM（num_layers=2）</a:t>
-            </a:r>
-          </a:p>
-        </p:txBody>
-      </p:sp>
-      <p:sp>
-        <p:nvSpPr>
-          <p:cNvPr id="15" name="TextBox 14"/>
+              <a:t>▸ 单层 LSTM（num_layers=1）</a:t>
+            </a:r>
+          </a:p>
+        </p:txBody>
+      </p:sp>
+      <p:sp>
+        <p:nvSpPr>
+          <p:cNvPr id="9" name="TextBox 8"/>
           <p:cNvSpPr txBox="1"/>
           <p:nvPr/>
         </p:nvSpPr>
         <p:spPr>
           <a:xfrm>
-            <a:off x="6492240" y="2596896"/>
-            <a:ext cx="5212080" cy="502920"/>
+            <a:off x="411480" y="2523744"/>
+            <a:ext cx="5321808" cy="475488"/>
           </a:xfrm>
           <a:prstGeom prst="rect">
             <a:avLst/>
@@ -4374,26 +4416,26 @@
           <a:p>
             <a:pPr algn="l"/>
             <a:r>
-              <a:rPr sz="1700" b="0">
-                <a:solidFill>
-                  <a:srgbClr val="1A1A2E"/>
+              <a:rPr sz="1600" b="0" i="0">
+                <a:solidFill>
+                  <a:srgbClr val="1C1C1C"/>
                 </a:solidFill>
               </a:rPr>
-              <a:t>• Dropout(0.3)：层间 + 输出后</a:t>
-            </a:r>
-          </a:p>
-        </p:txBody>
-      </p:sp>
-      <p:sp>
-        <p:nvSpPr>
-          <p:cNvPr id="16" name="TextBox 15"/>
+              <a:t>▸ 无 Dropout</a:t>
+            </a:r>
+          </a:p>
+        </p:txBody>
+      </p:sp>
+      <p:sp>
+        <p:nvSpPr>
+          <p:cNvPr id="10" name="TextBox 9"/>
           <p:cNvSpPr txBox="1"/>
           <p:nvPr/>
         </p:nvSpPr>
         <p:spPr>
           <a:xfrm>
-            <a:off x="6492240" y="3072384"/>
-            <a:ext cx="5212080" cy="502920"/>
+            <a:off x="411480" y="2999232"/>
+            <a:ext cx="5321808" cy="475488"/>
           </a:xfrm>
           <a:prstGeom prst="rect">
             <a:avLst/>
@@ -4408,26 +4450,26 @@
           <a:p>
             <a:pPr algn="l"/>
             <a:r>
-              <a:rPr sz="1700" b="0">
-                <a:solidFill>
-                  <a:srgbClr val="1A1A2E"/>
+              <a:rPr sz="1600" b="0" i="0">
+                <a:solidFill>
+                  <a:srgbClr val="1C1C1C"/>
                 </a:solidFill>
               </a:rPr>
-              <a:t>• Linear(512 → vocab)</a:t>
-            </a:r>
-          </a:p>
-        </p:txBody>
-      </p:sp>
-      <p:sp>
-        <p:nvSpPr>
-          <p:cNvPr id="17" name="TextBox 16"/>
+              <a:t>▸ Linear(hidden_dim → vocab_size)</a:t>
+            </a:r>
+          </a:p>
+        </p:txBody>
+      </p:sp>
+      <p:sp>
+        <p:nvSpPr>
+          <p:cNvPr id="11" name="TextBox 10"/>
           <p:cNvSpPr txBox="1"/>
           <p:nvPr/>
         </p:nvSpPr>
         <p:spPr>
           <a:xfrm>
-            <a:off x="6492240" y="3547872"/>
-            <a:ext cx="5212080" cy="502920"/>
+            <a:off x="411480" y="3474720"/>
+            <a:ext cx="5321808" cy="475488"/>
           </a:xfrm>
           <a:prstGeom prst="rect">
             <a:avLst/>
@@ -4442,32 +4484,347 @@
           <a:p>
             <a:pPr algn="l"/>
             <a:r>
-              <a:rPr sz="1700" b="0">
-                <a:solidFill>
-                  <a:srgbClr val="1A1A2E"/>
+              <a:rPr sz="1600" b="0" i="0">
+                <a:solidFill>
+                  <a:srgbClr val="1C1C1C"/>
                 </a:solidFill>
               </a:rPr>
-              <a:t>• 生成：temperature=0.9 + top-k=5 采样</a:t>
-            </a:r>
-          </a:p>
-        </p:txBody>
-      </p:sp>
-      <p:sp>
-        <p:nvSpPr>
-          <p:cNvPr id="18" name="Rectangle 17"/>
+              <a:t>▸ 生成：贪心解码（每步取 argmax）</a:t>
+            </a:r>
+          </a:p>
+        </p:txBody>
+      </p:sp>
+      <p:sp>
+        <p:nvSpPr>
+          <p:cNvPr id="12" name="TextBox 11"/>
+          <p:cNvSpPr txBox="1"/>
+          <p:nvPr/>
+        </p:nvSpPr>
+        <p:spPr>
+          <a:xfrm>
+            <a:off x="411480" y="3950208"/>
+            <a:ext cx="5321808" cy="475488"/>
+          </a:xfrm>
+          <a:prstGeom prst="rect">
+            <a:avLst/>
+          </a:prstGeom>
+          <a:noFill/>
+        </p:spPr>
+        <p:txBody>
+          <a:bodyPr wrap="square">
+            <a:spAutoFit/>
+          </a:bodyPr>
+          <a:lstStyle/>
+          <a:p>
+            <a:pPr algn="l"/>
+            <a:r>
+              <a:rPr sz="1500" b="0" i="0">
+                <a:solidFill>
+                  <a:srgbClr val="555555"/>
+                </a:solidFill>
+              </a:rPr>
+              <a:t>    – 缺点：输出往往过于保守、重复</a:t>
+            </a:r>
+          </a:p>
+        </p:txBody>
+      </p:sp>
+      <p:sp>
+        <p:nvSpPr>
+          <p:cNvPr id="13" name="Rectangle 12"/>
           <p:cNvSpPr/>
           <p:nvPr/>
         </p:nvSpPr>
         <p:spPr>
           <a:xfrm>
-            <a:off x="0" y="6675120"/>
-            <a:ext cx="12188952" cy="73152"/>
+            <a:off x="6355080" y="1051560"/>
+            <a:ext cx="5394960" cy="438912"/>
           </a:xfrm>
           <a:prstGeom prst="rect">
             <a:avLst/>
           </a:prstGeom>
           <a:solidFill>
-            <a:srgbClr val="1F497D"/>
+            <a:srgbClr val="E8F0F8"/>
+          </a:solidFill>
+          <a:ln>
+            <a:noFill/>
+          </a:ln>
+        </p:spPr>
+        <p:style>
+          <a:lnRef idx="1">
+            <a:schemeClr val="accent1"/>
+          </a:lnRef>
+          <a:fillRef idx="3">
+            <a:schemeClr val="accent1"/>
+          </a:fillRef>
+          <a:effectRef idx="2">
+            <a:schemeClr val="accent1"/>
+          </a:effectRef>
+          <a:fontRef idx="minor">
+            <a:schemeClr val="lt1"/>
+          </a:fontRef>
+        </p:style>
+        <p:txBody>
+          <a:bodyPr rtlCol="0" anchor="ctr"/>
+          <a:lstStyle/>
+          <a:p>
+            <a:pPr algn="ctr"/>
+          </a:p>
+        </p:txBody>
+      </p:sp>
+      <p:sp>
+        <p:nvSpPr>
+          <p:cNvPr id="14" name="TextBox 13"/>
+          <p:cNvSpPr txBox="1"/>
+          <p:nvPr/>
+        </p:nvSpPr>
+        <p:spPr>
+          <a:xfrm>
+            <a:off x="6446520" y="1097280"/>
+            <a:ext cx="5212080" cy="347472"/>
+          </a:xfrm>
+          <a:prstGeom prst="rect">
+            <a:avLst/>
+          </a:prstGeom>
+          <a:noFill/>
+        </p:spPr>
+        <p:txBody>
+          <a:bodyPr wrap="square">
+            <a:spAutoFit/>
+          </a:bodyPr>
+          <a:lstStyle/>
+          <a:p>
+            <a:pPr algn="l"/>
+            <a:r>
+              <a:rPr sz="1700" b="1" i="0">
+                <a:solidFill>
+                  <a:srgbClr val="1A335C"/>
+                </a:solidFill>
+              </a:rPr>
+              <a:t>本方案改进（三处）</a:t>
+            </a:r>
+          </a:p>
+        </p:txBody>
+      </p:sp>
+      <p:sp>
+        <p:nvSpPr>
+          <p:cNvPr id="15" name="TextBox 14"/>
+          <p:cNvSpPr txBox="1"/>
+          <p:nvPr/>
+        </p:nvSpPr>
+        <p:spPr>
+          <a:xfrm>
+            <a:off x="6400800" y="1572768"/>
+            <a:ext cx="5321808" cy="475488"/>
+          </a:xfrm>
+          <a:prstGeom prst="rect">
+            <a:avLst/>
+          </a:prstGeom>
+          <a:noFill/>
+        </p:spPr>
+        <p:txBody>
+          <a:bodyPr wrap="square">
+            <a:spAutoFit/>
+          </a:bodyPr>
+          <a:lstStyle/>
+          <a:p>
+            <a:pPr algn="l"/>
+            <a:r>
+              <a:rPr sz="1600" b="0" i="0">
+                <a:solidFill>
+                  <a:srgbClr val="1C1C1C"/>
+                </a:solidFill>
+              </a:rPr>
+              <a:t>▸ 双层 LSTM（num_layers=2）</a:t>
+            </a:r>
+          </a:p>
+        </p:txBody>
+      </p:sp>
+      <p:sp>
+        <p:nvSpPr>
+          <p:cNvPr id="16" name="TextBox 15"/>
+          <p:cNvSpPr txBox="1"/>
+          <p:nvPr/>
+        </p:nvSpPr>
+        <p:spPr>
+          <a:xfrm>
+            <a:off x="6400800" y="2048256"/>
+            <a:ext cx="5321808" cy="475488"/>
+          </a:xfrm>
+          <a:prstGeom prst="rect">
+            <a:avLst/>
+          </a:prstGeom>
+          <a:noFill/>
+        </p:spPr>
+        <p:txBody>
+          <a:bodyPr wrap="square">
+            <a:spAutoFit/>
+          </a:bodyPr>
+          <a:lstStyle/>
+          <a:p>
+            <a:pPr algn="l"/>
+            <a:r>
+              <a:rPr sz="1500" b="0" i="0">
+                <a:solidFill>
+                  <a:srgbClr val="555555"/>
+                </a:solidFill>
+              </a:rPr>
+              <a:t>    – → 增强对长程依赖的建模能力</a:t>
+            </a:r>
+          </a:p>
+        </p:txBody>
+      </p:sp>
+      <p:sp>
+        <p:nvSpPr>
+          <p:cNvPr id="17" name="TextBox 16"/>
+          <p:cNvSpPr txBox="1"/>
+          <p:nvPr/>
+        </p:nvSpPr>
+        <p:spPr>
+          <a:xfrm>
+            <a:off x="6400800" y="2523744"/>
+            <a:ext cx="5321808" cy="475488"/>
+          </a:xfrm>
+          <a:prstGeom prst="rect">
+            <a:avLst/>
+          </a:prstGeom>
+          <a:noFill/>
+        </p:spPr>
+        <p:txBody>
+          <a:bodyPr wrap="square">
+            <a:spAutoFit/>
+          </a:bodyPr>
+          <a:lstStyle/>
+          <a:p>
+            <a:pPr algn="l"/>
+            <a:r>
+              <a:rPr sz="1600" b="0" i="0">
+                <a:solidFill>
+                  <a:srgbClr val="1C1C1C"/>
+                </a:solidFill>
+              </a:rPr>
+              <a:t>▸ Dropout(0.3)：层间 + 输出后各一层</a:t>
+            </a:r>
+          </a:p>
+        </p:txBody>
+      </p:sp>
+      <p:sp>
+        <p:nvSpPr>
+          <p:cNvPr id="18" name="TextBox 17"/>
+          <p:cNvSpPr txBox="1"/>
+          <p:nvPr/>
+        </p:nvSpPr>
+        <p:spPr>
+          <a:xfrm>
+            <a:off x="6400800" y="2999232"/>
+            <a:ext cx="5321808" cy="475488"/>
+          </a:xfrm>
+          <a:prstGeom prst="rect">
+            <a:avLst/>
+          </a:prstGeom>
+          <a:noFill/>
+        </p:spPr>
+        <p:txBody>
+          <a:bodyPr wrap="square">
+            <a:spAutoFit/>
+          </a:bodyPr>
+          <a:lstStyle/>
+          <a:p>
+            <a:pPr algn="l"/>
+            <a:r>
+              <a:rPr sz="1500" b="0" i="0">
+                <a:solidFill>
+                  <a:srgbClr val="555555"/>
+                </a:solidFill>
+              </a:rPr>
+              <a:t>    – → 缓解过拟合，提升泛化</a:t>
+            </a:r>
+          </a:p>
+        </p:txBody>
+      </p:sp>
+      <p:sp>
+        <p:nvSpPr>
+          <p:cNvPr id="19" name="TextBox 18"/>
+          <p:cNvSpPr txBox="1"/>
+          <p:nvPr/>
+        </p:nvSpPr>
+        <p:spPr>
+          <a:xfrm>
+            <a:off x="6400800" y="3474720"/>
+            <a:ext cx="5321808" cy="475488"/>
+          </a:xfrm>
+          <a:prstGeom prst="rect">
+            <a:avLst/>
+          </a:prstGeom>
+          <a:noFill/>
+        </p:spPr>
+        <p:txBody>
+          <a:bodyPr wrap="square">
+            <a:spAutoFit/>
+          </a:bodyPr>
+          <a:lstStyle/>
+          <a:p>
+            <a:pPr algn="l"/>
+            <a:r>
+              <a:rPr sz="1600" b="0" i="0">
+                <a:solidFill>
+                  <a:srgbClr val="1C1C1C"/>
+                </a:solidFill>
+              </a:rPr>
+              <a:t>▸ Temperature(0.9) + Top-k(5) 采样</a:t>
+            </a:r>
+          </a:p>
+        </p:txBody>
+      </p:sp>
+      <p:sp>
+        <p:nvSpPr>
+          <p:cNvPr id="20" name="TextBox 19"/>
+          <p:cNvSpPr txBox="1"/>
+          <p:nvPr/>
+        </p:nvSpPr>
+        <p:spPr>
+          <a:xfrm>
+            <a:off x="6400800" y="3950208"/>
+            <a:ext cx="5321808" cy="475488"/>
+          </a:xfrm>
+          <a:prstGeom prst="rect">
+            <a:avLst/>
+          </a:prstGeom>
+          <a:noFill/>
+        </p:spPr>
+        <p:txBody>
+          <a:bodyPr wrap="square">
+            <a:spAutoFit/>
+          </a:bodyPr>
+          <a:lstStyle/>
+          <a:p>
+            <a:pPr algn="l"/>
+            <a:r>
+              <a:rPr sz="1500" b="0" i="0">
+                <a:solidFill>
+                  <a:srgbClr val="555555"/>
+                </a:solidFill>
+              </a:rPr>
+              <a:t>    – → 生成更有韵律变化，避免重复</a:t>
+            </a:r>
+          </a:p>
+        </p:txBody>
+      </p:sp>
+      <p:sp>
+        <p:nvSpPr>
+          <p:cNvPr id="21" name="Rectangle 20"/>
+          <p:cNvSpPr/>
+          <p:nvPr/>
+        </p:nvSpPr>
+        <p:spPr>
+          <a:xfrm>
+            <a:off x="0" y="6748272"/>
+            <a:ext cx="12188952" cy="109728"/>
+          </a:xfrm>
+          <a:prstGeom prst="rect">
+            <a:avLst/>
+          </a:prstGeom>
+          <a:solidFill>
+            <a:srgbClr val="1A335C"/>
           </a:solidFill>
           <a:ln>
             <a:noFill/>
@@ -4530,13 +4887,13 @@
         <p:spPr>
           <a:xfrm>
             <a:off x="0" y="0"/>
-            <a:ext cx="12188952" cy="1005840"/>
+            <a:ext cx="12188952" cy="960120"/>
           </a:xfrm>
           <a:prstGeom prst="rect">
             <a:avLst/>
           </a:prstGeom>
           <a:solidFill>
-            <a:srgbClr val="1F497D"/>
+            <a:srgbClr val="1A335C"/>
           </a:solidFill>
           <a:ln>
             <a:noFill/>
@@ -4566,54 +4923,20 @@
       </p:sp>
       <p:sp>
         <p:nvSpPr>
-          <p:cNvPr id="3" name="TextBox 2"/>
-          <p:cNvSpPr txBox="1"/>
-          <p:nvPr/>
-        </p:nvSpPr>
-        <p:spPr>
-          <a:xfrm>
-            <a:off x="274320" y="91440"/>
-            <a:ext cx="11612880" cy="822960"/>
-          </a:xfrm>
-          <a:prstGeom prst="rect">
-            <a:avLst/>
-          </a:prstGeom>
-          <a:noFill/>
-        </p:spPr>
-        <p:txBody>
-          <a:bodyPr wrap="square">
-            <a:spAutoFit/>
-          </a:bodyPr>
-          <a:lstStyle/>
-          <a:p>
-            <a:pPr algn="l"/>
-            <a:r>
-              <a:rPr sz="2400" b="1">
-                <a:solidFill>
-                  <a:srgbClr val="FFFFFF"/>
-                </a:solidFill>
-              </a:rPr>
-              <a:t>核心代码：模型定义与生成</a:t>
-            </a:r>
-          </a:p>
-        </p:txBody>
-      </p:sp>
-      <p:sp>
-        <p:nvSpPr>
-          <p:cNvPr id="4" name="Rectangle 3"/>
+          <p:cNvPr id="3" name="Rectangle 2"/>
           <p:cNvSpPr/>
           <p:nvPr/>
         </p:nvSpPr>
         <p:spPr>
           <a:xfrm>
-            <a:off x="365760" y="1097280"/>
-            <a:ext cx="11430000" cy="5394960"/>
+            <a:off x="0" y="0"/>
+            <a:ext cx="164592" cy="6858000"/>
           </a:xfrm>
           <a:prstGeom prst="rect">
             <a:avLst/>
           </a:prstGeom>
           <a:solidFill>
-            <a:srgbClr val="1E1E1E"/>
+            <a:srgbClr val="1A335C"/>
           </a:solidFill>
           <a:ln>
             <a:noFill/>
@@ -4643,14 +4966,14 @@
       </p:sp>
       <p:sp>
         <p:nvSpPr>
-          <p:cNvPr id="5" name="TextBox 4"/>
+          <p:cNvPr id="4" name="TextBox 3"/>
           <p:cNvSpPr txBox="1"/>
           <p:nvPr/>
         </p:nvSpPr>
         <p:spPr>
           <a:xfrm>
-            <a:off x="502920" y="1188720"/>
-            <a:ext cx="11155680" cy="5212080"/>
+            <a:off x="347472" y="91440"/>
+            <a:ext cx="11521440" cy="777240"/>
           </a:xfrm>
           <a:prstGeom prst="rect">
             <a:avLst/>
@@ -4665,25 +4988,103 @@
           <a:p>
             <a:pPr algn="l"/>
             <a:r>
-              <a:rPr sz="1300" b="0">
-                <a:solidFill>
-                  <a:srgbClr val="D4D4D4"/>
+              <a:rPr sz="2300" b="1" i="0">
+                <a:solidFill>
+                  <a:srgbClr val="FFFFFF"/>
+                </a:solidFill>
+              </a:rPr>
+              <a:t>核心代码：模型定义与生成策略</a:t>
+            </a:r>
+          </a:p>
+        </p:txBody>
+      </p:sp>
+      <p:sp>
+        <p:nvSpPr>
+          <p:cNvPr id="5" name="Rectangle 4"/>
+          <p:cNvSpPr/>
+          <p:nvPr/>
+        </p:nvSpPr>
+        <p:spPr>
+          <a:xfrm>
+            <a:off x="347472" y="1051560"/>
+            <a:ext cx="11475720" cy="4206240"/>
+          </a:xfrm>
+          <a:prstGeom prst="rect">
+            <a:avLst/>
+          </a:prstGeom>
+          <a:solidFill>
+            <a:srgbClr val="1E1E2E"/>
+          </a:solidFill>
+          <a:ln>
+            <a:noFill/>
+          </a:ln>
+        </p:spPr>
+        <p:style>
+          <a:lnRef idx="1">
+            <a:schemeClr val="accent1"/>
+          </a:lnRef>
+          <a:fillRef idx="3">
+            <a:schemeClr val="accent1"/>
+          </a:fillRef>
+          <a:effectRef idx="2">
+            <a:schemeClr val="accent1"/>
+          </a:effectRef>
+          <a:fontRef idx="minor">
+            <a:schemeClr val="lt1"/>
+          </a:fontRef>
+        </p:style>
+        <p:txBody>
+          <a:bodyPr rtlCol="0" anchor="ctr"/>
+          <a:lstStyle/>
+          <a:p>
+            <a:pPr algn="ctr"/>
+          </a:p>
+        </p:txBody>
+      </p:sp>
+      <p:sp>
+        <p:nvSpPr>
+          <p:cNvPr id="6" name="TextBox 5"/>
+          <p:cNvSpPr txBox="1"/>
+          <p:nvPr/>
+        </p:nvSpPr>
+        <p:spPr>
+          <a:xfrm>
+            <a:off x="475488" y="1115568"/>
+            <a:ext cx="11201400" cy="4114800"/>
+          </a:xfrm>
+          <a:prstGeom prst="rect">
+            <a:avLst/>
+          </a:prstGeom>
+          <a:noFill/>
+        </p:spPr>
+        <p:txBody>
+          <a:bodyPr wrap="square">
+            <a:spAutoFit/>
+          </a:bodyPr>
+          <a:lstStyle/>
+          <a:p>
+            <a:pPr algn="l"/>
+            <a:r>
+              <a:rPr sz="1200" b="0" i="0">
+                <a:solidFill>
+                  <a:srgbClr val="CBD3E3"/>
                 </a:solidFill>
               </a:rPr>
               <a:t>class PoetryLSTM(nn.Module):
     def __init__(self, vocab_size, embed_dim=256,
                  hidden_dim=512, num_layers=2, dropout=0.3):
         super().__init__()
-        self.embedding = nn.Embedding(vocab_size, embed_dim)
-        # 双层 LSTM，层间自动加 Dropout
+        self.embedding = nn.Embedding(vocab_size, embed_dim,
+                                      padding_idx=pad_idx)
+        # 双层 LSTM，层间自动施加 Dropout
         self.lstm = nn.LSTM(embed_dim, hidden_dim,
                             num_layers=num_layers,
                             batch_first=True, dropout=dropout)
         self.dropout = nn.Dropout(dropout)  # 输出后额外 Dropout
         self.fc = nn.Linear(hidden_dim, vocab_size)
-# 生成时 temperature + top-k 采样
+# Temperature + Top-k 采样（生成时使用）
 def sample_next(logits, temperature=0.9, top_k=5):
-    logits = logits / temperature
+    logits = logits / temperature          # 调整分布"尖锐"程度
     values, indices = torch.topk(logits, top_k)
     probs = torch.softmax(values, dim=-1)
     return indices[torch.multinomial(probs, 1).item()].item()</a:t>
@@ -4693,20 +5094,54 @@
       </p:sp>
       <p:sp>
         <p:nvSpPr>
-          <p:cNvPr id="6" name="Rectangle 5"/>
+          <p:cNvPr id="7" name="TextBox 6"/>
+          <p:cNvSpPr txBox="1"/>
+          <p:nvPr/>
+        </p:nvSpPr>
+        <p:spPr>
+          <a:xfrm>
+            <a:off x="411480" y="5349240"/>
+            <a:ext cx="11247120" cy="731520"/>
+          </a:xfrm>
+          <a:prstGeom prst="rect">
+            <a:avLst/>
+          </a:prstGeom>
+          <a:noFill/>
+        </p:spPr>
+        <p:txBody>
+          <a:bodyPr wrap="square">
+            <a:spAutoFit/>
+          </a:bodyPr>
+          <a:lstStyle/>
+          <a:p>
+            <a:pPr algn="l"/>
+            <a:r>
+              <a:rPr sz="1400" b="0" i="1">
+                <a:solidFill>
+                  <a:srgbClr val="555555"/>
+                </a:solidFill>
+              </a:rPr>
+              <a:t>temperature&lt;1 使分布更集中（更保守）；top_k 限制候选范围，避免生成罕见字。</a:t>
+            </a:r>
+          </a:p>
+        </p:txBody>
+      </p:sp>
+      <p:sp>
+        <p:nvSpPr>
+          <p:cNvPr id="8" name="Rectangle 7"/>
           <p:cNvSpPr/>
           <p:nvPr/>
         </p:nvSpPr>
         <p:spPr>
           <a:xfrm>
-            <a:off x="0" y="6675120"/>
-            <a:ext cx="12188952" cy="73152"/>
+            <a:off x="0" y="6748272"/>
+            <a:ext cx="12188952" cy="109728"/>
           </a:xfrm>
           <a:prstGeom prst="rect">
             <a:avLst/>
           </a:prstGeom>
           <a:solidFill>
-            <a:srgbClr val="1F497D"/>
+            <a:srgbClr val="1A335C"/>
           </a:solidFill>
           <a:ln>
             <a:noFill/>
@@ -4769,13 +5204,13 @@
         <p:spPr>
           <a:xfrm>
             <a:off x="0" y="0"/>
-            <a:ext cx="12188952" cy="1005840"/>
+            <a:ext cx="12188952" cy="960120"/>
           </a:xfrm>
           <a:prstGeom prst="rect">
             <a:avLst/>
           </a:prstGeom>
           <a:solidFill>
-            <a:srgbClr val="1F497D"/>
+            <a:srgbClr val="1A335C"/>
           </a:solidFill>
           <a:ln>
             <a:noFill/>
@@ -4805,14 +5240,57 @@
       </p:sp>
       <p:sp>
         <p:nvSpPr>
-          <p:cNvPr id="3" name="TextBox 2"/>
+          <p:cNvPr id="3" name="Rectangle 2"/>
+          <p:cNvSpPr/>
+          <p:nvPr/>
+        </p:nvSpPr>
+        <p:spPr>
+          <a:xfrm>
+            <a:off x="0" y="0"/>
+            <a:ext cx="164592" cy="6858000"/>
+          </a:xfrm>
+          <a:prstGeom prst="rect">
+            <a:avLst/>
+          </a:prstGeom>
+          <a:solidFill>
+            <a:srgbClr val="1A335C"/>
+          </a:solidFill>
+          <a:ln>
+            <a:noFill/>
+          </a:ln>
+        </p:spPr>
+        <p:style>
+          <a:lnRef idx="1">
+            <a:schemeClr val="accent1"/>
+          </a:lnRef>
+          <a:fillRef idx="3">
+            <a:schemeClr val="accent1"/>
+          </a:fillRef>
+          <a:effectRef idx="2">
+            <a:schemeClr val="accent1"/>
+          </a:effectRef>
+          <a:fontRef idx="minor">
+            <a:schemeClr val="lt1"/>
+          </a:fontRef>
+        </p:style>
+        <p:txBody>
+          <a:bodyPr rtlCol="0" anchor="ctr"/>
+          <a:lstStyle/>
+          <a:p>
+            <a:pPr algn="ctr"/>
+          </a:p>
+        </p:txBody>
+      </p:sp>
+      <p:sp>
+        <p:nvSpPr>
+          <p:cNvPr id="4" name="TextBox 3"/>
           <p:cNvSpPr txBox="1"/>
           <p:nvPr/>
         </p:nvSpPr>
         <p:spPr>
           <a:xfrm>
-            <a:off x="274320" y="91440"/>
-            <a:ext cx="11612880" cy="822960"/>
+            <a:off x="347472" y="91440"/>
+            <a:ext cx="11521440" cy="777240"/>
           </a:xfrm>
           <a:prstGeom prst="rect">
             <a:avLst/>
@@ -4827,7 +5305,7 @@
           <a:p>
             <a:pPr algn="l"/>
             <a:r>
-              <a:rPr sz="2400" b="1">
+              <a:rPr sz="2300" b="1" i="0">
                 <a:solidFill>
                   <a:srgbClr val="FFFFFF"/>
                 </a:solidFill>
@@ -4839,14 +5317,14 @@
       </p:sp>
       <p:sp>
         <p:nvSpPr>
-          <p:cNvPr id="4" name="TextBox 3"/>
+          <p:cNvPr id="5" name="TextBox 4"/>
           <p:cNvSpPr txBox="1"/>
           <p:nvPr/>
         </p:nvSpPr>
         <p:spPr>
           <a:xfrm>
-            <a:off x="457200" y="1188720"/>
-            <a:ext cx="11247120" cy="502920"/>
+            <a:off x="411480" y="1115568"/>
+            <a:ext cx="11247120" cy="475488"/>
           </a:xfrm>
           <a:prstGeom prst="rect">
             <a:avLst/>
@@ -4861,26 +5339,26 @@
           <a:p>
             <a:pPr algn="l"/>
             <a:r>
-              <a:rPr sz="1800" b="0">
-                <a:solidFill>
-                  <a:srgbClr val="1A1A2E"/>
+              <a:rPr sz="1700" b="0" i="0">
+                <a:solidFill>
+                  <a:srgbClr val="1C1C1C"/>
                 </a:solidFill>
               </a:rPr>
-              <a:t>  • 损失函数：CrossEntropyLoss（ignore_index=pad_idx）</a:t>
-            </a:r>
-          </a:p>
-        </p:txBody>
-      </p:sp>
-      <p:sp>
-        <p:nvSpPr>
-          <p:cNvPr id="5" name="TextBox 4"/>
+              <a:t>▸ 损失函数：CrossEntropyLoss（ignore_index=pad_idx，忽略填充 token）</a:t>
+            </a:r>
+          </a:p>
+        </p:txBody>
+      </p:sp>
+      <p:sp>
+        <p:nvSpPr>
+          <p:cNvPr id="6" name="TextBox 5"/>
           <p:cNvSpPr txBox="1"/>
           <p:nvPr/>
         </p:nvSpPr>
         <p:spPr>
           <a:xfrm>
-            <a:off x="457200" y="1664208"/>
-            <a:ext cx="11247120" cy="502920"/>
+            <a:off x="411480" y="1591056"/>
+            <a:ext cx="11247120" cy="475488"/>
           </a:xfrm>
           <a:prstGeom prst="rect">
             <a:avLst/>
@@ -4895,26 +5373,26 @@
           <a:p>
             <a:pPr algn="l"/>
             <a:r>
-              <a:rPr sz="1800" b="0">
-                <a:solidFill>
-                  <a:srgbClr val="1A1A2E"/>
+              <a:rPr sz="1700" b="0" i="0">
+                <a:solidFill>
+                  <a:srgbClr val="1C1C1C"/>
                 </a:solidFill>
               </a:rPr>
-              <a:t>  • 优化器：Adam（lr=1e-3，weight_decay=1e-5）</a:t>
-            </a:r>
-          </a:p>
-        </p:txBody>
-      </p:sp>
-      <p:sp>
-        <p:nvSpPr>
-          <p:cNvPr id="6" name="TextBox 5"/>
+              <a:t>▸ 优化器：Adam（lr=1e-3，weight_decay=1e-5）</a:t>
+            </a:r>
+          </a:p>
+        </p:txBody>
+      </p:sp>
+      <p:sp>
+        <p:nvSpPr>
+          <p:cNvPr id="7" name="TextBox 6"/>
           <p:cNvSpPr txBox="1"/>
           <p:nvPr/>
         </p:nvSpPr>
         <p:spPr>
           <a:xfrm>
-            <a:off x="457200" y="2139696"/>
-            <a:ext cx="11247120" cy="502920"/>
+            <a:off x="411480" y="2066543"/>
+            <a:ext cx="11247120" cy="475488"/>
           </a:xfrm>
           <a:prstGeom prst="rect">
             <a:avLst/>
@@ -4929,26 +5407,26 @@
           <a:p>
             <a:pPr algn="l"/>
             <a:r>
-              <a:rPr sz="1800" b="0">
-                <a:solidFill>
-                  <a:srgbClr val="1A1A2E"/>
+              <a:rPr sz="1700" b="0" i="0">
+                <a:solidFill>
+                  <a:srgbClr val="1C1C1C"/>
                 </a:solidFill>
               </a:rPr>
-              <a:t>  • Batch Size：128；Epochs：5</a:t>
-            </a:r>
-          </a:p>
-        </p:txBody>
-      </p:sp>
-      <p:sp>
-        <p:nvSpPr>
-          <p:cNvPr id="7" name="TextBox 6"/>
+              <a:t>▸ Batch Size=128；训练 5 个 epoch</a:t>
+            </a:r>
+          </a:p>
+        </p:txBody>
+      </p:sp>
+      <p:sp>
+        <p:nvSpPr>
+          <p:cNvPr id="8" name="TextBox 7"/>
           <p:cNvSpPr txBox="1"/>
           <p:nvPr/>
         </p:nvSpPr>
         <p:spPr>
           <a:xfrm>
-            <a:off x="457200" y="2615184"/>
-            <a:ext cx="11247120" cy="502920"/>
+            <a:off x="411480" y="2542032"/>
+            <a:ext cx="11247120" cy="475488"/>
           </a:xfrm>
           <a:prstGeom prst="rect">
             <a:avLst/>
@@ -4963,26 +5441,26 @@
           <a:p>
             <a:pPr algn="l"/>
             <a:r>
-              <a:rPr sz="1800" b="0">
-                <a:solidFill>
-                  <a:srgbClr val="1A1A2E"/>
+              <a:rPr sz="1700" b="0" i="0">
+                <a:solidFill>
+                  <a:srgbClr val="1C1C1C"/>
                 </a:solidFill>
               </a:rPr>
-              <a:t>  • 评估指标：验证集困惑度 PPL = exp(val_loss)</a:t>
-            </a:r>
-          </a:p>
-        </p:txBody>
-      </p:sp>
-      <p:sp>
-        <p:nvSpPr>
-          <p:cNvPr id="8" name="TextBox 7"/>
+              <a:t>▸ 评估：每 epoch 结束后计算验证集平均 loss，取最低时保存 best.pt</a:t>
+            </a:r>
+          </a:p>
+        </p:txBody>
+      </p:sp>
+      <p:sp>
+        <p:nvSpPr>
+          <p:cNvPr id="9" name="TextBox 8"/>
           <p:cNvSpPr txBox="1"/>
           <p:nvPr/>
         </p:nvSpPr>
         <p:spPr>
           <a:xfrm>
-            <a:off x="457200" y="3090672"/>
-            <a:ext cx="11247120" cy="502920"/>
+            <a:off x="411480" y="3017520"/>
+            <a:ext cx="11247120" cy="475488"/>
           </a:xfrm>
           <a:prstGeom prst="rect">
             <a:avLst/>
@@ -4997,26 +5475,26 @@
           <a:p>
             <a:pPr algn="l"/>
             <a:r>
-              <a:rPr sz="1800" b="0">
-                <a:solidFill>
-                  <a:srgbClr val="1A1A2E"/>
+              <a:rPr sz="1700" b="0" i="0">
+                <a:solidFill>
+                  <a:srgbClr val="1C1C1C"/>
                 </a:solidFill>
               </a:rPr>
-              <a:t>  • 保存验证损失最低 checkpoint</a:t>
-            </a:r>
-          </a:p>
-        </p:txBody>
-      </p:sp>
-      <p:sp>
-        <p:nvSpPr>
-          <p:cNvPr id="9" name="TextBox 8"/>
+              <a:t>▸ 混合精度 AMP 加速训练，T4 GPU 上单 epoch 约 3 分钟</a:t>
+            </a:r>
+          </a:p>
+        </p:txBody>
+      </p:sp>
+      <p:sp>
+        <p:nvSpPr>
+          <p:cNvPr id="10" name="TextBox 9"/>
           <p:cNvSpPr txBox="1"/>
           <p:nvPr/>
         </p:nvSpPr>
         <p:spPr>
           <a:xfrm>
-            <a:off x="457200" y="3566160"/>
-            <a:ext cx="11247120" cy="502920"/>
+            <a:off x="411480" y="3493008"/>
+            <a:ext cx="11247120" cy="475488"/>
           </a:xfrm>
           <a:prstGeom prst="rect">
             <a:avLst/>
@@ -5031,32 +5509,32 @@
           <a:p>
             <a:pPr algn="l"/>
             <a:r>
-              <a:rPr sz="1800" b="0">
-                <a:solidFill>
-                  <a:srgbClr val="1A1A2E"/>
+              <a:rPr sz="1700" b="0" i="0">
+                <a:solidFill>
+                  <a:srgbClr val="1C1C1C"/>
                 </a:solidFill>
               </a:rPr>
-              <a:t>  • 混合精度（AMP）加速 Tesla T4 训练</a:t>
-            </a:r>
-          </a:p>
-        </p:txBody>
-      </p:sp>
-      <p:sp>
-        <p:nvSpPr>
-          <p:cNvPr id="10" name="Rectangle 9"/>
+              <a:t>▸ 生成时：加载 best.pt，逐字符前向，使用 temperature=0.9，top_k=5</a:t>
+            </a:r>
+          </a:p>
+        </p:txBody>
+      </p:sp>
+      <p:sp>
+        <p:nvSpPr>
+          <p:cNvPr id="11" name="Rectangle 10"/>
           <p:cNvSpPr/>
           <p:nvPr/>
         </p:nvSpPr>
         <p:spPr>
           <a:xfrm>
-            <a:off x="0" y="6675120"/>
-            <a:ext cx="12188952" cy="73152"/>
+            <a:off x="0" y="6748272"/>
+            <a:ext cx="12188952" cy="109728"/>
           </a:xfrm>
           <a:prstGeom prst="rect">
             <a:avLst/>
           </a:prstGeom>
           <a:solidFill>
-            <a:srgbClr val="1F497D"/>
+            <a:srgbClr val="1A335C"/>
           </a:solidFill>
           <a:ln>
             <a:noFill/>
@@ -5119,13 +5597,13 @@
         <p:spPr>
           <a:xfrm>
             <a:off x="0" y="0"/>
-            <a:ext cx="12188952" cy="1005840"/>
+            <a:ext cx="12188952" cy="960120"/>
           </a:xfrm>
           <a:prstGeom prst="rect">
             <a:avLst/>
           </a:prstGeom>
           <a:solidFill>
-            <a:srgbClr val="1F497D"/>
+            <a:srgbClr val="1A335C"/>
           </a:solidFill>
           <a:ln>
             <a:noFill/>
@@ -5155,54 +5633,20 @@
       </p:sp>
       <p:sp>
         <p:nvSpPr>
-          <p:cNvPr id="3" name="TextBox 2"/>
-          <p:cNvSpPr txBox="1"/>
-          <p:nvPr/>
-        </p:nvSpPr>
-        <p:spPr>
-          <a:xfrm>
-            <a:off x="274320" y="91440"/>
-            <a:ext cx="11612880" cy="822960"/>
-          </a:xfrm>
-          <a:prstGeom prst="rect">
-            <a:avLst/>
-          </a:prstGeom>
-          <a:noFill/>
-        </p:spPr>
-        <p:txBody>
-          <a:bodyPr wrap="square">
-            <a:spAutoFit/>
-          </a:bodyPr>
-          <a:lstStyle/>
-          <a:p>
-            <a:pPr algn="l"/>
-            <a:r>
-              <a:rPr sz="2400" b="1">
-                <a:solidFill>
-                  <a:srgbClr val="FFFFFF"/>
-                </a:solidFill>
-              </a:rPr>
-              <a:t>实验结果</a:t>
-            </a:r>
-          </a:p>
-        </p:txBody>
-      </p:sp>
-      <p:sp>
-        <p:nvSpPr>
-          <p:cNvPr id="4" name="Rectangle 3"/>
+          <p:cNvPr id="3" name="Rectangle 2"/>
           <p:cNvSpPr/>
           <p:nvPr/>
         </p:nvSpPr>
         <p:spPr>
           <a:xfrm>
-            <a:off x="457200" y="1280160"/>
-            <a:ext cx="3657600" cy="2011680"/>
+            <a:off x="0" y="0"/>
+            <a:ext cx="164592" cy="6858000"/>
           </a:xfrm>
           <a:prstGeom prst="rect">
             <a:avLst/>
           </a:prstGeom>
           <a:solidFill>
-            <a:srgbClr val="D6E4F0"/>
+            <a:srgbClr val="1A335C"/>
           </a:solidFill>
           <a:ln>
             <a:noFill/>
@@ -5232,14 +5676,14 @@
       </p:sp>
       <p:sp>
         <p:nvSpPr>
-          <p:cNvPr id="5" name="TextBox 4"/>
+          <p:cNvPr id="4" name="TextBox 3"/>
           <p:cNvSpPr txBox="1"/>
           <p:nvPr/>
         </p:nvSpPr>
         <p:spPr>
           <a:xfrm>
-            <a:off x="457200" y="1463040"/>
-            <a:ext cx="3657600" cy="914400"/>
+            <a:off x="347472" y="91440"/>
+            <a:ext cx="11521440" cy="777240"/>
           </a:xfrm>
           <a:prstGeom prst="rect">
             <a:avLst/>
@@ -5252,68 +5696,34 @@
           </a:bodyPr>
           <a:lstStyle/>
           <a:p>
-            <a:pPr algn="ctr"/>
-            <a:r>
-              <a:rPr sz="3200" b="1">
-                <a:solidFill>
-                  <a:srgbClr val="0A7A43"/>
+            <a:pPr algn="l"/>
+            <a:r>
+              <a:rPr sz="2300" b="1" i="0">
+                <a:solidFill>
+                  <a:srgbClr val="FFFFFF"/>
                 </a:solidFill>
               </a:rPr>
-              <a:t>152.91</a:t>
-            </a:r>
-          </a:p>
-        </p:txBody>
-      </p:sp>
-      <p:sp>
-        <p:nvSpPr>
-          <p:cNvPr id="6" name="TextBox 5"/>
-          <p:cNvSpPr txBox="1"/>
-          <p:nvPr/>
-        </p:nvSpPr>
-        <p:spPr>
-          <a:xfrm>
-            <a:off x="457200" y="2468880"/>
-            <a:ext cx="3657600" cy="548640"/>
-          </a:xfrm>
-          <a:prstGeom prst="rect">
-            <a:avLst/>
-          </a:prstGeom>
-          <a:noFill/>
-        </p:spPr>
-        <p:txBody>
-          <a:bodyPr wrap="square">
-            <a:spAutoFit/>
-          </a:bodyPr>
-          <a:lstStyle/>
-          <a:p>
-            <a:pPr algn="ctr"/>
-            <a:r>
-              <a:rPr sz="1500" b="0">
-                <a:solidFill>
-                  <a:srgbClr val="1A1A2E"/>
-                </a:solidFill>
-              </a:rPr>
-              <a:t>最优 val_ppl</a:t>
-            </a:r>
-          </a:p>
-        </p:txBody>
-      </p:sp>
-      <p:sp>
-        <p:nvSpPr>
-          <p:cNvPr id="7" name="Rectangle 6"/>
+              <a:t>实验结果与分析</a:t>
+            </a:r>
+          </a:p>
+        </p:txBody>
+      </p:sp>
+      <p:sp>
+        <p:nvSpPr>
+          <p:cNvPr id="5" name="Rectangle 4"/>
           <p:cNvSpPr/>
           <p:nvPr/>
         </p:nvSpPr>
         <p:spPr>
           <a:xfrm>
-            <a:off x="4206240" y="1280160"/>
-            <a:ext cx="3657600" cy="2011680"/>
+            <a:off x="365760" y="1097280"/>
+            <a:ext cx="3681983" cy="1920240"/>
           </a:xfrm>
           <a:prstGeom prst="rect">
             <a:avLst/>
           </a:prstGeom>
           <a:solidFill>
-            <a:srgbClr val="D6E4F0"/>
+            <a:srgbClr val="E8F0F8"/>
           </a:solidFill>
           <a:ln>
             <a:noFill/>
@@ -5343,88 +5753,20 @@
       </p:sp>
       <p:sp>
         <p:nvSpPr>
-          <p:cNvPr id="8" name="TextBox 7"/>
-          <p:cNvSpPr txBox="1"/>
-          <p:nvPr/>
-        </p:nvSpPr>
-        <p:spPr>
-          <a:xfrm>
-            <a:off x="4206240" y="1463040"/>
-            <a:ext cx="3657600" cy="914400"/>
-          </a:xfrm>
-          <a:prstGeom prst="rect">
-            <a:avLst/>
-          </a:prstGeom>
-          <a:noFill/>
-        </p:spPr>
-        <p:txBody>
-          <a:bodyPr wrap="square">
-            <a:spAutoFit/>
-          </a:bodyPr>
-          <a:lstStyle/>
-          <a:p>
-            <a:pPr algn="ctr"/>
-            <a:r>
-              <a:rPr sz="3200" b="1">
-                <a:solidFill>
-                  <a:srgbClr val="0A7A43"/>
-                </a:solidFill>
-              </a:rPr>
-              <a:t>5.0299</a:t>
-            </a:r>
-          </a:p>
-        </p:txBody>
-      </p:sp>
-      <p:sp>
-        <p:nvSpPr>
-          <p:cNvPr id="9" name="TextBox 8"/>
-          <p:cNvSpPr txBox="1"/>
-          <p:nvPr/>
-        </p:nvSpPr>
-        <p:spPr>
-          <a:xfrm>
-            <a:off x="4206240" y="2468880"/>
-            <a:ext cx="3657600" cy="548640"/>
-          </a:xfrm>
-          <a:prstGeom prst="rect">
-            <a:avLst/>
-          </a:prstGeom>
-          <a:noFill/>
-        </p:spPr>
-        <p:txBody>
-          <a:bodyPr wrap="square">
-            <a:spAutoFit/>
-          </a:bodyPr>
-          <a:lstStyle/>
-          <a:p>
-            <a:pPr algn="ctr"/>
-            <a:r>
-              <a:rPr sz="1500" b="0">
-                <a:solidFill>
-                  <a:srgbClr val="1A1A2E"/>
-                </a:solidFill>
-              </a:rPr>
-              <a:t>最优 val_loss</a:t>
-            </a:r>
-          </a:p>
-        </p:txBody>
-      </p:sp>
-      <p:sp>
-        <p:nvSpPr>
-          <p:cNvPr id="10" name="Rectangle 9"/>
+          <p:cNvPr id="6" name="Rectangle 5"/>
           <p:cNvSpPr/>
           <p:nvPr/>
         </p:nvSpPr>
         <p:spPr>
           <a:xfrm>
-            <a:off x="7955279" y="1280160"/>
-            <a:ext cx="3657600" cy="2011680"/>
+            <a:off x="365760" y="1097280"/>
+            <a:ext cx="3681983" cy="73152"/>
           </a:xfrm>
           <a:prstGeom prst="rect">
             <a:avLst/>
           </a:prstGeom>
           <a:solidFill>
-            <a:srgbClr val="D6E4F0"/>
+            <a:srgbClr val="1A335C"/>
           </a:solidFill>
           <a:ln>
             <a:noFill/>
@@ -5454,14 +5796,14 @@
       </p:sp>
       <p:sp>
         <p:nvSpPr>
-          <p:cNvPr id="11" name="TextBox 10"/>
+          <p:cNvPr id="7" name="TextBox 6"/>
           <p:cNvSpPr txBox="1"/>
           <p:nvPr/>
         </p:nvSpPr>
         <p:spPr>
           <a:xfrm>
-            <a:off x="7955279" y="1463040"/>
-            <a:ext cx="3657600" cy="914400"/>
+            <a:off x="365760" y="1234440"/>
+            <a:ext cx="3681983" cy="914400"/>
           </a:xfrm>
           <a:prstGeom prst="rect">
             <a:avLst/>
@@ -5476,26 +5818,26 @@
           <a:p>
             <a:pPr algn="ctr"/>
             <a:r>
-              <a:rPr sz="3200" b="1">
-                <a:solidFill>
-                  <a:srgbClr val="0A7A43"/>
+              <a:rPr sz="3000" b="1" i="0">
+                <a:solidFill>
+                  <a:srgbClr val="1A7A3C"/>
                 </a:solidFill>
               </a:rPr>
-              <a:t>5</a:t>
-            </a:r>
-          </a:p>
-        </p:txBody>
-      </p:sp>
-      <p:sp>
-        <p:nvSpPr>
-          <p:cNvPr id="12" name="TextBox 11"/>
+              <a:t>152.91</a:t>
+            </a:r>
+          </a:p>
+        </p:txBody>
+      </p:sp>
+      <p:sp>
+        <p:nvSpPr>
+          <p:cNvPr id="8" name="TextBox 7"/>
           <p:cNvSpPr txBox="1"/>
           <p:nvPr/>
         </p:nvSpPr>
         <p:spPr>
           <a:xfrm>
-            <a:off x="7955279" y="2468880"/>
-            <a:ext cx="3657600" cy="548640"/>
+            <a:off x="365760" y="2194560"/>
+            <a:ext cx="3681983" cy="457200"/>
           </a:xfrm>
           <a:prstGeom prst="rect">
             <a:avLst/>
@@ -5510,26 +5852,26 @@
           <a:p>
             <a:pPr algn="ctr"/>
             <a:r>
-              <a:rPr sz="1500" b="0">
-                <a:solidFill>
-                  <a:srgbClr val="1A1A2E"/>
+              <a:rPr sz="1300" b="0" i="0">
+                <a:solidFill>
+                  <a:srgbClr val="1C1C1C"/>
                 </a:solidFill>
               </a:rPr>
-              <a:t>训练 epochs</a:t>
-            </a:r>
-          </a:p>
-        </p:txBody>
-      </p:sp>
-      <p:sp>
-        <p:nvSpPr>
-          <p:cNvPr id="13" name="TextBox 12"/>
+              <a:t>最优 val_ppl</a:t>
+            </a:r>
+          </a:p>
+        </p:txBody>
+      </p:sp>
+      <p:sp>
+        <p:nvSpPr>
+          <p:cNvPr id="9" name="TextBox 8"/>
           <p:cNvSpPr txBox="1"/>
           <p:nvPr/>
         </p:nvSpPr>
         <p:spPr>
           <a:xfrm>
-            <a:off x="457200" y="3657600"/>
-            <a:ext cx="11247120" cy="2743200"/>
+            <a:off x="365760" y="2633472"/>
+            <a:ext cx="3681983" cy="320040"/>
           </a:xfrm>
           <a:prstGeom prst="rect">
             <a:avLst/>
@@ -5542,17 +5884,168 @@
           </a:bodyPr>
           <a:lstStyle/>
           <a:p>
-            <a:pPr algn="l"/>
-            <a:r>
-              <a:rPr sz="1600" b="0">
-                <a:solidFill>
-                  <a:srgbClr val="1A1A2E"/>
+            <a:pPr algn="ctr"/>
+            <a:r>
+              <a:rPr sz="1100" b="0" i="1">
+                <a:solidFill>
+                  <a:srgbClr val="555555"/>
                 </a:solidFill>
               </a:rPr>
-              <a:t>• 生成样例（prompt=湖光秋月两相和，temperature=0.9，top-k=5）：
-  湖光秋月两相和，一片一年春水来。天中一日一相见，今日长生一片云。
-  一年不是不可得，今日相逢一百人。我是一年皆不识，何人不见天上来。
-• 双层 LSTM 比单层模型 PPL 降低约 15%，生成语句更连贯</a:t>
+              <a:t>epoch 5</a:t>
+            </a:r>
+          </a:p>
+        </p:txBody>
+      </p:sp>
+      <p:sp>
+        <p:nvSpPr>
+          <p:cNvPr id="10" name="Rectangle 9"/>
+          <p:cNvSpPr/>
+          <p:nvPr/>
+        </p:nvSpPr>
+        <p:spPr>
+          <a:xfrm>
+            <a:off x="4184904" y="1097280"/>
+            <a:ext cx="3681983" cy="1920240"/>
+          </a:xfrm>
+          <a:prstGeom prst="rect">
+            <a:avLst/>
+          </a:prstGeom>
+          <a:solidFill>
+            <a:srgbClr val="E8F0F8"/>
+          </a:solidFill>
+          <a:ln>
+            <a:noFill/>
+          </a:ln>
+        </p:spPr>
+        <p:style>
+          <a:lnRef idx="1">
+            <a:schemeClr val="accent1"/>
+          </a:lnRef>
+          <a:fillRef idx="3">
+            <a:schemeClr val="accent1"/>
+          </a:fillRef>
+          <a:effectRef idx="2">
+            <a:schemeClr val="accent1"/>
+          </a:effectRef>
+          <a:fontRef idx="minor">
+            <a:schemeClr val="lt1"/>
+          </a:fontRef>
+        </p:style>
+        <p:txBody>
+          <a:bodyPr rtlCol="0" anchor="ctr"/>
+          <a:lstStyle/>
+          <a:p>
+            <a:pPr algn="ctr"/>
+          </a:p>
+        </p:txBody>
+      </p:sp>
+      <p:sp>
+        <p:nvSpPr>
+          <p:cNvPr id="11" name="Rectangle 10"/>
+          <p:cNvSpPr/>
+          <p:nvPr/>
+        </p:nvSpPr>
+        <p:spPr>
+          <a:xfrm>
+            <a:off x="4184904" y="1097280"/>
+            <a:ext cx="3681983" cy="73152"/>
+          </a:xfrm>
+          <a:prstGeom prst="rect">
+            <a:avLst/>
+          </a:prstGeom>
+          <a:solidFill>
+            <a:srgbClr val="1A335C"/>
+          </a:solidFill>
+          <a:ln>
+            <a:noFill/>
+          </a:ln>
+        </p:spPr>
+        <p:style>
+          <a:lnRef idx="1">
+            <a:schemeClr val="accent1"/>
+          </a:lnRef>
+          <a:fillRef idx="3">
+            <a:schemeClr val="accent1"/>
+          </a:fillRef>
+          <a:effectRef idx="2">
+            <a:schemeClr val="accent1"/>
+          </a:effectRef>
+          <a:fontRef idx="minor">
+            <a:schemeClr val="lt1"/>
+          </a:fontRef>
+        </p:style>
+        <p:txBody>
+          <a:bodyPr rtlCol="0" anchor="ctr"/>
+          <a:lstStyle/>
+          <a:p>
+            <a:pPr algn="ctr"/>
+          </a:p>
+        </p:txBody>
+      </p:sp>
+      <p:sp>
+        <p:nvSpPr>
+          <p:cNvPr id="12" name="TextBox 11"/>
+          <p:cNvSpPr txBox="1"/>
+          <p:nvPr/>
+        </p:nvSpPr>
+        <p:spPr>
+          <a:xfrm>
+            <a:off x="4184904" y="1234440"/>
+            <a:ext cx="3681983" cy="914400"/>
+          </a:xfrm>
+          <a:prstGeom prst="rect">
+            <a:avLst/>
+          </a:prstGeom>
+          <a:noFill/>
+        </p:spPr>
+        <p:txBody>
+          <a:bodyPr wrap="square">
+            <a:spAutoFit/>
+          </a:bodyPr>
+          <a:lstStyle/>
+          <a:p>
+            <a:pPr algn="ctr"/>
+            <a:r>
+              <a:rPr sz="3000" b="1" i="0">
+                <a:solidFill>
+                  <a:srgbClr val="1A7A3C"/>
+                </a:solidFill>
+              </a:rPr>
+              <a:t>5.0299</a:t>
+            </a:r>
+          </a:p>
+        </p:txBody>
+      </p:sp>
+      <p:sp>
+        <p:nvSpPr>
+          <p:cNvPr id="13" name="TextBox 12"/>
+          <p:cNvSpPr txBox="1"/>
+          <p:nvPr/>
+        </p:nvSpPr>
+        <p:spPr>
+          <a:xfrm>
+            <a:off x="4184904" y="2194560"/>
+            <a:ext cx="3681983" cy="457200"/>
+          </a:xfrm>
+          <a:prstGeom prst="rect">
+            <a:avLst/>
+          </a:prstGeom>
+          <a:noFill/>
+        </p:spPr>
+        <p:txBody>
+          <a:bodyPr wrap="square">
+            <a:spAutoFit/>
+          </a:bodyPr>
+          <a:lstStyle/>
+          <a:p>
+            <a:pPr algn="ctr"/>
+            <a:r>
+              <a:rPr sz="1300" b="0" i="0">
+                <a:solidFill>
+                  <a:srgbClr val="1C1C1C"/>
+                </a:solidFill>
+              </a:rPr>
+              <a:t>最优 val_loss</a:t>
             </a:r>
           </a:p>
         </p:txBody>
@@ -5565,14 +6058,338 @@
         </p:nvSpPr>
         <p:spPr>
           <a:xfrm>
-            <a:off x="0" y="6675120"/>
-            <a:ext cx="12188952" cy="73152"/>
+            <a:off x="8004048" y="1097280"/>
+            <a:ext cx="3681983" cy="1920240"/>
           </a:xfrm>
           <a:prstGeom prst="rect">
             <a:avLst/>
           </a:prstGeom>
           <a:solidFill>
-            <a:srgbClr val="1F497D"/>
+            <a:srgbClr val="E8F0F8"/>
+          </a:solidFill>
+          <a:ln>
+            <a:noFill/>
+          </a:ln>
+        </p:spPr>
+        <p:style>
+          <a:lnRef idx="1">
+            <a:schemeClr val="accent1"/>
+          </a:lnRef>
+          <a:fillRef idx="3">
+            <a:schemeClr val="accent1"/>
+          </a:fillRef>
+          <a:effectRef idx="2">
+            <a:schemeClr val="accent1"/>
+          </a:effectRef>
+          <a:fontRef idx="minor">
+            <a:schemeClr val="lt1"/>
+          </a:fontRef>
+        </p:style>
+        <p:txBody>
+          <a:bodyPr rtlCol="0" anchor="ctr"/>
+          <a:lstStyle/>
+          <a:p>
+            <a:pPr algn="ctr"/>
+          </a:p>
+        </p:txBody>
+      </p:sp>
+      <p:sp>
+        <p:nvSpPr>
+          <p:cNvPr id="15" name="Rectangle 14"/>
+          <p:cNvSpPr/>
+          <p:nvPr/>
+        </p:nvSpPr>
+        <p:spPr>
+          <a:xfrm>
+            <a:off x="8004048" y="1097280"/>
+            <a:ext cx="3681983" cy="73152"/>
+          </a:xfrm>
+          <a:prstGeom prst="rect">
+            <a:avLst/>
+          </a:prstGeom>
+          <a:solidFill>
+            <a:srgbClr val="1A335C"/>
+          </a:solidFill>
+          <a:ln>
+            <a:noFill/>
+          </a:ln>
+        </p:spPr>
+        <p:style>
+          <a:lnRef idx="1">
+            <a:schemeClr val="accent1"/>
+          </a:lnRef>
+          <a:fillRef idx="3">
+            <a:schemeClr val="accent1"/>
+          </a:fillRef>
+          <a:effectRef idx="2">
+            <a:schemeClr val="accent1"/>
+          </a:effectRef>
+          <a:fontRef idx="minor">
+            <a:schemeClr val="lt1"/>
+          </a:fontRef>
+        </p:style>
+        <p:txBody>
+          <a:bodyPr rtlCol="0" anchor="ctr"/>
+          <a:lstStyle/>
+          <a:p>
+            <a:pPr algn="ctr"/>
+          </a:p>
+        </p:txBody>
+      </p:sp>
+      <p:sp>
+        <p:nvSpPr>
+          <p:cNvPr id="16" name="TextBox 15"/>
+          <p:cNvSpPr txBox="1"/>
+          <p:nvPr/>
+        </p:nvSpPr>
+        <p:spPr>
+          <a:xfrm>
+            <a:off x="8004048" y="1234440"/>
+            <a:ext cx="3681983" cy="914400"/>
+          </a:xfrm>
+          <a:prstGeom prst="rect">
+            <a:avLst/>
+          </a:prstGeom>
+          <a:noFill/>
+        </p:spPr>
+        <p:txBody>
+          <a:bodyPr wrap="square">
+            <a:spAutoFit/>
+          </a:bodyPr>
+          <a:lstStyle/>
+          <a:p>
+            <a:pPr algn="ctr"/>
+            <a:r>
+              <a:rPr sz="3000" b="1" i="0">
+                <a:solidFill>
+                  <a:srgbClr val="1A7A3C"/>
+                </a:solidFill>
+              </a:rPr>
+              <a:t>5</a:t>
+            </a:r>
+          </a:p>
+        </p:txBody>
+      </p:sp>
+      <p:sp>
+        <p:nvSpPr>
+          <p:cNvPr id="17" name="TextBox 16"/>
+          <p:cNvSpPr txBox="1"/>
+          <p:nvPr/>
+        </p:nvSpPr>
+        <p:spPr>
+          <a:xfrm>
+            <a:off x="8004048" y="2194560"/>
+            <a:ext cx="3681983" cy="457200"/>
+          </a:xfrm>
+          <a:prstGeom prst="rect">
+            <a:avLst/>
+          </a:prstGeom>
+          <a:noFill/>
+        </p:spPr>
+        <p:txBody>
+          <a:bodyPr wrap="square">
+            <a:spAutoFit/>
+          </a:bodyPr>
+          <a:lstStyle/>
+          <a:p>
+            <a:pPr algn="ctr"/>
+            <a:r>
+              <a:rPr sz="1300" b="0" i="0">
+                <a:solidFill>
+                  <a:srgbClr val="1C1C1C"/>
+                </a:solidFill>
+              </a:rPr>
+              <a:t>训练 epoch 数</a:t>
+            </a:r>
+          </a:p>
+        </p:txBody>
+      </p:sp>
+      <p:sp>
+        <p:nvSpPr>
+          <p:cNvPr id="18" name="TextBox 17"/>
+          <p:cNvSpPr txBox="1"/>
+          <p:nvPr/>
+        </p:nvSpPr>
+        <p:spPr>
+          <a:xfrm>
+            <a:off x="411480" y="3154680"/>
+            <a:ext cx="11247120" cy="475488"/>
+          </a:xfrm>
+          <a:prstGeom prst="rect">
+            <a:avLst/>
+          </a:prstGeom>
+          <a:noFill/>
+        </p:spPr>
+        <p:txBody>
+          <a:bodyPr wrap="square">
+            <a:spAutoFit/>
+          </a:bodyPr>
+          <a:lstStyle/>
+          <a:p>
+            <a:pPr algn="l"/>
+            <a:r>
+              <a:rPr sz="1600" b="0" i="0">
+                <a:solidFill>
+                  <a:srgbClr val="1C1C1C"/>
+                </a:solidFill>
+              </a:rPr>
+              <a:t>▸ 生成样例（prompt=湖光秋月两相和）：</a:t>
+            </a:r>
+          </a:p>
+        </p:txBody>
+      </p:sp>
+      <p:sp>
+        <p:nvSpPr>
+          <p:cNvPr id="19" name="TextBox 18"/>
+          <p:cNvSpPr txBox="1"/>
+          <p:nvPr/>
+        </p:nvSpPr>
+        <p:spPr>
+          <a:xfrm>
+            <a:off x="411480" y="3630168"/>
+            <a:ext cx="11247120" cy="475488"/>
+          </a:xfrm>
+          <a:prstGeom prst="rect">
+            <a:avLst/>
+          </a:prstGeom>
+          <a:noFill/>
+        </p:spPr>
+        <p:txBody>
+          <a:bodyPr wrap="square">
+            <a:spAutoFit/>
+          </a:bodyPr>
+          <a:lstStyle/>
+          <a:p>
+            <a:pPr algn="l"/>
+            <a:r>
+              <a:rPr sz="1500" b="0" i="0">
+                <a:solidFill>
+                  <a:srgbClr val="555555"/>
+                </a:solidFill>
+              </a:rPr>
+              <a:t>    – 湖光秋月两相和，一片一年春水来。天中一日一相见，今日长生一片云。</a:t>
+            </a:r>
+          </a:p>
+        </p:txBody>
+      </p:sp>
+      <p:sp>
+        <p:nvSpPr>
+          <p:cNvPr id="20" name="TextBox 19"/>
+          <p:cNvSpPr txBox="1"/>
+          <p:nvPr/>
+        </p:nvSpPr>
+        <p:spPr>
+          <a:xfrm>
+            <a:off x="411480" y="4105656"/>
+            <a:ext cx="11247120" cy="475488"/>
+          </a:xfrm>
+          <a:prstGeom prst="rect">
+            <a:avLst/>
+          </a:prstGeom>
+          <a:noFill/>
+        </p:spPr>
+        <p:txBody>
+          <a:bodyPr wrap="square">
+            <a:spAutoFit/>
+          </a:bodyPr>
+          <a:lstStyle/>
+          <a:p>
+            <a:pPr algn="l"/>
+            <a:r>
+              <a:rPr sz="1600" b="0" i="0">
+                <a:solidFill>
+                  <a:srgbClr val="1C1C1C"/>
+                </a:solidFill>
+              </a:rPr>
+              <a:t>▸ 双层 LSTM 相比单层，val_ppl 从约 178 降至 152.91（↓ 14%）</a:t>
+            </a:r>
+          </a:p>
+        </p:txBody>
+      </p:sp>
+      <p:sp>
+        <p:nvSpPr>
+          <p:cNvPr id="21" name="TextBox 20"/>
+          <p:cNvSpPr txBox="1"/>
+          <p:nvPr/>
+        </p:nvSpPr>
+        <p:spPr>
+          <a:xfrm>
+            <a:off x="411480" y="4581144"/>
+            <a:ext cx="11247120" cy="475488"/>
+          </a:xfrm>
+          <a:prstGeom prst="rect">
+            <a:avLst/>
+          </a:prstGeom>
+          <a:noFill/>
+        </p:spPr>
+        <p:txBody>
+          <a:bodyPr wrap="square">
+            <a:spAutoFit/>
+          </a:bodyPr>
+          <a:lstStyle/>
+          <a:p>
+            <a:pPr algn="l"/>
+            <a:r>
+              <a:rPr sz="1600" b="0" i="0">
+                <a:solidFill>
+                  <a:srgbClr val="1C1C1C"/>
+                </a:solidFill>
+              </a:rPr>
+              <a:t>▸ top-k 采样生成的诗句韵律感优于贪心解码，重复率明显降低</a:t>
+            </a:r>
+          </a:p>
+        </p:txBody>
+      </p:sp>
+      <p:sp>
+        <p:nvSpPr>
+          <p:cNvPr id="22" name="TextBox 21"/>
+          <p:cNvSpPr txBox="1"/>
+          <p:nvPr/>
+        </p:nvSpPr>
+        <p:spPr>
+          <a:xfrm>
+            <a:off x="411480" y="5056631"/>
+            <a:ext cx="11247120" cy="475488"/>
+          </a:xfrm>
+          <a:prstGeom prst="rect">
+            <a:avLst/>
+          </a:prstGeom>
+          <a:noFill/>
+        </p:spPr>
+        <p:txBody>
+          <a:bodyPr wrap="square">
+            <a:spAutoFit/>
+          </a:bodyPr>
+          <a:lstStyle/>
+          <a:p>
+            <a:pPr algn="l"/>
+            <a:r>
+              <a:rPr sz="1600" b="0" i="0">
+                <a:solidFill>
+                  <a:srgbClr val="1C1C1C"/>
+                </a:solidFill>
+              </a:rPr>
+              <a:t>▸ 5 epoch 后 ppl 仍在下降，继续训练可进一步改善</a:t>
+            </a:r>
+          </a:p>
+        </p:txBody>
+      </p:sp>
+      <p:sp>
+        <p:nvSpPr>
+          <p:cNvPr id="23" name="Rectangle 22"/>
+          <p:cNvSpPr/>
+          <p:nvPr/>
+        </p:nvSpPr>
+        <p:spPr>
+          <a:xfrm>
+            <a:off x="0" y="6748272"/>
+            <a:ext cx="12188952" cy="109728"/>
+          </a:xfrm>
+          <a:prstGeom prst="rect">
+            <a:avLst/>
+          </a:prstGeom>
+          <a:solidFill>
+            <a:srgbClr val="1A335C"/>
           </a:solidFill>
           <a:ln>
             <a:noFill/>
@@ -5635,13 +6452,13 @@
         <p:spPr>
           <a:xfrm>
             <a:off x="0" y="0"/>
-            <a:ext cx="12188952" cy="1005840"/>
+            <a:ext cx="12188952" cy="960120"/>
           </a:xfrm>
           <a:prstGeom prst="rect">
             <a:avLst/>
           </a:prstGeom>
           <a:solidFill>
-            <a:srgbClr val="1F497D"/>
+            <a:srgbClr val="1A335C"/>
           </a:solidFill>
           <a:ln>
             <a:noFill/>
@@ -5671,14 +6488,57 @@
       </p:sp>
       <p:sp>
         <p:nvSpPr>
-          <p:cNvPr id="3" name="TextBox 2"/>
+          <p:cNvPr id="3" name="Rectangle 2"/>
+          <p:cNvSpPr/>
+          <p:nvPr/>
+        </p:nvSpPr>
+        <p:spPr>
+          <a:xfrm>
+            <a:off x="0" y="0"/>
+            <a:ext cx="164592" cy="6858000"/>
+          </a:xfrm>
+          <a:prstGeom prst="rect">
+            <a:avLst/>
+          </a:prstGeom>
+          <a:solidFill>
+            <a:srgbClr val="1A335C"/>
+          </a:solidFill>
+          <a:ln>
+            <a:noFill/>
+          </a:ln>
+        </p:spPr>
+        <p:style>
+          <a:lnRef idx="1">
+            <a:schemeClr val="accent1"/>
+          </a:lnRef>
+          <a:fillRef idx="3">
+            <a:schemeClr val="accent1"/>
+          </a:fillRef>
+          <a:effectRef idx="2">
+            <a:schemeClr val="accent1"/>
+          </a:effectRef>
+          <a:fontRef idx="minor">
+            <a:schemeClr val="lt1"/>
+          </a:fontRef>
+        </p:style>
+        <p:txBody>
+          <a:bodyPr rtlCol="0" anchor="ctr"/>
+          <a:lstStyle/>
+          <a:p>
+            <a:pPr algn="ctr"/>
+          </a:p>
+        </p:txBody>
+      </p:sp>
+      <p:sp>
+        <p:nvSpPr>
+          <p:cNvPr id="4" name="TextBox 3"/>
           <p:cNvSpPr txBox="1"/>
           <p:nvPr/>
         </p:nvSpPr>
         <p:spPr>
           <a:xfrm>
-            <a:off x="274320" y="91440"/>
-            <a:ext cx="11612880" cy="822960"/>
+            <a:off x="347472" y="91440"/>
+            <a:ext cx="11521440" cy="777240"/>
           </a:xfrm>
           <a:prstGeom prst="rect">
             <a:avLst/>
@@ -5693,26 +6553,26 @@
           <a:p>
             <a:pPr algn="l"/>
             <a:r>
-              <a:rPr sz="2400" b="1">
+              <a:rPr sz="2300" b="1" i="0">
                 <a:solidFill>
                   <a:srgbClr val="FFFFFF"/>
                 </a:solidFill>
               </a:rPr>
-              <a:t>总结</a:t>
-            </a:r>
-          </a:p>
-        </p:txBody>
-      </p:sp>
-      <p:sp>
-        <p:nvSpPr>
-          <p:cNvPr id="4" name="TextBox 3"/>
+              <a:t>总结与展望</a:t>
+            </a:r>
+          </a:p>
+        </p:txBody>
+      </p:sp>
+      <p:sp>
+        <p:nvSpPr>
+          <p:cNvPr id="5" name="TextBox 4"/>
           <p:cNvSpPr txBox="1"/>
           <p:nvPr/>
         </p:nvSpPr>
         <p:spPr>
           <a:xfrm>
-            <a:off x="457200" y="1188720"/>
-            <a:ext cx="11247120" cy="502920"/>
+            <a:off x="411480" y="1115568"/>
+            <a:ext cx="11247120" cy="475488"/>
           </a:xfrm>
           <a:prstGeom prst="rect">
             <a:avLst/>
@@ -5727,26 +6587,26 @@
           <a:p>
             <a:pPr algn="l"/>
             <a:r>
-              <a:rPr sz="1800" b="0">
-                <a:solidFill>
-                  <a:srgbClr val="1A1A2E"/>
+              <a:rPr sz="1700" b="0" i="0">
+                <a:solidFill>
+                  <a:srgbClr val="1C1C1C"/>
                 </a:solidFill>
               </a:rPr>
-              <a:t>  • ✅ 成功实现输入首句自动续写功能</a:t>
-            </a:r>
-          </a:p>
-        </p:txBody>
-      </p:sp>
-      <p:sp>
-        <p:nvSpPr>
-          <p:cNvPr id="5" name="TextBox 4"/>
+              <a:t>▸ 实现了完整的自动写诗流程：数据加载 → 模型训练 → 逐字生成</a:t>
+            </a:r>
+          </a:p>
+        </p:txBody>
+      </p:sp>
+      <p:sp>
+        <p:nvSpPr>
+          <p:cNvPr id="6" name="TextBox 5"/>
           <p:cNvSpPr txBox="1"/>
           <p:nvPr/>
         </p:nvSpPr>
         <p:spPr>
           <a:xfrm>
-            <a:off x="457200" y="1664208"/>
-            <a:ext cx="11247120" cy="502920"/>
+            <a:off x="411480" y="1591056"/>
+            <a:ext cx="11247120" cy="475488"/>
           </a:xfrm>
           <a:prstGeom prst="rect">
             <a:avLst/>
@@ -5761,26 +6621,26 @@
           <a:p>
             <a:pPr algn="l"/>
             <a:r>
-              <a:rPr sz="1800" b="0">
-                <a:solidFill>
-                  <a:srgbClr val="1A1A2E"/>
+              <a:rPr sz="1700" b="0" i="0">
+                <a:solidFill>
+                  <a:srgbClr val="1C1C1C"/>
                 </a:solidFill>
               </a:rPr>
-              <a:t>  • 自己方案：双层 LSTM + Dropout + temperature/top-k 采样</a:t>
-            </a:r>
-          </a:p>
-        </p:txBody>
-      </p:sp>
-      <p:sp>
-        <p:nvSpPr>
-          <p:cNvPr id="6" name="TextBox 5"/>
+              <a:t>▸ 自己方案：双层 LSTM + Dropout + top-k 采样，相比指导书基线 PPL 降 14%</a:t>
+            </a:r>
+          </a:p>
+        </p:txBody>
+      </p:sp>
+      <p:sp>
+        <p:nvSpPr>
+          <p:cNvPr id="7" name="TextBox 6"/>
           <p:cNvSpPr txBox="1"/>
           <p:nvPr/>
         </p:nvSpPr>
         <p:spPr>
           <a:xfrm>
-            <a:off x="457200" y="2139696"/>
-            <a:ext cx="11247120" cy="502920"/>
+            <a:off x="411480" y="2066543"/>
+            <a:ext cx="11247120" cy="475488"/>
           </a:xfrm>
           <a:prstGeom prst="rect">
             <a:avLst/>
@@ -5795,26 +6655,26 @@
           <a:p>
             <a:pPr algn="l"/>
             <a:r>
-              <a:rPr sz="1800" b="0">
-                <a:solidFill>
-                  <a:srgbClr val="1A1A2E"/>
+              <a:rPr sz="1700" b="0" i="0">
+                <a:solidFill>
+                  <a:srgbClr val="1C1C1C"/>
                 </a:solidFill>
               </a:rPr>
-              <a:t>  • 相比指导书单层基线，val_ppl 降低约 15%</a:t>
-            </a:r>
-          </a:p>
-        </p:txBody>
-      </p:sp>
-      <p:sp>
-        <p:nvSpPr>
-          <p:cNvPr id="7" name="TextBox 6"/>
+              <a:t>▸ temperature 参数对生成质量影响显著，0.8–1.0 之间效果最佳</a:t>
+            </a:r>
+          </a:p>
+        </p:txBody>
+      </p:sp>
+      <p:sp>
+        <p:nvSpPr>
+          <p:cNvPr id="8" name="TextBox 7"/>
           <p:cNvSpPr txBox="1"/>
           <p:nvPr/>
         </p:nvSpPr>
         <p:spPr>
           <a:xfrm>
-            <a:off x="457200" y="2615184"/>
-            <a:ext cx="11247120" cy="502920"/>
+            <a:off x="411480" y="2542032"/>
+            <a:ext cx="11247120" cy="475488"/>
           </a:xfrm>
           <a:prstGeom prst="rect">
             <a:avLst/>
@@ -5829,26 +6689,26 @@
           <a:p>
             <a:pPr algn="l"/>
             <a:r>
-              <a:rPr sz="1800" b="0">
-                <a:solidFill>
-                  <a:srgbClr val="1A1A2E"/>
+              <a:rPr sz="1700" b="0" i="0">
+                <a:solidFill>
+                  <a:srgbClr val="1C1C1C"/>
                 </a:solidFill>
               </a:rPr>
-              <a:t>  • top-k 采样在生成多样性和连贯性之间取得平衡</a:t>
-            </a:r>
-          </a:p>
-        </p:txBody>
-      </p:sp>
-      <p:sp>
-        <p:nvSpPr>
-          <p:cNvPr id="8" name="TextBox 7"/>
+              <a:t>▸ 不足：val_ppl=152 仍然偏高，5 epoch 训练不够充分</a:t>
+            </a:r>
+          </a:p>
+        </p:txBody>
+      </p:sp>
+      <p:sp>
+        <p:nvSpPr>
+          <p:cNvPr id="9" name="TextBox 8"/>
           <p:cNvSpPr txBox="1"/>
           <p:nvPr/>
         </p:nvSpPr>
         <p:spPr>
           <a:xfrm>
-            <a:off x="457200" y="3090672"/>
-            <a:ext cx="11247120" cy="502920"/>
+            <a:off x="411480" y="3017520"/>
+            <a:ext cx="11247120" cy="475488"/>
           </a:xfrm>
           <a:prstGeom prst="rect">
             <a:avLst/>
@@ -5863,32 +6723,66 @@
           <a:p>
             <a:pPr algn="l"/>
             <a:r>
-              <a:rPr sz="1800" b="0">
-                <a:solidFill>
-                  <a:srgbClr val="1A1A2E"/>
+              <a:rPr sz="1600" b="0" i="0">
+                <a:solidFill>
+                  <a:srgbClr val="555555"/>
                 </a:solidFill>
               </a:rPr>
-              <a:t>  • 改进方向：增加训练 epoch / 使用 Transformer 替换 LSTM / 加入押韵约束</a:t>
-            </a:r>
-          </a:p>
-        </p:txBody>
-      </p:sp>
-      <p:sp>
-        <p:nvSpPr>
-          <p:cNvPr id="9" name="Rectangle 8"/>
+              <a:t>    – 改进方向①：训练 20+ epoch，PPL 有望降至 80 以下</a:t>
+            </a:r>
+          </a:p>
+        </p:txBody>
+      </p:sp>
+      <p:sp>
+        <p:nvSpPr>
+          <p:cNvPr id="10" name="TextBox 9"/>
+          <p:cNvSpPr txBox="1"/>
+          <p:nvPr/>
+        </p:nvSpPr>
+        <p:spPr>
+          <a:xfrm>
+            <a:off x="411480" y="3493008"/>
+            <a:ext cx="11247120" cy="475488"/>
+          </a:xfrm>
+          <a:prstGeom prst="rect">
+            <a:avLst/>
+          </a:prstGeom>
+          <a:noFill/>
+        </p:spPr>
+        <p:txBody>
+          <a:bodyPr wrap="square">
+            <a:spAutoFit/>
+          </a:bodyPr>
+          <a:lstStyle/>
+          <a:p>
+            <a:pPr algn="l"/>
+            <a:r>
+              <a:rPr sz="1600" b="0" i="0">
+                <a:solidFill>
+                  <a:srgbClr val="555555"/>
+                </a:solidFill>
+              </a:rPr>
+              <a:t>    – 改进方向②：用 Transformer 替换 LSTM，利用自注意力建模长程韵律</a:t>
+            </a:r>
+          </a:p>
+        </p:txBody>
+      </p:sp>
+      <p:sp>
+        <p:nvSpPr>
+          <p:cNvPr id="11" name="Rectangle 10"/>
           <p:cNvSpPr/>
           <p:nvPr/>
         </p:nvSpPr>
         <p:spPr>
           <a:xfrm>
-            <a:off x="0" y="6675120"/>
-            <a:ext cx="12188952" cy="73152"/>
+            <a:off x="0" y="6748272"/>
+            <a:ext cx="12188952" cy="109728"/>
           </a:xfrm>
           <a:prstGeom prst="rect">
             <a:avLst/>
           </a:prstGeom>
           <a:solidFill>
-            <a:srgbClr val="1F497D"/>
+            <a:srgbClr val="1A335C"/>
           </a:solidFill>
           <a:ln>
             <a:noFill/>

--- a/reports/exp3_poetry_lstm.pptx
+++ b/reports/exp3_poetry_lstm.pptx
@@ -13,6 +13,8 @@
     <p:sldId id="261" r:id="rId12"/>
     <p:sldId id="262" r:id="rId13"/>
     <p:sldId id="263" r:id="rId14"/>
+    <p:sldId id="264" r:id="rId15"/>
+    <p:sldId id="265" r:id="rId16"/>
   </p:sldIdLst>
   <p:sldSz cx="12188952" cy="6858000" type="screen4x3"/>
   <p:notesSz cx="6858000" cy="9144000"/>
@@ -3148,7 +3150,7 @@
       </p:sp>
       <p:pic>
         <p:nvPicPr>
-          <p:cNvPr id="3" name="Picture 2" descr="ucas_seal.png"/>
+          <p:cNvPr id="3" name="Picture 2" descr="国科大标准Logo横式一（白色）.png"/>
           <p:cNvPicPr>
             <a:picLocks noChangeAspect="1"/>
           </p:cNvPicPr>
@@ -3162,8 +3164,8 @@
         </p:blipFill>
         <p:spPr>
           <a:xfrm>
-            <a:off x="10771632" y="228600"/>
-            <a:ext cx="1188720" cy="1069848"/>
+            <a:off x="8714232" y="256032"/>
+            <a:ext cx="3200400" cy="777240"/>
           </a:xfrm>
           <a:prstGeom prst="rect">
             <a:avLst/>
@@ -3312,6 +3314,433 @@
               </a:rPr>
               <a:t>WevYang　|　中国科学院大学  深度学习</a:t>
             </a:r>
+          </a:p>
+        </p:txBody>
+      </p:sp>
+    </p:spTree>
+  </p:cSld>
+  <p:clrMapOvr>
+    <a:masterClrMapping/>
+  </p:clrMapOvr>
+</p:sld>
+</file>
+
+<file path=ppt/slides/slide10.xml><?xml version="1.0" encoding="utf-8"?>
+<p:sld xmlns:a="http://schemas.openxmlformats.org/drawingml/2006/main" xmlns:p="http://schemas.openxmlformats.org/presentationml/2006/main" xmlns:r="http://schemas.openxmlformats.org/officeDocument/2006/relationships">
+  <p:cSld>
+    <p:bg>
+      <p:bgPr>
+        <a:solidFill>
+          <a:srgbClr val="FFFFFF"/>
+        </a:solidFill>
+        <a:effectLst/>
+      </p:bgPr>
+    </p:bg>
+    <p:spTree>
+      <p:nvGrpSpPr>
+        <p:cNvPr id="1" name=""/>
+        <p:cNvGrpSpPr/>
+        <p:nvPr/>
+      </p:nvGrpSpPr>
+      <p:grpSpPr/>
+      <p:sp>
+        <p:nvSpPr>
+          <p:cNvPr id="2" name="Rectangle 1"/>
+          <p:cNvSpPr/>
+          <p:nvPr/>
+        </p:nvSpPr>
+        <p:spPr>
+          <a:xfrm>
+            <a:off x="0" y="0"/>
+            <a:ext cx="12188952" cy="960120"/>
+          </a:xfrm>
+          <a:prstGeom prst="rect">
+            <a:avLst/>
+          </a:prstGeom>
+          <a:solidFill>
+            <a:srgbClr val="1A335C"/>
+          </a:solidFill>
+          <a:ln>
+            <a:noFill/>
+          </a:ln>
+        </p:spPr>
+        <p:style>
+          <a:lnRef idx="1">
+            <a:schemeClr val="accent1"/>
+          </a:lnRef>
+          <a:fillRef idx="3">
+            <a:schemeClr val="accent1"/>
+          </a:fillRef>
+          <a:effectRef idx="2">
+            <a:schemeClr val="accent1"/>
+          </a:effectRef>
+          <a:fontRef idx="minor">
+            <a:schemeClr val="lt1"/>
+          </a:fontRef>
+        </p:style>
+        <p:txBody>
+          <a:bodyPr rtlCol="0" anchor="ctr"/>
+          <a:lstStyle/>
+          <a:p>
+            <a:pPr algn="ctr"/>
+          </a:p>
+        </p:txBody>
+      </p:sp>
+      <p:sp>
+        <p:nvSpPr>
+          <p:cNvPr id="3" name="Rectangle 2"/>
+          <p:cNvSpPr/>
+          <p:nvPr/>
+        </p:nvSpPr>
+        <p:spPr>
+          <a:xfrm>
+            <a:off x="0" y="0"/>
+            <a:ext cx="164592" cy="6858000"/>
+          </a:xfrm>
+          <a:prstGeom prst="rect">
+            <a:avLst/>
+          </a:prstGeom>
+          <a:solidFill>
+            <a:srgbClr val="1A335C"/>
+          </a:solidFill>
+          <a:ln>
+            <a:noFill/>
+          </a:ln>
+        </p:spPr>
+        <p:style>
+          <a:lnRef idx="1">
+            <a:schemeClr val="accent1"/>
+          </a:lnRef>
+          <a:fillRef idx="3">
+            <a:schemeClr val="accent1"/>
+          </a:fillRef>
+          <a:effectRef idx="2">
+            <a:schemeClr val="accent1"/>
+          </a:effectRef>
+          <a:fontRef idx="minor">
+            <a:schemeClr val="lt1"/>
+          </a:fontRef>
+        </p:style>
+        <p:txBody>
+          <a:bodyPr rtlCol="0" anchor="ctr"/>
+          <a:lstStyle/>
+          <a:p>
+            <a:pPr algn="ctr"/>
+          </a:p>
+        </p:txBody>
+      </p:sp>
+      <p:sp>
+        <p:nvSpPr>
+          <p:cNvPr id="4" name="TextBox 3"/>
+          <p:cNvSpPr txBox="1"/>
+          <p:nvPr/>
+        </p:nvSpPr>
+        <p:spPr>
+          <a:xfrm>
+            <a:off x="347472" y="91440"/>
+            <a:ext cx="11521440" cy="777240"/>
+          </a:xfrm>
+          <a:prstGeom prst="rect">
+            <a:avLst/>
+          </a:prstGeom>
+          <a:noFill/>
+        </p:spPr>
+        <p:txBody>
+          <a:bodyPr wrap="square">
+            <a:spAutoFit/>
+          </a:bodyPr>
+          <a:lstStyle/>
+          <a:p>
+            <a:pPr algn="l"/>
+            <a:r>
+              <a:rPr sz="2300" b="1" i="0">
+                <a:solidFill>
+                  <a:srgbClr val="FFFFFF"/>
+                </a:solidFill>
+              </a:rPr>
+              <a:t>总结与展望</a:t>
+            </a:r>
+          </a:p>
+        </p:txBody>
+      </p:sp>
+      <p:sp>
+        <p:nvSpPr>
+          <p:cNvPr id="5" name="TextBox 4"/>
+          <p:cNvSpPr txBox="1"/>
+          <p:nvPr/>
+        </p:nvSpPr>
+        <p:spPr>
+          <a:xfrm>
+            <a:off x="411480" y="1115568"/>
+            <a:ext cx="11247120" cy="475488"/>
+          </a:xfrm>
+          <a:prstGeom prst="rect">
+            <a:avLst/>
+          </a:prstGeom>
+          <a:noFill/>
+        </p:spPr>
+        <p:txBody>
+          <a:bodyPr wrap="square">
+            <a:spAutoFit/>
+          </a:bodyPr>
+          <a:lstStyle/>
+          <a:p>
+            <a:pPr algn="l"/>
+            <a:r>
+              <a:rPr sz="1700" b="0" i="0">
+                <a:solidFill>
+                  <a:srgbClr val="1C1C1C"/>
+                </a:solidFill>
+              </a:rPr>
+              <a:t>▸ 实现了完整的自动写诗流程：数据加载 → 字符级 LSTM → 逐字生成</a:t>
+            </a:r>
+          </a:p>
+        </p:txBody>
+      </p:sp>
+      <p:sp>
+        <p:nvSpPr>
+          <p:cNvPr id="6" name="TextBox 5"/>
+          <p:cNvSpPr txBox="1"/>
+          <p:nvPr/>
+        </p:nvSpPr>
+        <p:spPr>
+          <a:xfrm>
+            <a:off x="411480" y="1591056"/>
+            <a:ext cx="11247120" cy="475488"/>
+          </a:xfrm>
+          <a:prstGeom prst="rect">
+            <a:avLst/>
+          </a:prstGeom>
+          <a:noFill/>
+        </p:spPr>
+        <p:txBody>
+          <a:bodyPr wrap="square">
+            <a:spAutoFit/>
+          </a:bodyPr>
+          <a:lstStyle/>
+          <a:p>
+            <a:pPr algn="l"/>
+            <a:r>
+              <a:rPr sz="1700" b="0" i="0">
+                <a:solidFill>
+                  <a:srgbClr val="1C1C1C"/>
+                </a:solidFill>
+              </a:rPr>
+              <a:t>▸ 自己方案（双层+Dropout+top-k）相比指导书基线 PPL 降低 14%</a:t>
+            </a:r>
+          </a:p>
+        </p:txBody>
+      </p:sp>
+      <p:sp>
+        <p:nvSpPr>
+          <p:cNvPr id="7" name="TextBox 6"/>
+          <p:cNvSpPr txBox="1"/>
+          <p:nvPr/>
+        </p:nvSpPr>
+        <p:spPr>
+          <a:xfrm>
+            <a:off x="411480" y="2066543"/>
+            <a:ext cx="11247120" cy="475488"/>
+          </a:xfrm>
+          <a:prstGeom prst="rect">
+            <a:avLst/>
+          </a:prstGeom>
+          <a:noFill/>
+        </p:spPr>
+        <p:txBody>
+          <a:bodyPr wrap="square">
+            <a:spAutoFit/>
+          </a:bodyPr>
+          <a:lstStyle/>
+          <a:p>
+            <a:pPr algn="l"/>
+            <a:r>
+              <a:rPr sz="1700" b="0" i="0">
+                <a:solidFill>
+                  <a:srgbClr val="1C1C1C"/>
+                </a:solidFill>
+              </a:rPr>
+              <a:t>▸ temperature 参数对生成质量影响显著，0.8–1.0 效果最佳</a:t>
+            </a:r>
+          </a:p>
+        </p:txBody>
+      </p:sp>
+      <p:sp>
+        <p:nvSpPr>
+          <p:cNvPr id="8" name="TextBox 7"/>
+          <p:cNvSpPr txBox="1"/>
+          <p:nvPr/>
+        </p:nvSpPr>
+        <p:spPr>
+          <a:xfrm>
+            <a:off x="411480" y="2542032"/>
+            <a:ext cx="11247120" cy="475488"/>
+          </a:xfrm>
+          <a:prstGeom prst="rect">
+            <a:avLst/>
+          </a:prstGeom>
+          <a:noFill/>
+        </p:spPr>
+        <p:txBody>
+          <a:bodyPr wrap="square">
+            <a:spAutoFit/>
+          </a:bodyPr>
+          <a:lstStyle/>
+          <a:p>
+            <a:pPr algn="l"/>
+            <a:r>
+              <a:rPr sz="1700" b="0" i="0">
+                <a:solidFill>
+                  <a:srgbClr val="1C1C1C"/>
+                </a:solidFill>
+              </a:rPr>
+              <a:t>▸ 不足：5~8 epoch 训练不够充分，val_ppl 仍在下降趋势中</a:t>
+            </a:r>
+          </a:p>
+        </p:txBody>
+      </p:sp>
+      <p:sp>
+        <p:nvSpPr>
+          <p:cNvPr id="9" name="TextBox 8"/>
+          <p:cNvSpPr txBox="1"/>
+          <p:nvPr/>
+        </p:nvSpPr>
+        <p:spPr>
+          <a:xfrm>
+            <a:off x="411480" y="3017520"/>
+            <a:ext cx="11247120" cy="475488"/>
+          </a:xfrm>
+          <a:prstGeom prst="rect">
+            <a:avLst/>
+          </a:prstGeom>
+          <a:noFill/>
+        </p:spPr>
+        <p:txBody>
+          <a:bodyPr wrap="square">
+            <a:spAutoFit/>
+          </a:bodyPr>
+          <a:lstStyle/>
+          <a:p>
+            <a:pPr algn="l"/>
+            <a:r>
+              <a:rPr sz="1600" b="0" i="0">
+                <a:solidFill>
+                  <a:srgbClr val="555555"/>
+                </a:solidFill>
+              </a:rPr>
+              <a:t>    – 改进方向①：训练 20+ epoch，PPL 有望降至 80 以下</a:t>
+            </a:r>
+          </a:p>
+        </p:txBody>
+      </p:sp>
+      <p:sp>
+        <p:nvSpPr>
+          <p:cNvPr id="10" name="TextBox 9"/>
+          <p:cNvSpPr txBox="1"/>
+          <p:nvPr/>
+        </p:nvSpPr>
+        <p:spPr>
+          <a:xfrm>
+            <a:off x="411480" y="3493008"/>
+            <a:ext cx="11247120" cy="475488"/>
+          </a:xfrm>
+          <a:prstGeom prst="rect">
+            <a:avLst/>
+          </a:prstGeom>
+          <a:noFill/>
+        </p:spPr>
+        <p:txBody>
+          <a:bodyPr wrap="square">
+            <a:spAutoFit/>
+          </a:bodyPr>
+          <a:lstStyle/>
+          <a:p>
+            <a:pPr algn="l"/>
+            <a:r>
+              <a:rPr sz="1600" b="0" i="0">
+                <a:solidFill>
+                  <a:srgbClr val="555555"/>
+                </a:solidFill>
+              </a:rPr>
+              <a:t>    – 改进方向②：用 Transformer 替换 LSTM，利用自注意力建模长程韵律</a:t>
+            </a:r>
+          </a:p>
+        </p:txBody>
+      </p:sp>
+      <p:sp>
+        <p:nvSpPr>
+          <p:cNvPr id="11" name="TextBox 10"/>
+          <p:cNvSpPr txBox="1"/>
+          <p:nvPr/>
+        </p:nvSpPr>
+        <p:spPr>
+          <a:xfrm>
+            <a:off x="411480" y="3968496"/>
+            <a:ext cx="11247120" cy="475488"/>
+          </a:xfrm>
+          <a:prstGeom prst="rect">
+            <a:avLst/>
+          </a:prstGeom>
+          <a:noFill/>
+        </p:spPr>
+        <p:txBody>
+          <a:bodyPr wrap="square">
+            <a:spAutoFit/>
+          </a:bodyPr>
+          <a:lstStyle/>
+          <a:p>
+            <a:pPr algn="l"/>
+            <a:r>
+              <a:rPr sz="1600" b="0" i="0">
+                <a:solidFill>
+                  <a:srgbClr val="555555"/>
+                </a:solidFill>
+              </a:rPr>
+              <a:t>    – 改进方向③：引入押韵约束（生成时限制韵脚候选集），提升诗歌质量</a:t>
+            </a:r>
+          </a:p>
+        </p:txBody>
+      </p:sp>
+      <p:sp>
+        <p:nvSpPr>
+          <p:cNvPr id="12" name="Rectangle 11"/>
+          <p:cNvSpPr/>
+          <p:nvPr/>
+        </p:nvSpPr>
+        <p:spPr>
+          <a:xfrm>
+            <a:off x="0" y="6748272"/>
+            <a:ext cx="12188952" cy="109728"/>
+          </a:xfrm>
+          <a:prstGeom prst="rect">
+            <a:avLst/>
+          </a:prstGeom>
+          <a:solidFill>
+            <a:srgbClr val="1A335C"/>
+          </a:solidFill>
+          <a:ln>
+            <a:noFill/>
+          </a:ln>
+        </p:spPr>
+        <p:style>
+          <a:lnRef idx="1">
+            <a:schemeClr val="accent1"/>
+          </a:lnRef>
+          <a:fillRef idx="3">
+            <a:schemeClr val="accent1"/>
+          </a:fillRef>
+          <a:effectRef idx="2">
+            <a:schemeClr val="accent1"/>
+          </a:effectRef>
+          <a:fontRef idx="minor">
+            <a:schemeClr val="lt1"/>
+          </a:fontRef>
+        </p:style>
+        <p:txBody>
+          <a:bodyPr rtlCol="0" anchor="ctr"/>
+          <a:lstStyle/>
+          <a:p>
+            <a:pPr algn="ctr"/>
           </a:p>
         </p:txBody>
       </p:sp>
@@ -3490,7 +3919,7 @@
                   <a:srgbClr val="1C1C1C"/>
                 </a:solidFill>
               </a:rPr>
-              <a:t>▸ 任务：训练语言模型，给定首句自动续写唐诗</a:t>
+              <a:t>▸ 任务：训练字符级语言模型，给定首句自动续写唐诗</a:t>
             </a:r>
           </a:p>
         </p:txBody>
@@ -3524,7 +3953,7 @@
                   <a:srgbClr val="1C1C1C"/>
                 </a:solidFill>
               </a:rPr>
-              <a:t>▸ 数据集：预处理后的 tang.npz，含 57,580 首唐诗</a:t>
+              <a:t>▸ 数据集：课程提供的唐诗语料 tang.npz，约 57,580 首</a:t>
             </a:r>
           </a:p>
         </p:txBody>
@@ -3592,7 +4021,7 @@
                   <a:srgbClr val="555555"/>
                 </a:solidFill>
               </a:rPr>
-              <a:t>    – 相比指导书示例（单层 LSTM + 贪心解码）做了三处改进</a:t>
+              <a:t>    – 相比实验指导书示例（单层 LSTM + 贪心解码）做了三处关键改进</a:t>
             </a:r>
           </a:p>
         </p:txBody>
@@ -3917,7 +4346,7 @@
                   <a:srgbClr val="1C1C1C"/>
                 </a:solidFill>
               </a:rPr>
-              <a:t>▸ 规模：57,580 首唐诗，每首限定 125 个字符</a:t>
+              <a:t>▸ 规模：57,580 首唐诗，每首固定截断/填充至 125 个字符</a:t>
             </a:r>
           </a:p>
         </p:txBody>
@@ -3951,7 +4380,7 @@
                   <a:srgbClr val="555555"/>
                 </a:solidFill>
               </a:rPr>
-              <a:t>    – 不足 125 字的以 &lt;/s&gt;（padding token）填充</a:t>
+              <a:t>    – 不足 125 字的以特殊 token &lt;/s&gt; 填充（padding_idx）</a:t>
             </a:r>
           </a:p>
         </p:txBody>
@@ -3985,7 +4414,7 @@
                   <a:srgbClr val="1C1C1C"/>
                 </a:solidFill>
               </a:rPr>
-              <a:t>▸ 格式：npz 文件，包含 data（字符 id 序列）、ix2word、word2ix 三部分</a:t>
+              <a:t>▸ 格式：npz 文件，包含 data（字符 id 数组）、ix2word、word2ix</a:t>
             </a:r>
           </a:p>
         </p:txBody>
@@ -4019,7 +4448,7 @@
                   <a:srgbClr val="1C1C1C"/>
                 </a:solidFill>
               </a:rPr>
-              <a:t>▸ 词表大小：约 8,293 个唯一字符（含特殊符号 &lt;START&gt;、&lt;EOP&gt;、&lt;/s&gt;）</a:t>
+              <a:t>▸ 词表大小：约 8,293 个唯一字符（含 &lt;START&gt;、&lt;EOP&gt;、&lt;/s&gt;）</a:t>
             </a:r>
           </a:p>
         </p:txBody>
@@ -4053,7 +4482,7 @@
                   <a:srgbClr val="555555"/>
                 </a:solidFill>
               </a:rPr>
-              <a:t>    – 切出 5% 样本（约 2,879 首）作为验证集，其余用于训练</a:t>
+              <a:t>    – 切出 5% 样本（约 2,879 首）作验证集，其余约 54,701 首训练</a:t>
             </a:r>
           </a:p>
         </p:txBody>
@@ -4421,7 +4850,7 @@
                   <a:srgbClr val="1C1C1C"/>
                 </a:solidFill>
               </a:rPr>
-              <a:t>▸ 无 Dropout</a:t>
+              <a:t>▸ 无额外 Dropout</a:t>
             </a:r>
           </a:p>
         </p:txBody>
@@ -4523,7 +4952,7 @@
                   <a:srgbClr val="555555"/>
                 </a:solidFill>
               </a:rPr>
-              <a:t>    – 缺点：输出往往过于保守、重复</a:t>
+              <a:t>    – 缺点：输出往往重复、缺乏变化</a:t>
             </a:r>
           </a:p>
         </p:txBody>
@@ -4702,7 +5131,7 @@
                   <a:srgbClr val="1C1C1C"/>
                 </a:solidFill>
               </a:rPr>
-              <a:t>▸ Dropout(0.3)：层间 + 输出后各一层</a:t>
+              <a:t>▸ Dropout(0.3)：层间 + 输出层各一</a:t>
             </a:r>
           </a:p>
         </p:txBody>
@@ -4993,7 +5422,7 @@
                   <a:srgbClr val="FFFFFF"/>
                 </a:solidFill>
               </a:rPr>
-              <a:t>核心代码：模型定义与生成策略</a:t>
+              <a:t>核心代码：PoetryLSTM 模型定义</a:t>
             </a:r>
           </a:p>
         </p:txBody>
@@ -5072,7 +5501,8 @@
               </a:rPr>
               <a:t>class PoetryLSTM(nn.Module):
     def __init__(self, vocab_size, embed_dim=256,
-                 hidden_dim=512, num_layers=2, dropout=0.3):
+                 hidden_dim=512, num_layers=2,
+                 dropout=0.3, pad_idx=0):
         super().__init__()
         self.embedding = nn.Embedding(vocab_size, embed_dim,
                                       padding_idx=pad_idx)
@@ -5080,14 +5510,12 @@
         self.lstm = nn.LSTM(embed_dim, hidden_dim,
                             num_layers=num_layers,
                             batch_first=True, dropout=dropout)
-        self.dropout = nn.Dropout(dropout)  # 输出后额外 Dropout
+        self.dropout = nn.Dropout(dropout)  # 输出后额外正则
         self.fc = nn.Linear(hidden_dim, vocab_size)
-# Temperature + Top-k 采样（生成时使用）
-def sample_next(logits, temperature=0.9, top_k=5):
-    logits = logits / temperature          # 调整分布"尖锐"程度
-    values, indices = torch.topk(logits, top_k)
-    probs = torch.softmax(values, dim=-1)
-    return indices[torch.multinomial(probs, 1).item()].item()</a:t>
+    def forward(self, x, hidden=None):
+        emb = self.embedding(x)
+        out, hidden = self.lstm(emb, hidden)
+        return self.fc(self.dropout(out)), hidden</a:t>
             </a:r>
           </a:p>
         </p:txBody>
@@ -5121,7 +5549,7 @@
                   <a:srgbClr val="555555"/>
                 </a:solidFill>
               </a:rPr>
-              <a:t>temperature&lt;1 使分布更集中（更保守）；top_k 限制候选范围，避免生成罕见字。</a:t>
+              <a:t>两层 LSTM 让底层捕捉字符组合规律、上层学习句法结构，分工明确。</a:t>
             </a:r>
           </a:p>
         </p:txBody>
@@ -5310,21 +5738,64 @@
                   <a:srgbClr val="FFFFFF"/>
                 </a:solidFill>
               </a:rPr>
-              <a:t>训练方案</a:t>
-            </a:r>
-          </a:p>
-        </p:txBody>
-      </p:sp>
-      <p:sp>
-        <p:nvSpPr>
-          <p:cNvPr id="5" name="TextBox 4"/>
+              <a:t>核心代码：Temperature + Top-k 采样</a:t>
+            </a:r>
+          </a:p>
+        </p:txBody>
+      </p:sp>
+      <p:sp>
+        <p:nvSpPr>
+          <p:cNvPr id="5" name="Rectangle 4"/>
+          <p:cNvSpPr/>
+          <p:nvPr/>
+        </p:nvSpPr>
+        <p:spPr>
+          <a:xfrm>
+            <a:off x="347472" y="1051560"/>
+            <a:ext cx="11475720" cy="4206240"/>
+          </a:xfrm>
+          <a:prstGeom prst="rect">
+            <a:avLst/>
+          </a:prstGeom>
+          <a:solidFill>
+            <a:srgbClr val="1E1E2E"/>
+          </a:solidFill>
+          <a:ln>
+            <a:noFill/>
+          </a:ln>
+        </p:spPr>
+        <p:style>
+          <a:lnRef idx="1">
+            <a:schemeClr val="accent1"/>
+          </a:lnRef>
+          <a:fillRef idx="3">
+            <a:schemeClr val="accent1"/>
+          </a:fillRef>
+          <a:effectRef idx="2">
+            <a:schemeClr val="accent1"/>
+          </a:effectRef>
+          <a:fontRef idx="minor">
+            <a:schemeClr val="lt1"/>
+          </a:fontRef>
+        </p:style>
+        <p:txBody>
+          <a:bodyPr rtlCol="0" anchor="ctr"/>
+          <a:lstStyle/>
+          <a:p>
+            <a:pPr algn="ctr"/>
+          </a:p>
+        </p:txBody>
+      </p:sp>
+      <p:sp>
+        <p:nvSpPr>
+          <p:cNvPr id="6" name="TextBox 5"/>
           <p:cNvSpPr txBox="1"/>
           <p:nvPr/>
         </p:nvSpPr>
         <p:spPr>
           <a:xfrm>
-            <a:off x="411480" y="1115568"/>
-            <a:ext cx="11247120" cy="475488"/>
+            <a:off x="475488" y="1115568"/>
+            <a:ext cx="11201400" cy="4114800"/>
           </a:xfrm>
           <a:prstGeom prst="rect">
             <a:avLst/>
@@ -5339,26 +5810,45 @@
           <a:p>
             <a:pPr algn="l"/>
             <a:r>
-              <a:rPr sz="1700" b="0" i="0">
-                <a:solidFill>
-                  <a:srgbClr val="1C1C1C"/>
+              <a:rPr sz="1200" b="0" i="0">
+                <a:solidFill>
+                  <a:srgbClr val="CBD3E3"/>
                 </a:solidFill>
               </a:rPr>
-              <a:t>▸ 损失函数：CrossEntropyLoss（ignore_index=pad_idx，忽略填充 token）</a:t>
-            </a:r>
-          </a:p>
-        </p:txBody>
-      </p:sp>
-      <p:sp>
-        <p:nvSpPr>
-          <p:cNvPr id="6" name="TextBox 5"/>
+              <a:t>def sample_next(logits, temperature=0.9, top_k=5):
+    """从 logits 中按 temperature + top-k 策略采样下一个字符。"""
+    logits = logits / temperature        # 调整分布尖锐程度
+    values, indices = torch.topk(logits, top_k)
+    probs = torch.softmax(values, dim=-1)
+    idx = torch.multinomial(probs, 1).item()
+    return indices[idx].item()
+# 逐字生成（推理阶段）
+def generate(model, start_words, ix2word, word2ix,
+             max_len=125, temperature=0.9, top_k=5):
+    model.eval()
+    results = list(start_words)
+    hidden  = None
+    for char in start_words:             # 先喂入起始字符
+        inp = torch.tensor([[word2ix[char]]]).to(device)
+        _, hidden = model(inp, hidden)
+    for _ in range(max_len):
+        logits, hidden = model(inp, hidden)
+        next_id = sample_next(logits[0,-1], temperature, top_k)
+        results.append(ix2word[next_id])</a:t>
+            </a:r>
+          </a:p>
+        </p:txBody>
+      </p:sp>
+      <p:sp>
+        <p:nvSpPr>
+          <p:cNvPr id="7" name="TextBox 6"/>
           <p:cNvSpPr txBox="1"/>
           <p:nvPr/>
         </p:nvSpPr>
         <p:spPr>
           <a:xfrm>
-            <a:off x="411480" y="1591056"/>
-            <a:ext cx="11247120" cy="475488"/>
+            <a:off x="411480" y="5349240"/>
+            <a:ext cx="11247120" cy="731520"/>
           </a:xfrm>
           <a:prstGeom prst="rect">
             <a:avLst/>
@@ -5373,155 +5863,19 @@
           <a:p>
             <a:pPr algn="l"/>
             <a:r>
-              <a:rPr sz="1700" b="0" i="0">
-                <a:solidFill>
-                  <a:srgbClr val="1C1C1C"/>
+              <a:rPr sz="1400" b="0" i="1">
+                <a:solidFill>
+                  <a:srgbClr val="555555"/>
                 </a:solidFill>
               </a:rPr>
-              <a:t>▸ 优化器：Adam（lr=1e-3，weight_decay=1e-5）</a:t>
-            </a:r>
-          </a:p>
-        </p:txBody>
-      </p:sp>
-      <p:sp>
-        <p:nvSpPr>
-          <p:cNvPr id="7" name="TextBox 6"/>
-          <p:cNvSpPr txBox="1"/>
-          <p:nvPr/>
-        </p:nvSpPr>
-        <p:spPr>
-          <a:xfrm>
-            <a:off x="411480" y="2066543"/>
-            <a:ext cx="11247120" cy="475488"/>
-          </a:xfrm>
-          <a:prstGeom prst="rect">
-            <a:avLst/>
-          </a:prstGeom>
-          <a:noFill/>
-        </p:spPr>
-        <p:txBody>
-          <a:bodyPr wrap="square">
-            <a:spAutoFit/>
-          </a:bodyPr>
-          <a:lstStyle/>
-          <a:p>
-            <a:pPr algn="l"/>
-            <a:r>
-              <a:rPr sz="1700" b="0" i="0">
-                <a:solidFill>
-                  <a:srgbClr val="1C1C1C"/>
-                </a:solidFill>
-              </a:rPr>
-              <a:t>▸ Batch Size=128；训练 5 个 epoch</a:t>
-            </a:r>
-          </a:p>
-        </p:txBody>
-      </p:sp>
-      <p:sp>
-        <p:nvSpPr>
-          <p:cNvPr id="8" name="TextBox 7"/>
-          <p:cNvSpPr txBox="1"/>
-          <p:nvPr/>
-        </p:nvSpPr>
-        <p:spPr>
-          <a:xfrm>
-            <a:off x="411480" y="2542032"/>
-            <a:ext cx="11247120" cy="475488"/>
-          </a:xfrm>
-          <a:prstGeom prst="rect">
-            <a:avLst/>
-          </a:prstGeom>
-          <a:noFill/>
-        </p:spPr>
-        <p:txBody>
-          <a:bodyPr wrap="square">
-            <a:spAutoFit/>
-          </a:bodyPr>
-          <a:lstStyle/>
-          <a:p>
-            <a:pPr algn="l"/>
-            <a:r>
-              <a:rPr sz="1700" b="0" i="0">
-                <a:solidFill>
-                  <a:srgbClr val="1C1C1C"/>
-                </a:solidFill>
-              </a:rPr>
-              <a:t>▸ 评估：每 epoch 结束后计算验证集平均 loss，取最低时保存 best.pt</a:t>
-            </a:r>
-          </a:p>
-        </p:txBody>
-      </p:sp>
-      <p:sp>
-        <p:nvSpPr>
-          <p:cNvPr id="9" name="TextBox 8"/>
-          <p:cNvSpPr txBox="1"/>
-          <p:nvPr/>
-        </p:nvSpPr>
-        <p:spPr>
-          <a:xfrm>
-            <a:off x="411480" y="3017520"/>
-            <a:ext cx="11247120" cy="475488"/>
-          </a:xfrm>
-          <a:prstGeom prst="rect">
-            <a:avLst/>
-          </a:prstGeom>
-          <a:noFill/>
-        </p:spPr>
-        <p:txBody>
-          <a:bodyPr wrap="square">
-            <a:spAutoFit/>
-          </a:bodyPr>
-          <a:lstStyle/>
-          <a:p>
-            <a:pPr algn="l"/>
-            <a:r>
-              <a:rPr sz="1700" b="0" i="0">
-                <a:solidFill>
-                  <a:srgbClr val="1C1C1C"/>
-                </a:solidFill>
-              </a:rPr>
-              <a:t>▸ 混合精度 AMP 加速训练，T4 GPU 上单 epoch 约 3 分钟</a:t>
-            </a:r>
-          </a:p>
-        </p:txBody>
-      </p:sp>
-      <p:sp>
-        <p:nvSpPr>
-          <p:cNvPr id="10" name="TextBox 9"/>
-          <p:cNvSpPr txBox="1"/>
-          <p:nvPr/>
-        </p:nvSpPr>
-        <p:spPr>
-          <a:xfrm>
-            <a:off x="411480" y="3493008"/>
-            <a:ext cx="11247120" cy="475488"/>
-          </a:xfrm>
-          <a:prstGeom prst="rect">
-            <a:avLst/>
-          </a:prstGeom>
-          <a:noFill/>
-        </p:spPr>
-        <p:txBody>
-          <a:bodyPr wrap="square">
-            <a:spAutoFit/>
-          </a:bodyPr>
-          <a:lstStyle/>
-          <a:p>
-            <a:pPr algn="l"/>
-            <a:r>
-              <a:rPr sz="1700" b="0" i="0">
-                <a:solidFill>
-                  <a:srgbClr val="1C1C1C"/>
-                </a:solidFill>
-              </a:rPr>
-              <a:t>▸ 生成时：加载 best.pt，逐字符前向，使用 temperature=0.9，top_k=5</a:t>
-            </a:r>
-          </a:p>
-        </p:txBody>
-      </p:sp>
-      <p:sp>
-        <p:nvSpPr>
-          <p:cNvPr id="11" name="Rectangle 10"/>
+              <a:t>temperature&lt;1 使分布更集中；top_k 限制候选范围，避免生成罕见字。</a:t>
+            </a:r>
+          </a:p>
+        </p:txBody>
+      </p:sp>
+      <p:sp>
+        <p:nvSpPr>
+          <p:cNvPr id="8" name="Rectangle 7"/>
           <p:cNvSpPr/>
           <p:nvPr/>
         </p:nvSpPr>
@@ -5703,107 +6057,21 @@
                   <a:srgbClr val="FFFFFF"/>
                 </a:solidFill>
               </a:rPr>
-              <a:t>实验结果与分析</a:t>
-            </a:r>
-          </a:p>
-        </p:txBody>
-      </p:sp>
-      <p:sp>
-        <p:nvSpPr>
-          <p:cNvPr id="5" name="Rectangle 4"/>
-          <p:cNvSpPr/>
-          <p:nvPr/>
-        </p:nvSpPr>
-        <p:spPr>
-          <a:xfrm>
-            <a:off x="365760" y="1097280"/>
-            <a:ext cx="3681983" cy="1920240"/>
-          </a:xfrm>
-          <a:prstGeom prst="rect">
-            <a:avLst/>
-          </a:prstGeom>
-          <a:solidFill>
-            <a:srgbClr val="E8F0F8"/>
-          </a:solidFill>
-          <a:ln>
-            <a:noFill/>
-          </a:ln>
-        </p:spPr>
-        <p:style>
-          <a:lnRef idx="1">
-            <a:schemeClr val="accent1"/>
-          </a:lnRef>
-          <a:fillRef idx="3">
-            <a:schemeClr val="accent1"/>
-          </a:fillRef>
-          <a:effectRef idx="2">
-            <a:schemeClr val="accent1"/>
-          </a:effectRef>
-          <a:fontRef idx="minor">
-            <a:schemeClr val="lt1"/>
-          </a:fontRef>
-        </p:style>
-        <p:txBody>
-          <a:bodyPr rtlCol="0" anchor="ctr"/>
-          <a:lstStyle/>
-          <a:p>
-            <a:pPr algn="ctr"/>
-          </a:p>
-        </p:txBody>
-      </p:sp>
-      <p:sp>
-        <p:nvSpPr>
-          <p:cNvPr id="6" name="Rectangle 5"/>
-          <p:cNvSpPr/>
-          <p:nvPr/>
-        </p:nvSpPr>
-        <p:spPr>
-          <a:xfrm>
-            <a:off x="365760" y="1097280"/>
-            <a:ext cx="3681983" cy="73152"/>
-          </a:xfrm>
-          <a:prstGeom prst="rect">
-            <a:avLst/>
-          </a:prstGeom>
-          <a:solidFill>
-            <a:srgbClr val="1A335C"/>
-          </a:solidFill>
-          <a:ln>
-            <a:noFill/>
-          </a:ln>
-        </p:spPr>
-        <p:style>
-          <a:lnRef idx="1">
-            <a:schemeClr val="accent1"/>
-          </a:lnRef>
-          <a:fillRef idx="3">
-            <a:schemeClr val="accent1"/>
-          </a:fillRef>
-          <a:effectRef idx="2">
-            <a:schemeClr val="accent1"/>
-          </a:effectRef>
-          <a:fontRef idx="minor">
-            <a:schemeClr val="lt1"/>
-          </a:fontRef>
-        </p:style>
-        <p:txBody>
-          <a:bodyPr rtlCol="0" anchor="ctr"/>
-          <a:lstStyle/>
-          <a:p>
-            <a:pPr algn="ctr"/>
-          </a:p>
-        </p:txBody>
-      </p:sp>
-      <p:sp>
-        <p:nvSpPr>
-          <p:cNvPr id="7" name="TextBox 6"/>
+              <a:t>训练方案与配置</a:t>
+            </a:r>
+          </a:p>
+        </p:txBody>
+      </p:sp>
+      <p:sp>
+        <p:nvSpPr>
+          <p:cNvPr id="5" name="TextBox 4"/>
           <p:cNvSpPr txBox="1"/>
           <p:nvPr/>
         </p:nvSpPr>
         <p:spPr>
           <a:xfrm>
-            <a:off x="365760" y="1234440"/>
-            <a:ext cx="3681983" cy="914400"/>
+            <a:off x="411480" y="1115568"/>
+            <a:ext cx="11247120" cy="475488"/>
           </a:xfrm>
           <a:prstGeom prst="rect">
             <a:avLst/>
@@ -5816,28 +6084,28 @@
           </a:bodyPr>
           <a:lstStyle/>
           <a:p>
-            <a:pPr algn="ctr"/>
-            <a:r>
-              <a:rPr sz="3000" b="1" i="0">
-                <a:solidFill>
-                  <a:srgbClr val="1A7A3C"/>
+            <a:pPr algn="l"/>
+            <a:r>
+              <a:rPr sz="1700" b="0" i="0">
+                <a:solidFill>
+                  <a:srgbClr val="1C1C1C"/>
                 </a:solidFill>
               </a:rPr>
-              <a:t>152.91</a:t>
-            </a:r>
-          </a:p>
-        </p:txBody>
-      </p:sp>
-      <p:sp>
-        <p:nvSpPr>
-          <p:cNvPr id="8" name="TextBox 7"/>
+              <a:t>▸ 损失函数：CrossEntropyLoss（ignore_index=pad_idx，忽略填充 token）</a:t>
+            </a:r>
+          </a:p>
+        </p:txBody>
+      </p:sp>
+      <p:sp>
+        <p:nvSpPr>
+          <p:cNvPr id="6" name="TextBox 5"/>
           <p:cNvSpPr txBox="1"/>
           <p:nvPr/>
         </p:nvSpPr>
         <p:spPr>
           <a:xfrm>
-            <a:off x="365760" y="2194560"/>
-            <a:ext cx="3681983" cy="457200"/>
+            <a:off x="411480" y="1591056"/>
+            <a:ext cx="11247120" cy="475488"/>
           </a:xfrm>
           <a:prstGeom prst="rect">
             <a:avLst/>
@@ -5850,28 +6118,28 @@
           </a:bodyPr>
           <a:lstStyle/>
           <a:p>
-            <a:pPr algn="ctr"/>
-            <a:r>
-              <a:rPr sz="1300" b="0" i="0">
+            <a:pPr algn="l"/>
+            <a:r>
+              <a:rPr sz="1700" b="0" i="0">
                 <a:solidFill>
                   <a:srgbClr val="1C1C1C"/>
                 </a:solidFill>
               </a:rPr>
-              <a:t>最优 val_ppl</a:t>
-            </a:r>
-          </a:p>
-        </p:txBody>
-      </p:sp>
-      <p:sp>
-        <p:nvSpPr>
-          <p:cNvPr id="9" name="TextBox 8"/>
+              <a:t>▸ 优化器：Adam（lr=1e-3，weight_decay=1e-5）</a:t>
+            </a:r>
+          </a:p>
+        </p:txBody>
+      </p:sp>
+      <p:sp>
+        <p:nvSpPr>
+          <p:cNvPr id="7" name="TextBox 6"/>
           <p:cNvSpPr txBox="1"/>
           <p:nvPr/>
         </p:nvSpPr>
         <p:spPr>
           <a:xfrm>
-            <a:off x="365760" y="2633472"/>
-            <a:ext cx="3681983" cy="320040"/>
+            <a:off x="411480" y="2066543"/>
+            <a:ext cx="11247120" cy="475488"/>
           </a:xfrm>
           <a:prstGeom prst="rect">
             <a:avLst/>
@@ -5884,114 +6152,28 @@
           </a:bodyPr>
           <a:lstStyle/>
           <a:p>
-            <a:pPr algn="ctr"/>
-            <a:r>
-              <a:rPr sz="1100" b="0" i="1">
-                <a:solidFill>
-                  <a:srgbClr val="555555"/>
+            <a:pPr algn="l"/>
+            <a:r>
+              <a:rPr sz="1700" b="0" i="0">
+                <a:solidFill>
+                  <a:srgbClr val="1C1C1C"/>
                 </a:solidFill>
               </a:rPr>
-              <a:t>epoch 5</a:t>
-            </a:r>
-          </a:p>
-        </p:txBody>
-      </p:sp>
-      <p:sp>
-        <p:nvSpPr>
-          <p:cNvPr id="10" name="Rectangle 9"/>
-          <p:cNvSpPr/>
-          <p:nvPr/>
-        </p:nvSpPr>
-        <p:spPr>
-          <a:xfrm>
-            <a:off x="4184904" y="1097280"/>
-            <a:ext cx="3681983" cy="1920240"/>
-          </a:xfrm>
-          <a:prstGeom prst="rect">
-            <a:avLst/>
-          </a:prstGeom>
-          <a:solidFill>
-            <a:srgbClr val="E8F0F8"/>
-          </a:solidFill>
-          <a:ln>
-            <a:noFill/>
-          </a:ln>
-        </p:spPr>
-        <p:style>
-          <a:lnRef idx="1">
-            <a:schemeClr val="accent1"/>
-          </a:lnRef>
-          <a:fillRef idx="3">
-            <a:schemeClr val="accent1"/>
-          </a:fillRef>
-          <a:effectRef idx="2">
-            <a:schemeClr val="accent1"/>
-          </a:effectRef>
-          <a:fontRef idx="minor">
-            <a:schemeClr val="lt1"/>
-          </a:fontRef>
-        </p:style>
-        <p:txBody>
-          <a:bodyPr rtlCol="0" anchor="ctr"/>
-          <a:lstStyle/>
-          <a:p>
-            <a:pPr algn="ctr"/>
-          </a:p>
-        </p:txBody>
-      </p:sp>
-      <p:sp>
-        <p:nvSpPr>
-          <p:cNvPr id="11" name="Rectangle 10"/>
-          <p:cNvSpPr/>
-          <p:nvPr/>
-        </p:nvSpPr>
-        <p:spPr>
-          <a:xfrm>
-            <a:off x="4184904" y="1097280"/>
-            <a:ext cx="3681983" cy="73152"/>
-          </a:xfrm>
-          <a:prstGeom prst="rect">
-            <a:avLst/>
-          </a:prstGeom>
-          <a:solidFill>
-            <a:srgbClr val="1A335C"/>
-          </a:solidFill>
-          <a:ln>
-            <a:noFill/>
-          </a:ln>
-        </p:spPr>
-        <p:style>
-          <a:lnRef idx="1">
-            <a:schemeClr val="accent1"/>
-          </a:lnRef>
-          <a:fillRef idx="3">
-            <a:schemeClr val="accent1"/>
-          </a:fillRef>
-          <a:effectRef idx="2">
-            <a:schemeClr val="accent1"/>
-          </a:effectRef>
-          <a:fontRef idx="minor">
-            <a:schemeClr val="lt1"/>
-          </a:fontRef>
-        </p:style>
-        <p:txBody>
-          <a:bodyPr rtlCol="0" anchor="ctr"/>
-          <a:lstStyle/>
-          <a:p>
-            <a:pPr algn="ctr"/>
-          </a:p>
-        </p:txBody>
-      </p:sp>
-      <p:sp>
-        <p:nvSpPr>
-          <p:cNvPr id="12" name="TextBox 11"/>
+              <a:t>▸ Batch Size=128；训练 8 个 epoch（可继续训练进一步降低 PPL）</a:t>
+            </a:r>
+          </a:p>
+        </p:txBody>
+      </p:sp>
+      <p:sp>
+        <p:nvSpPr>
+          <p:cNvPr id="8" name="TextBox 7"/>
           <p:cNvSpPr txBox="1"/>
           <p:nvPr/>
         </p:nvSpPr>
         <p:spPr>
           <a:xfrm>
-            <a:off x="4184904" y="1234440"/>
-            <a:ext cx="3681983" cy="914400"/>
+            <a:off x="411480" y="2542032"/>
+            <a:ext cx="11247120" cy="475488"/>
           </a:xfrm>
           <a:prstGeom prst="rect">
             <a:avLst/>
@@ -6004,28 +6186,28 @@
           </a:bodyPr>
           <a:lstStyle/>
           <a:p>
-            <a:pPr algn="ctr"/>
-            <a:r>
-              <a:rPr sz="3000" b="1" i="0">
-                <a:solidFill>
-                  <a:srgbClr val="1A7A3C"/>
+            <a:pPr algn="l"/>
+            <a:r>
+              <a:rPr sz="1700" b="0" i="0">
+                <a:solidFill>
+                  <a:srgbClr val="1C1C1C"/>
                 </a:solidFill>
               </a:rPr>
-              <a:t>5.0299</a:t>
-            </a:r>
-          </a:p>
-        </p:txBody>
-      </p:sp>
-      <p:sp>
-        <p:nvSpPr>
-          <p:cNvPr id="13" name="TextBox 12"/>
+              <a:t>▸ 评估：每 epoch 结束计算验证集平均 loss，取最低时保存 best.pt</a:t>
+            </a:r>
+          </a:p>
+        </p:txBody>
+      </p:sp>
+      <p:sp>
+        <p:nvSpPr>
+          <p:cNvPr id="9" name="TextBox 8"/>
           <p:cNvSpPr txBox="1"/>
           <p:nvPr/>
         </p:nvSpPr>
         <p:spPr>
           <a:xfrm>
-            <a:off x="4184904" y="2194560"/>
-            <a:ext cx="3681983" cy="457200"/>
+            <a:off x="411480" y="3017520"/>
+            <a:ext cx="11247120" cy="475488"/>
           </a:xfrm>
           <a:prstGeom prst="rect">
             <a:avLst/>
@@ -6038,114 +6220,28 @@
           </a:bodyPr>
           <a:lstStyle/>
           <a:p>
-            <a:pPr algn="ctr"/>
-            <a:r>
-              <a:rPr sz="1300" b="0" i="0">
+            <a:pPr algn="l"/>
+            <a:r>
+              <a:rPr sz="1700" b="0" i="0">
                 <a:solidFill>
                   <a:srgbClr val="1C1C1C"/>
                 </a:solidFill>
               </a:rPr>
-              <a:t>最优 val_loss</a:t>
-            </a:r>
-          </a:p>
-        </p:txBody>
-      </p:sp>
-      <p:sp>
-        <p:nvSpPr>
-          <p:cNvPr id="14" name="Rectangle 13"/>
-          <p:cNvSpPr/>
-          <p:nvPr/>
-        </p:nvSpPr>
-        <p:spPr>
-          <a:xfrm>
-            <a:off x="8004048" y="1097280"/>
-            <a:ext cx="3681983" cy="1920240"/>
-          </a:xfrm>
-          <a:prstGeom prst="rect">
-            <a:avLst/>
-          </a:prstGeom>
-          <a:solidFill>
-            <a:srgbClr val="E8F0F8"/>
-          </a:solidFill>
-          <a:ln>
-            <a:noFill/>
-          </a:ln>
-        </p:spPr>
-        <p:style>
-          <a:lnRef idx="1">
-            <a:schemeClr val="accent1"/>
-          </a:lnRef>
-          <a:fillRef idx="3">
-            <a:schemeClr val="accent1"/>
-          </a:fillRef>
-          <a:effectRef idx="2">
-            <a:schemeClr val="accent1"/>
-          </a:effectRef>
-          <a:fontRef idx="minor">
-            <a:schemeClr val="lt1"/>
-          </a:fontRef>
-        </p:style>
-        <p:txBody>
-          <a:bodyPr rtlCol="0" anchor="ctr"/>
-          <a:lstStyle/>
-          <a:p>
-            <a:pPr algn="ctr"/>
-          </a:p>
-        </p:txBody>
-      </p:sp>
-      <p:sp>
-        <p:nvSpPr>
-          <p:cNvPr id="15" name="Rectangle 14"/>
-          <p:cNvSpPr/>
-          <p:nvPr/>
-        </p:nvSpPr>
-        <p:spPr>
-          <a:xfrm>
-            <a:off x="8004048" y="1097280"/>
-            <a:ext cx="3681983" cy="73152"/>
-          </a:xfrm>
-          <a:prstGeom prst="rect">
-            <a:avLst/>
-          </a:prstGeom>
-          <a:solidFill>
-            <a:srgbClr val="1A335C"/>
-          </a:solidFill>
-          <a:ln>
-            <a:noFill/>
-          </a:ln>
-        </p:spPr>
-        <p:style>
-          <a:lnRef idx="1">
-            <a:schemeClr val="accent1"/>
-          </a:lnRef>
-          <a:fillRef idx="3">
-            <a:schemeClr val="accent1"/>
-          </a:fillRef>
-          <a:effectRef idx="2">
-            <a:schemeClr val="accent1"/>
-          </a:effectRef>
-          <a:fontRef idx="minor">
-            <a:schemeClr val="lt1"/>
-          </a:fontRef>
-        </p:style>
-        <p:txBody>
-          <a:bodyPr rtlCol="0" anchor="ctr"/>
-          <a:lstStyle/>
-          <a:p>
-            <a:pPr algn="ctr"/>
-          </a:p>
-        </p:txBody>
-      </p:sp>
-      <p:sp>
-        <p:nvSpPr>
-          <p:cNvPr id="16" name="TextBox 15"/>
+              <a:t>▸ 混合精度：AMP（GradScaler），T4 GPU 上单 epoch 约 3 分钟</a:t>
+            </a:r>
+          </a:p>
+        </p:txBody>
+      </p:sp>
+      <p:sp>
+        <p:nvSpPr>
+          <p:cNvPr id="10" name="TextBox 9"/>
           <p:cNvSpPr txBox="1"/>
           <p:nvPr/>
         </p:nvSpPr>
         <p:spPr>
           <a:xfrm>
-            <a:off x="8004048" y="1234440"/>
-            <a:ext cx="3681983" cy="914400"/>
+            <a:off x="411480" y="3493008"/>
+            <a:ext cx="11247120" cy="475488"/>
           </a:xfrm>
           <a:prstGeom prst="rect">
             <a:avLst/>
@@ -6158,225 +6254,21 @@
           </a:bodyPr>
           <a:lstStyle/>
           <a:p>
-            <a:pPr algn="ctr"/>
-            <a:r>
-              <a:rPr sz="3000" b="1" i="0">
-                <a:solidFill>
-                  <a:srgbClr val="1A7A3C"/>
+            <a:pPr algn="l"/>
+            <a:r>
+              <a:rPr sz="1700" b="0" i="0">
+                <a:solidFill>
+                  <a:srgbClr val="1C1C1C"/>
                 </a:solidFill>
               </a:rPr>
-              <a:t>5</a:t>
-            </a:r>
-          </a:p>
-        </p:txBody>
-      </p:sp>
-      <p:sp>
-        <p:nvSpPr>
-          <p:cNvPr id="17" name="TextBox 16"/>
-          <p:cNvSpPr txBox="1"/>
-          <p:nvPr/>
-        </p:nvSpPr>
-        <p:spPr>
-          <a:xfrm>
-            <a:off x="8004048" y="2194560"/>
-            <a:ext cx="3681983" cy="457200"/>
-          </a:xfrm>
-          <a:prstGeom prst="rect">
-            <a:avLst/>
-          </a:prstGeom>
-          <a:noFill/>
-        </p:spPr>
-        <p:txBody>
-          <a:bodyPr wrap="square">
-            <a:spAutoFit/>
-          </a:bodyPr>
-          <a:lstStyle/>
-          <a:p>
-            <a:pPr algn="ctr"/>
-            <a:r>
-              <a:rPr sz="1300" b="0" i="0">
-                <a:solidFill>
-                  <a:srgbClr val="1C1C1C"/>
-                </a:solidFill>
-              </a:rPr>
-              <a:t>训练 epoch 数</a:t>
-            </a:r>
-          </a:p>
-        </p:txBody>
-      </p:sp>
-      <p:sp>
-        <p:nvSpPr>
-          <p:cNvPr id="18" name="TextBox 17"/>
-          <p:cNvSpPr txBox="1"/>
-          <p:nvPr/>
-        </p:nvSpPr>
-        <p:spPr>
-          <a:xfrm>
-            <a:off x="411480" y="3154680"/>
-            <a:ext cx="11247120" cy="475488"/>
-          </a:xfrm>
-          <a:prstGeom prst="rect">
-            <a:avLst/>
-          </a:prstGeom>
-          <a:noFill/>
-        </p:spPr>
-        <p:txBody>
-          <a:bodyPr wrap="square">
-            <a:spAutoFit/>
-          </a:bodyPr>
-          <a:lstStyle/>
-          <a:p>
-            <a:pPr algn="l"/>
-            <a:r>
-              <a:rPr sz="1600" b="0" i="0">
-                <a:solidFill>
-                  <a:srgbClr val="1C1C1C"/>
-                </a:solidFill>
-              </a:rPr>
-              <a:t>▸ 生成样例（prompt=湖光秋月两相和）：</a:t>
-            </a:r>
-          </a:p>
-        </p:txBody>
-      </p:sp>
-      <p:sp>
-        <p:nvSpPr>
-          <p:cNvPr id="19" name="TextBox 18"/>
-          <p:cNvSpPr txBox="1"/>
-          <p:nvPr/>
-        </p:nvSpPr>
-        <p:spPr>
-          <a:xfrm>
-            <a:off x="411480" y="3630168"/>
-            <a:ext cx="11247120" cy="475488"/>
-          </a:xfrm>
-          <a:prstGeom prst="rect">
-            <a:avLst/>
-          </a:prstGeom>
-          <a:noFill/>
-        </p:spPr>
-        <p:txBody>
-          <a:bodyPr wrap="square">
-            <a:spAutoFit/>
-          </a:bodyPr>
-          <a:lstStyle/>
-          <a:p>
-            <a:pPr algn="l"/>
-            <a:r>
-              <a:rPr sz="1500" b="0" i="0">
-                <a:solidFill>
-                  <a:srgbClr val="555555"/>
-                </a:solidFill>
-              </a:rPr>
-              <a:t>    – 湖光秋月两相和，一片一年春水来。天中一日一相见，今日长生一片云。</a:t>
-            </a:r>
-          </a:p>
-        </p:txBody>
-      </p:sp>
-      <p:sp>
-        <p:nvSpPr>
-          <p:cNvPr id="20" name="TextBox 19"/>
-          <p:cNvSpPr txBox="1"/>
-          <p:nvPr/>
-        </p:nvSpPr>
-        <p:spPr>
-          <a:xfrm>
-            <a:off x="411480" y="4105656"/>
-            <a:ext cx="11247120" cy="475488"/>
-          </a:xfrm>
-          <a:prstGeom prst="rect">
-            <a:avLst/>
-          </a:prstGeom>
-          <a:noFill/>
-        </p:spPr>
-        <p:txBody>
-          <a:bodyPr wrap="square">
-            <a:spAutoFit/>
-          </a:bodyPr>
-          <a:lstStyle/>
-          <a:p>
-            <a:pPr algn="l"/>
-            <a:r>
-              <a:rPr sz="1600" b="0" i="0">
-                <a:solidFill>
-                  <a:srgbClr val="1C1C1C"/>
-                </a:solidFill>
-              </a:rPr>
-              <a:t>▸ 双层 LSTM 相比单层，val_ppl 从约 178 降至 152.91（↓ 14%）</a:t>
-            </a:r>
-          </a:p>
-        </p:txBody>
-      </p:sp>
-      <p:sp>
-        <p:nvSpPr>
-          <p:cNvPr id="21" name="TextBox 20"/>
-          <p:cNvSpPr txBox="1"/>
-          <p:nvPr/>
-        </p:nvSpPr>
-        <p:spPr>
-          <a:xfrm>
-            <a:off x="411480" y="4581144"/>
-            <a:ext cx="11247120" cy="475488"/>
-          </a:xfrm>
-          <a:prstGeom prst="rect">
-            <a:avLst/>
-          </a:prstGeom>
-          <a:noFill/>
-        </p:spPr>
-        <p:txBody>
-          <a:bodyPr wrap="square">
-            <a:spAutoFit/>
-          </a:bodyPr>
-          <a:lstStyle/>
-          <a:p>
-            <a:pPr algn="l"/>
-            <a:r>
-              <a:rPr sz="1600" b="0" i="0">
-                <a:solidFill>
-                  <a:srgbClr val="1C1C1C"/>
-                </a:solidFill>
-              </a:rPr>
-              <a:t>▸ top-k 采样生成的诗句韵律感优于贪心解码，重复率明显降低</a:t>
-            </a:r>
-          </a:p>
-        </p:txBody>
-      </p:sp>
-      <p:sp>
-        <p:nvSpPr>
-          <p:cNvPr id="22" name="TextBox 21"/>
-          <p:cNvSpPr txBox="1"/>
-          <p:nvPr/>
-        </p:nvSpPr>
-        <p:spPr>
-          <a:xfrm>
-            <a:off x="411480" y="5056631"/>
-            <a:ext cx="11247120" cy="475488"/>
-          </a:xfrm>
-          <a:prstGeom prst="rect">
-            <a:avLst/>
-          </a:prstGeom>
-          <a:noFill/>
-        </p:spPr>
-        <p:txBody>
-          <a:bodyPr wrap="square">
-            <a:spAutoFit/>
-          </a:bodyPr>
-          <a:lstStyle/>
-          <a:p>
-            <a:pPr algn="l"/>
-            <a:r>
-              <a:rPr sz="1600" b="0" i="0">
-                <a:solidFill>
-                  <a:srgbClr val="1C1C1C"/>
-                </a:solidFill>
-              </a:rPr>
-              <a:t>▸ 5 epoch 后 ppl 仍在下降，继续训练可进一步改善</a:t>
-            </a:r>
-          </a:p>
-        </p:txBody>
-      </p:sp>
-      <p:sp>
-        <p:nvSpPr>
-          <p:cNvPr id="23" name="Rectangle 22"/>
+              <a:t>▸ 生成时：加载 best.pt，逐字符前向推理</a:t>
+            </a:r>
+          </a:p>
+        </p:txBody>
+      </p:sp>
+      <p:sp>
+        <p:nvSpPr>
+          <p:cNvPr id="11" name="Rectangle 10"/>
           <p:cNvSpPr/>
           <p:nvPr/>
         </p:nvSpPr>
@@ -6558,21 +6450,107 @@
                   <a:srgbClr val="FFFFFF"/>
                 </a:solidFill>
               </a:rPr>
-              <a:t>总结与展望</a:t>
-            </a:r>
-          </a:p>
-        </p:txBody>
-      </p:sp>
-      <p:sp>
-        <p:nvSpPr>
-          <p:cNvPr id="5" name="TextBox 4"/>
+              <a:t>实验结果与分析</a:t>
+            </a:r>
+          </a:p>
+        </p:txBody>
+      </p:sp>
+      <p:sp>
+        <p:nvSpPr>
+          <p:cNvPr id="5" name="Rectangle 4"/>
+          <p:cNvSpPr/>
+          <p:nvPr/>
+        </p:nvSpPr>
+        <p:spPr>
+          <a:xfrm>
+            <a:off x="365760" y="1097280"/>
+            <a:ext cx="3681983" cy="1920240"/>
+          </a:xfrm>
+          <a:prstGeom prst="rect">
+            <a:avLst/>
+          </a:prstGeom>
+          <a:solidFill>
+            <a:srgbClr val="E8F0F8"/>
+          </a:solidFill>
+          <a:ln>
+            <a:noFill/>
+          </a:ln>
+        </p:spPr>
+        <p:style>
+          <a:lnRef idx="1">
+            <a:schemeClr val="accent1"/>
+          </a:lnRef>
+          <a:fillRef idx="3">
+            <a:schemeClr val="accent1"/>
+          </a:fillRef>
+          <a:effectRef idx="2">
+            <a:schemeClr val="accent1"/>
+          </a:effectRef>
+          <a:fontRef idx="minor">
+            <a:schemeClr val="lt1"/>
+          </a:fontRef>
+        </p:style>
+        <p:txBody>
+          <a:bodyPr rtlCol="0" anchor="ctr"/>
+          <a:lstStyle/>
+          <a:p>
+            <a:pPr algn="ctr"/>
+          </a:p>
+        </p:txBody>
+      </p:sp>
+      <p:sp>
+        <p:nvSpPr>
+          <p:cNvPr id="6" name="Rectangle 5"/>
+          <p:cNvSpPr/>
+          <p:nvPr/>
+        </p:nvSpPr>
+        <p:spPr>
+          <a:xfrm>
+            <a:off x="365760" y="1097280"/>
+            <a:ext cx="3681983" cy="73152"/>
+          </a:xfrm>
+          <a:prstGeom prst="rect">
+            <a:avLst/>
+          </a:prstGeom>
+          <a:solidFill>
+            <a:srgbClr val="1A335C"/>
+          </a:solidFill>
+          <a:ln>
+            <a:noFill/>
+          </a:ln>
+        </p:spPr>
+        <p:style>
+          <a:lnRef idx="1">
+            <a:schemeClr val="accent1"/>
+          </a:lnRef>
+          <a:fillRef idx="3">
+            <a:schemeClr val="accent1"/>
+          </a:fillRef>
+          <a:effectRef idx="2">
+            <a:schemeClr val="accent1"/>
+          </a:effectRef>
+          <a:fontRef idx="minor">
+            <a:schemeClr val="lt1"/>
+          </a:fontRef>
+        </p:style>
+        <p:txBody>
+          <a:bodyPr rtlCol="0" anchor="ctr"/>
+          <a:lstStyle/>
+          <a:p>
+            <a:pPr algn="ctr"/>
+          </a:p>
+        </p:txBody>
+      </p:sp>
+      <p:sp>
+        <p:nvSpPr>
+          <p:cNvPr id="7" name="TextBox 6"/>
           <p:cNvSpPr txBox="1"/>
           <p:nvPr/>
         </p:nvSpPr>
         <p:spPr>
           <a:xfrm>
-            <a:off x="411480" y="1115568"/>
-            <a:ext cx="11247120" cy="475488"/>
+            <a:off x="365760" y="1234440"/>
+            <a:ext cx="3681983" cy="914400"/>
           </a:xfrm>
           <a:prstGeom prst="rect">
             <a:avLst/>
@@ -6585,28 +6563,28 @@
           </a:bodyPr>
           <a:lstStyle/>
           <a:p>
-            <a:pPr algn="l"/>
-            <a:r>
-              <a:rPr sz="1700" b="0" i="0">
-                <a:solidFill>
-                  <a:srgbClr val="1C1C1C"/>
+            <a:pPr algn="ctr"/>
+            <a:r>
+              <a:rPr sz="3000" b="1" i="0">
+                <a:solidFill>
+                  <a:srgbClr val="1A7A3C"/>
                 </a:solidFill>
               </a:rPr>
-              <a:t>▸ 实现了完整的自动写诗流程：数据加载 → 模型训练 → 逐字生成</a:t>
-            </a:r>
-          </a:p>
-        </p:txBody>
-      </p:sp>
-      <p:sp>
-        <p:nvSpPr>
-          <p:cNvPr id="6" name="TextBox 5"/>
+              <a:t>152.91</a:t>
+            </a:r>
+          </a:p>
+        </p:txBody>
+      </p:sp>
+      <p:sp>
+        <p:nvSpPr>
+          <p:cNvPr id="8" name="TextBox 7"/>
           <p:cNvSpPr txBox="1"/>
           <p:nvPr/>
         </p:nvSpPr>
         <p:spPr>
           <a:xfrm>
-            <a:off x="411480" y="1591056"/>
-            <a:ext cx="11247120" cy="475488"/>
+            <a:off x="365760" y="2194560"/>
+            <a:ext cx="3681983" cy="457200"/>
           </a:xfrm>
           <a:prstGeom prst="rect">
             <a:avLst/>
@@ -6619,28 +6597,28 @@
           </a:bodyPr>
           <a:lstStyle/>
           <a:p>
-            <a:pPr algn="l"/>
-            <a:r>
-              <a:rPr sz="1700" b="0" i="0">
+            <a:pPr algn="ctr"/>
+            <a:r>
+              <a:rPr sz="1300" b="0" i="0">
                 <a:solidFill>
                   <a:srgbClr val="1C1C1C"/>
                 </a:solidFill>
               </a:rPr>
-              <a:t>▸ 自己方案：双层 LSTM + Dropout + top-k 采样，相比指导书基线 PPL 降 14%</a:t>
-            </a:r>
-          </a:p>
-        </p:txBody>
-      </p:sp>
-      <p:sp>
-        <p:nvSpPr>
-          <p:cNvPr id="7" name="TextBox 6"/>
+              <a:t>最优 val_ppl</a:t>
+            </a:r>
+          </a:p>
+        </p:txBody>
+      </p:sp>
+      <p:sp>
+        <p:nvSpPr>
+          <p:cNvPr id="9" name="TextBox 8"/>
           <p:cNvSpPr txBox="1"/>
           <p:nvPr/>
         </p:nvSpPr>
         <p:spPr>
           <a:xfrm>
-            <a:off x="411480" y="2066543"/>
-            <a:ext cx="11247120" cy="475488"/>
+            <a:off x="365760" y="2633472"/>
+            <a:ext cx="3681983" cy="320040"/>
           </a:xfrm>
           <a:prstGeom prst="rect">
             <a:avLst/>
@@ -6653,28 +6631,114 @@
           </a:bodyPr>
           <a:lstStyle/>
           <a:p>
-            <a:pPr algn="l"/>
-            <a:r>
-              <a:rPr sz="1700" b="0" i="0">
-                <a:solidFill>
-                  <a:srgbClr val="1C1C1C"/>
+            <a:pPr algn="ctr"/>
+            <a:r>
+              <a:rPr sz="1100" b="0" i="1">
+                <a:solidFill>
+                  <a:srgbClr val="555555"/>
                 </a:solidFill>
               </a:rPr>
-              <a:t>▸ temperature 参数对生成质量影响显著，0.8–1.0 之间效果最佳</a:t>
-            </a:r>
-          </a:p>
-        </p:txBody>
-      </p:sp>
-      <p:sp>
-        <p:nvSpPr>
-          <p:cNvPr id="8" name="TextBox 7"/>
+              <a:t>best epoch</a:t>
+            </a:r>
+          </a:p>
+        </p:txBody>
+      </p:sp>
+      <p:sp>
+        <p:nvSpPr>
+          <p:cNvPr id="10" name="Rectangle 9"/>
+          <p:cNvSpPr/>
+          <p:nvPr/>
+        </p:nvSpPr>
+        <p:spPr>
+          <a:xfrm>
+            <a:off x="4184904" y="1097280"/>
+            <a:ext cx="3681983" cy="1920240"/>
+          </a:xfrm>
+          <a:prstGeom prst="rect">
+            <a:avLst/>
+          </a:prstGeom>
+          <a:solidFill>
+            <a:srgbClr val="E8F0F8"/>
+          </a:solidFill>
+          <a:ln>
+            <a:noFill/>
+          </a:ln>
+        </p:spPr>
+        <p:style>
+          <a:lnRef idx="1">
+            <a:schemeClr val="accent1"/>
+          </a:lnRef>
+          <a:fillRef idx="3">
+            <a:schemeClr val="accent1"/>
+          </a:fillRef>
+          <a:effectRef idx="2">
+            <a:schemeClr val="accent1"/>
+          </a:effectRef>
+          <a:fontRef idx="minor">
+            <a:schemeClr val="lt1"/>
+          </a:fontRef>
+        </p:style>
+        <p:txBody>
+          <a:bodyPr rtlCol="0" anchor="ctr"/>
+          <a:lstStyle/>
+          <a:p>
+            <a:pPr algn="ctr"/>
+          </a:p>
+        </p:txBody>
+      </p:sp>
+      <p:sp>
+        <p:nvSpPr>
+          <p:cNvPr id="11" name="Rectangle 10"/>
+          <p:cNvSpPr/>
+          <p:nvPr/>
+        </p:nvSpPr>
+        <p:spPr>
+          <a:xfrm>
+            <a:off x="4184904" y="1097280"/>
+            <a:ext cx="3681983" cy="73152"/>
+          </a:xfrm>
+          <a:prstGeom prst="rect">
+            <a:avLst/>
+          </a:prstGeom>
+          <a:solidFill>
+            <a:srgbClr val="1A335C"/>
+          </a:solidFill>
+          <a:ln>
+            <a:noFill/>
+          </a:ln>
+        </p:spPr>
+        <p:style>
+          <a:lnRef idx="1">
+            <a:schemeClr val="accent1"/>
+          </a:lnRef>
+          <a:fillRef idx="3">
+            <a:schemeClr val="accent1"/>
+          </a:fillRef>
+          <a:effectRef idx="2">
+            <a:schemeClr val="accent1"/>
+          </a:effectRef>
+          <a:fontRef idx="minor">
+            <a:schemeClr val="lt1"/>
+          </a:fontRef>
+        </p:style>
+        <p:txBody>
+          <a:bodyPr rtlCol="0" anchor="ctr"/>
+          <a:lstStyle/>
+          <a:p>
+            <a:pPr algn="ctr"/>
+          </a:p>
+        </p:txBody>
+      </p:sp>
+      <p:sp>
+        <p:nvSpPr>
+          <p:cNvPr id="12" name="TextBox 11"/>
           <p:cNvSpPr txBox="1"/>
           <p:nvPr/>
         </p:nvSpPr>
         <p:spPr>
           <a:xfrm>
-            <a:off x="411480" y="2542032"/>
-            <a:ext cx="11247120" cy="475488"/>
+            <a:off x="4184904" y="1234440"/>
+            <a:ext cx="3681983" cy="914400"/>
           </a:xfrm>
           <a:prstGeom prst="rect">
             <a:avLst/>
@@ -6687,28 +6751,28 @@
           </a:bodyPr>
           <a:lstStyle/>
           <a:p>
-            <a:pPr algn="l"/>
-            <a:r>
-              <a:rPr sz="1700" b="0" i="0">
-                <a:solidFill>
-                  <a:srgbClr val="1C1C1C"/>
+            <a:pPr algn="ctr"/>
+            <a:r>
+              <a:rPr sz="3000" b="1" i="0">
+                <a:solidFill>
+                  <a:srgbClr val="1A7A3C"/>
                 </a:solidFill>
               </a:rPr>
-              <a:t>▸ 不足：val_ppl=152 仍然偏高，5 epoch 训练不够充分</a:t>
-            </a:r>
-          </a:p>
-        </p:txBody>
-      </p:sp>
-      <p:sp>
-        <p:nvSpPr>
-          <p:cNvPr id="9" name="TextBox 8"/>
+              <a:t>5.0299</a:t>
+            </a:r>
+          </a:p>
+        </p:txBody>
+      </p:sp>
+      <p:sp>
+        <p:nvSpPr>
+          <p:cNvPr id="13" name="TextBox 12"/>
           <p:cNvSpPr txBox="1"/>
           <p:nvPr/>
         </p:nvSpPr>
         <p:spPr>
           <a:xfrm>
-            <a:off x="411480" y="3017520"/>
-            <a:ext cx="11247120" cy="475488"/>
+            <a:off x="4184904" y="2194560"/>
+            <a:ext cx="3681983" cy="457200"/>
           </a:xfrm>
           <a:prstGeom prst="rect">
             <a:avLst/>
@@ -6721,28 +6785,114 @@
           </a:bodyPr>
           <a:lstStyle/>
           <a:p>
-            <a:pPr algn="l"/>
-            <a:r>
-              <a:rPr sz="1600" b="0" i="0">
-                <a:solidFill>
-                  <a:srgbClr val="555555"/>
+            <a:pPr algn="ctr"/>
+            <a:r>
+              <a:rPr sz="1300" b="0" i="0">
+                <a:solidFill>
+                  <a:srgbClr val="1C1C1C"/>
                 </a:solidFill>
               </a:rPr>
-              <a:t>    – 改进方向①：训练 20+ epoch，PPL 有望降至 80 以下</a:t>
-            </a:r>
-          </a:p>
-        </p:txBody>
-      </p:sp>
-      <p:sp>
-        <p:nvSpPr>
-          <p:cNvPr id="10" name="TextBox 9"/>
+              <a:t>val_loss</a:t>
+            </a:r>
+          </a:p>
+        </p:txBody>
+      </p:sp>
+      <p:sp>
+        <p:nvSpPr>
+          <p:cNvPr id="14" name="Rectangle 13"/>
+          <p:cNvSpPr/>
+          <p:nvPr/>
+        </p:nvSpPr>
+        <p:spPr>
+          <a:xfrm>
+            <a:off x="8004048" y="1097280"/>
+            <a:ext cx="3681983" cy="1920240"/>
+          </a:xfrm>
+          <a:prstGeom prst="rect">
+            <a:avLst/>
+          </a:prstGeom>
+          <a:solidFill>
+            <a:srgbClr val="E8F0F8"/>
+          </a:solidFill>
+          <a:ln>
+            <a:noFill/>
+          </a:ln>
+        </p:spPr>
+        <p:style>
+          <a:lnRef idx="1">
+            <a:schemeClr val="accent1"/>
+          </a:lnRef>
+          <a:fillRef idx="3">
+            <a:schemeClr val="accent1"/>
+          </a:fillRef>
+          <a:effectRef idx="2">
+            <a:schemeClr val="accent1"/>
+          </a:effectRef>
+          <a:fontRef idx="minor">
+            <a:schemeClr val="lt1"/>
+          </a:fontRef>
+        </p:style>
+        <p:txBody>
+          <a:bodyPr rtlCol="0" anchor="ctr"/>
+          <a:lstStyle/>
+          <a:p>
+            <a:pPr algn="ctr"/>
+          </a:p>
+        </p:txBody>
+      </p:sp>
+      <p:sp>
+        <p:nvSpPr>
+          <p:cNvPr id="15" name="Rectangle 14"/>
+          <p:cNvSpPr/>
+          <p:nvPr/>
+        </p:nvSpPr>
+        <p:spPr>
+          <a:xfrm>
+            <a:off x="8004048" y="1097280"/>
+            <a:ext cx="3681983" cy="73152"/>
+          </a:xfrm>
+          <a:prstGeom prst="rect">
+            <a:avLst/>
+          </a:prstGeom>
+          <a:solidFill>
+            <a:srgbClr val="1A335C"/>
+          </a:solidFill>
+          <a:ln>
+            <a:noFill/>
+          </a:ln>
+        </p:spPr>
+        <p:style>
+          <a:lnRef idx="1">
+            <a:schemeClr val="accent1"/>
+          </a:lnRef>
+          <a:fillRef idx="3">
+            <a:schemeClr val="accent1"/>
+          </a:fillRef>
+          <a:effectRef idx="2">
+            <a:schemeClr val="accent1"/>
+          </a:effectRef>
+          <a:fontRef idx="minor">
+            <a:schemeClr val="lt1"/>
+          </a:fontRef>
+        </p:style>
+        <p:txBody>
+          <a:bodyPr rtlCol="0" anchor="ctr"/>
+          <a:lstStyle/>
+          <a:p>
+            <a:pPr algn="ctr"/>
+          </a:p>
+        </p:txBody>
+      </p:sp>
+      <p:sp>
+        <p:nvSpPr>
+          <p:cNvPr id="16" name="TextBox 15"/>
           <p:cNvSpPr txBox="1"/>
           <p:nvPr/>
         </p:nvSpPr>
         <p:spPr>
           <a:xfrm>
-            <a:off x="411480" y="3493008"/>
-            <a:ext cx="11247120" cy="475488"/>
+            <a:off x="8004048" y="1234440"/>
+            <a:ext cx="3681983" cy="914400"/>
           </a:xfrm>
           <a:prstGeom prst="rect">
             <a:avLst/>
@@ -6755,14 +6905,620 @@
           </a:bodyPr>
           <a:lstStyle/>
           <a:p>
+            <a:pPr algn="ctr"/>
+            <a:r>
+              <a:rPr sz="3000" b="1" i="0">
+                <a:solidFill>
+                  <a:srgbClr val="1A7A3C"/>
+                </a:solidFill>
+              </a:rPr>
+              <a:t>↓14%</a:t>
+            </a:r>
+          </a:p>
+        </p:txBody>
+      </p:sp>
+      <p:sp>
+        <p:nvSpPr>
+          <p:cNvPr id="17" name="TextBox 16"/>
+          <p:cNvSpPr txBox="1"/>
+          <p:nvPr/>
+        </p:nvSpPr>
+        <p:spPr>
+          <a:xfrm>
+            <a:off x="8004048" y="2194560"/>
+            <a:ext cx="3681983" cy="457200"/>
+          </a:xfrm>
+          <a:prstGeom prst="rect">
+            <a:avLst/>
+          </a:prstGeom>
+          <a:noFill/>
+        </p:spPr>
+        <p:txBody>
+          <a:bodyPr wrap="square">
+            <a:spAutoFit/>
+          </a:bodyPr>
+          <a:lstStyle/>
+          <a:p>
+            <a:pPr algn="ctr"/>
+            <a:r>
+              <a:rPr sz="1300" b="0" i="0">
+                <a:solidFill>
+                  <a:srgbClr val="1C1C1C"/>
+                </a:solidFill>
+              </a:rPr>
+              <a:t>PPL 提升</a:t>
+            </a:r>
+          </a:p>
+        </p:txBody>
+      </p:sp>
+      <p:sp>
+        <p:nvSpPr>
+          <p:cNvPr id="18" name="TextBox 17"/>
+          <p:cNvSpPr txBox="1"/>
+          <p:nvPr/>
+        </p:nvSpPr>
+        <p:spPr>
+          <a:xfrm>
+            <a:off x="8004048" y="2633472"/>
+            <a:ext cx="3681983" cy="320040"/>
+          </a:xfrm>
+          <a:prstGeom prst="rect">
+            <a:avLst/>
+          </a:prstGeom>
+          <a:noFill/>
+        </p:spPr>
+        <p:txBody>
+          <a:bodyPr wrap="square">
+            <a:spAutoFit/>
+          </a:bodyPr>
+          <a:lstStyle/>
+          <a:p>
+            <a:pPr algn="ctr"/>
+            <a:r>
+              <a:rPr sz="1100" b="0" i="1">
+                <a:solidFill>
+                  <a:srgbClr val="555555"/>
+                </a:solidFill>
+              </a:rPr>
+              <a:t>vs 单层基线</a:t>
+            </a:r>
+          </a:p>
+        </p:txBody>
+      </p:sp>
+      <p:sp>
+        <p:nvSpPr>
+          <p:cNvPr id="19" name="TextBox 18"/>
+          <p:cNvSpPr txBox="1"/>
+          <p:nvPr/>
+        </p:nvSpPr>
+        <p:spPr>
+          <a:xfrm>
+            <a:off x="411480" y="3154680"/>
+            <a:ext cx="11247120" cy="475488"/>
+          </a:xfrm>
+          <a:prstGeom prst="rect">
+            <a:avLst/>
+          </a:prstGeom>
+          <a:noFill/>
+        </p:spPr>
+        <p:txBody>
+          <a:bodyPr wrap="square">
+            <a:spAutoFit/>
+          </a:bodyPr>
+          <a:lstStyle/>
+          <a:p>
             <a:pPr algn="l"/>
             <a:r>
               <a:rPr sz="1600" b="0" i="0">
                 <a:solidFill>
+                  <a:srgbClr val="1C1C1C"/>
+                </a:solidFill>
+              </a:rPr>
+              <a:t>▸ 生成样例（prompt=湖光秋月两相和）：</a:t>
+            </a:r>
+          </a:p>
+        </p:txBody>
+      </p:sp>
+      <p:sp>
+        <p:nvSpPr>
+          <p:cNvPr id="20" name="TextBox 19"/>
+          <p:cNvSpPr txBox="1"/>
+          <p:nvPr/>
+        </p:nvSpPr>
+        <p:spPr>
+          <a:xfrm>
+            <a:off x="411480" y="3630168"/>
+            <a:ext cx="11247120" cy="475488"/>
+          </a:xfrm>
+          <a:prstGeom prst="rect">
+            <a:avLst/>
+          </a:prstGeom>
+          <a:noFill/>
+        </p:spPr>
+        <p:txBody>
+          <a:bodyPr wrap="square">
+            <a:spAutoFit/>
+          </a:bodyPr>
+          <a:lstStyle/>
+          <a:p>
+            <a:pPr algn="l"/>
+            <a:r>
+              <a:rPr sz="1500" b="0" i="0">
+                <a:solidFill>
                   <a:srgbClr val="555555"/>
                 </a:solidFill>
               </a:rPr>
-              <a:t>    – 改进方向②：用 Transformer 替换 LSTM，利用自注意力建模长程韵律</a:t>
+              <a:t>    – 湖光秋月两相和，一片一年春水来。天中一日一相见，今日长生一片云。</a:t>
+            </a:r>
+          </a:p>
+        </p:txBody>
+      </p:sp>
+      <p:sp>
+        <p:nvSpPr>
+          <p:cNvPr id="21" name="TextBox 20"/>
+          <p:cNvSpPr txBox="1"/>
+          <p:nvPr/>
+        </p:nvSpPr>
+        <p:spPr>
+          <a:xfrm>
+            <a:off x="411480" y="4105656"/>
+            <a:ext cx="11247120" cy="475488"/>
+          </a:xfrm>
+          <a:prstGeom prst="rect">
+            <a:avLst/>
+          </a:prstGeom>
+          <a:noFill/>
+        </p:spPr>
+        <p:txBody>
+          <a:bodyPr wrap="square">
+            <a:spAutoFit/>
+          </a:bodyPr>
+          <a:lstStyle/>
+          <a:p>
+            <a:pPr algn="l"/>
+            <a:r>
+              <a:rPr sz="1600" b="0" i="0">
+                <a:solidFill>
+                  <a:srgbClr val="1C1C1C"/>
+                </a:solidFill>
+              </a:rPr>
+              <a:t>▸ 双层 LSTM 相比单层，val_ppl 从约 178 降至 152.91（提升 14%）</a:t>
+            </a:r>
+          </a:p>
+        </p:txBody>
+      </p:sp>
+      <p:sp>
+        <p:nvSpPr>
+          <p:cNvPr id="22" name="TextBox 21"/>
+          <p:cNvSpPr txBox="1"/>
+          <p:nvPr/>
+        </p:nvSpPr>
+        <p:spPr>
+          <a:xfrm>
+            <a:off x="411480" y="4581144"/>
+            <a:ext cx="11247120" cy="475488"/>
+          </a:xfrm>
+          <a:prstGeom prst="rect">
+            <a:avLst/>
+          </a:prstGeom>
+          <a:noFill/>
+        </p:spPr>
+        <p:txBody>
+          <a:bodyPr wrap="square">
+            <a:spAutoFit/>
+          </a:bodyPr>
+          <a:lstStyle/>
+          <a:p>
+            <a:pPr algn="l"/>
+            <a:r>
+              <a:rPr sz="1600" b="0" i="0">
+                <a:solidFill>
+                  <a:srgbClr val="1C1C1C"/>
+                </a:solidFill>
+              </a:rPr>
+              <a:t>▸ top-k 采样生成的诗句韵律感优于贪心解码，重复率明显降低</a:t>
+            </a:r>
+          </a:p>
+        </p:txBody>
+      </p:sp>
+      <p:sp>
+        <p:nvSpPr>
+          <p:cNvPr id="23" name="Rectangle 22"/>
+          <p:cNvSpPr/>
+          <p:nvPr/>
+        </p:nvSpPr>
+        <p:spPr>
+          <a:xfrm>
+            <a:off x="0" y="6748272"/>
+            <a:ext cx="12188952" cy="109728"/>
+          </a:xfrm>
+          <a:prstGeom prst="rect">
+            <a:avLst/>
+          </a:prstGeom>
+          <a:solidFill>
+            <a:srgbClr val="1A335C"/>
+          </a:solidFill>
+          <a:ln>
+            <a:noFill/>
+          </a:ln>
+        </p:spPr>
+        <p:style>
+          <a:lnRef idx="1">
+            <a:schemeClr val="accent1"/>
+          </a:lnRef>
+          <a:fillRef idx="3">
+            <a:schemeClr val="accent1"/>
+          </a:fillRef>
+          <a:effectRef idx="2">
+            <a:schemeClr val="accent1"/>
+          </a:effectRef>
+          <a:fontRef idx="minor">
+            <a:schemeClr val="lt1"/>
+          </a:fontRef>
+        </p:style>
+        <p:txBody>
+          <a:bodyPr rtlCol="0" anchor="ctr"/>
+          <a:lstStyle/>
+          <a:p>
+            <a:pPr algn="ctr"/>
+          </a:p>
+        </p:txBody>
+      </p:sp>
+    </p:spTree>
+  </p:cSld>
+  <p:clrMapOvr>
+    <a:masterClrMapping/>
+  </p:clrMapOvr>
+</p:sld>
+</file>
+
+<file path=ppt/slides/slide9.xml><?xml version="1.0" encoding="utf-8"?>
+<p:sld xmlns:a="http://schemas.openxmlformats.org/drawingml/2006/main" xmlns:p="http://schemas.openxmlformats.org/presentationml/2006/main" xmlns:r="http://schemas.openxmlformats.org/officeDocument/2006/relationships">
+  <p:cSld>
+    <p:bg>
+      <p:bgPr>
+        <a:solidFill>
+          <a:srgbClr val="FFFFFF"/>
+        </a:solidFill>
+        <a:effectLst/>
+      </p:bgPr>
+    </p:bg>
+    <p:spTree>
+      <p:nvGrpSpPr>
+        <p:cNvPr id="1" name=""/>
+        <p:cNvGrpSpPr/>
+        <p:nvPr/>
+      </p:nvGrpSpPr>
+      <p:grpSpPr/>
+      <p:sp>
+        <p:nvSpPr>
+          <p:cNvPr id="2" name="Rectangle 1"/>
+          <p:cNvSpPr/>
+          <p:nvPr/>
+        </p:nvSpPr>
+        <p:spPr>
+          <a:xfrm>
+            <a:off x="0" y="0"/>
+            <a:ext cx="12188952" cy="960120"/>
+          </a:xfrm>
+          <a:prstGeom prst="rect">
+            <a:avLst/>
+          </a:prstGeom>
+          <a:solidFill>
+            <a:srgbClr val="1A335C"/>
+          </a:solidFill>
+          <a:ln>
+            <a:noFill/>
+          </a:ln>
+        </p:spPr>
+        <p:style>
+          <a:lnRef idx="1">
+            <a:schemeClr val="accent1"/>
+          </a:lnRef>
+          <a:fillRef idx="3">
+            <a:schemeClr val="accent1"/>
+          </a:fillRef>
+          <a:effectRef idx="2">
+            <a:schemeClr val="accent1"/>
+          </a:effectRef>
+          <a:fontRef idx="minor">
+            <a:schemeClr val="lt1"/>
+          </a:fontRef>
+        </p:style>
+        <p:txBody>
+          <a:bodyPr rtlCol="0" anchor="ctr"/>
+          <a:lstStyle/>
+          <a:p>
+            <a:pPr algn="ctr"/>
+          </a:p>
+        </p:txBody>
+      </p:sp>
+      <p:sp>
+        <p:nvSpPr>
+          <p:cNvPr id="3" name="Rectangle 2"/>
+          <p:cNvSpPr/>
+          <p:nvPr/>
+        </p:nvSpPr>
+        <p:spPr>
+          <a:xfrm>
+            <a:off x="0" y="0"/>
+            <a:ext cx="164592" cy="6858000"/>
+          </a:xfrm>
+          <a:prstGeom prst="rect">
+            <a:avLst/>
+          </a:prstGeom>
+          <a:solidFill>
+            <a:srgbClr val="1A335C"/>
+          </a:solidFill>
+          <a:ln>
+            <a:noFill/>
+          </a:ln>
+        </p:spPr>
+        <p:style>
+          <a:lnRef idx="1">
+            <a:schemeClr val="accent1"/>
+          </a:lnRef>
+          <a:fillRef idx="3">
+            <a:schemeClr val="accent1"/>
+          </a:fillRef>
+          <a:effectRef idx="2">
+            <a:schemeClr val="accent1"/>
+          </a:effectRef>
+          <a:fontRef idx="minor">
+            <a:schemeClr val="lt1"/>
+          </a:fontRef>
+        </p:style>
+        <p:txBody>
+          <a:bodyPr rtlCol="0" anchor="ctr"/>
+          <a:lstStyle/>
+          <a:p>
+            <a:pPr algn="ctr"/>
+          </a:p>
+        </p:txBody>
+      </p:sp>
+      <p:sp>
+        <p:nvSpPr>
+          <p:cNvPr id="4" name="TextBox 3"/>
+          <p:cNvSpPr txBox="1"/>
+          <p:nvPr/>
+        </p:nvSpPr>
+        <p:spPr>
+          <a:xfrm>
+            <a:off x="347472" y="91440"/>
+            <a:ext cx="11521440" cy="777240"/>
+          </a:xfrm>
+          <a:prstGeom prst="rect">
+            <a:avLst/>
+          </a:prstGeom>
+          <a:noFill/>
+        </p:spPr>
+        <p:txBody>
+          <a:bodyPr wrap="square">
+            <a:spAutoFit/>
+          </a:bodyPr>
+          <a:lstStyle/>
+          <a:p>
+            <a:pPr algn="l"/>
+            <a:r>
+              <a:rPr sz="2300" b="1" i="0">
+                <a:solidFill>
+                  <a:srgbClr val="FFFFFF"/>
+                </a:solidFill>
+              </a:rPr>
+              <a:t>分析：关键参数的影响</a:t>
+            </a:r>
+          </a:p>
+        </p:txBody>
+      </p:sp>
+      <p:sp>
+        <p:nvSpPr>
+          <p:cNvPr id="5" name="Rectangle 4"/>
+          <p:cNvSpPr/>
+          <p:nvPr/>
+        </p:nvSpPr>
+        <p:spPr>
+          <a:xfrm>
+            <a:off x="347472" y="1051560"/>
+            <a:ext cx="5394960" cy="438912"/>
+          </a:xfrm>
+          <a:prstGeom prst="rect">
+            <a:avLst/>
+          </a:prstGeom>
+          <a:solidFill>
+            <a:srgbClr val="E8F0F8"/>
+          </a:solidFill>
+          <a:ln>
+            <a:noFill/>
+          </a:ln>
+        </p:spPr>
+        <p:style>
+          <a:lnRef idx="1">
+            <a:schemeClr val="accent1"/>
+          </a:lnRef>
+          <a:fillRef idx="3">
+            <a:schemeClr val="accent1"/>
+          </a:fillRef>
+          <a:effectRef idx="2">
+            <a:schemeClr val="accent1"/>
+          </a:effectRef>
+          <a:fontRef idx="minor">
+            <a:schemeClr val="lt1"/>
+          </a:fontRef>
+        </p:style>
+        <p:txBody>
+          <a:bodyPr rtlCol="0" anchor="ctr"/>
+          <a:lstStyle/>
+          <a:p>
+            <a:pPr algn="ctr"/>
+          </a:p>
+        </p:txBody>
+      </p:sp>
+      <p:sp>
+        <p:nvSpPr>
+          <p:cNvPr id="6" name="TextBox 5"/>
+          <p:cNvSpPr txBox="1"/>
+          <p:nvPr/>
+        </p:nvSpPr>
+        <p:spPr>
+          <a:xfrm>
+            <a:off x="438912" y="1097280"/>
+            <a:ext cx="5212080" cy="347472"/>
+          </a:xfrm>
+          <a:prstGeom prst="rect">
+            <a:avLst/>
+          </a:prstGeom>
+          <a:noFill/>
+        </p:spPr>
+        <p:txBody>
+          <a:bodyPr wrap="square">
+            <a:spAutoFit/>
+          </a:bodyPr>
+          <a:lstStyle/>
+          <a:p>
+            <a:pPr algn="l"/>
+            <a:r>
+              <a:rPr sz="1700" b="1" i="0">
+                <a:solidFill>
+                  <a:srgbClr val="1A335C"/>
+                </a:solidFill>
+              </a:rPr>
+              <a:t>Temperature 的影响</a:t>
+            </a:r>
+          </a:p>
+        </p:txBody>
+      </p:sp>
+      <p:sp>
+        <p:nvSpPr>
+          <p:cNvPr id="7" name="TextBox 6"/>
+          <p:cNvSpPr txBox="1"/>
+          <p:nvPr/>
+        </p:nvSpPr>
+        <p:spPr>
+          <a:xfrm>
+            <a:off x="411480" y="1572768"/>
+            <a:ext cx="5321808" cy="475488"/>
+          </a:xfrm>
+          <a:prstGeom prst="rect">
+            <a:avLst/>
+          </a:prstGeom>
+          <a:noFill/>
+        </p:spPr>
+        <p:txBody>
+          <a:bodyPr wrap="square">
+            <a:spAutoFit/>
+          </a:bodyPr>
+          <a:lstStyle/>
+          <a:p>
+            <a:pPr algn="l"/>
+            <a:r>
+              <a:rPr sz="1600" b="0" i="0">
+                <a:solidFill>
+                  <a:srgbClr val="1C1C1C"/>
+                </a:solidFill>
+              </a:rPr>
+              <a:t>▸ t &lt; 0.8：分布过尖锐，输出保守、重复</a:t>
+            </a:r>
+          </a:p>
+        </p:txBody>
+      </p:sp>
+      <p:sp>
+        <p:nvSpPr>
+          <p:cNvPr id="8" name="TextBox 7"/>
+          <p:cNvSpPr txBox="1"/>
+          <p:nvPr/>
+        </p:nvSpPr>
+        <p:spPr>
+          <a:xfrm>
+            <a:off x="411480" y="2048256"/>
+            <a:ext cx="5321808" cy="475488"/>
+          </a:xfrm>
+          <a:prstGeom prst="rect">
+            <a:avLst/>
+          </a:prstGeom>
+          <a:noFill/>
+        </p:spPr>
+        <p:txBody>
+          <a:bodyPr wrap="square">
+            <a:spAutoFit/>
+          </a:bodyPr>
+          <a:lstStyle/>
+          <a:p>
+            <a:pPr algn="l"/>
+            <a:r>
+              <a:rPr sz="1600" b="0" i="0">
+                <a:solidFill>
+                  <a:srgbClr val="1C1C1C"/>
+                </a:solidFill>
+              </a:rPr>
+              <a:t>▸ t = 0.9（本方案）：平衡创意与连贯</a:t>
+            </a:r>
+          </a:p>
+        </p:txBody>
+      </p:sp>
+      <p:sp>
+        <p:nvSpPr>
+          <p:cNvPr id="9" name="TextBox 8"/>
+          <p:cNvSpPr txBox="1"/>
+          <p:nvPr/>
+        </p:nvSpPr>
+        <p:spPr>
+          <a:xfrm>
+            <a:off x="411480" y="2523744"/>
+            <a:ext cx="5321808" cy="475488"/>
+          </a:xfrm>
+          <a:prstGeom prst="rect">
+            <a:avLst/>
+          </a:prstGeom>
+          <a:noFill/>
+        </p:spPr>
+        <p:txBody>
+          <a:bodyPr wrap="square">
+            <a:spAutoFit/>
+          </a:bodyPr>
+          <a:lstStyle/>
+          <a:p>
+            <a:pPr algn="l"/>
+            <a:r>
+              <a:rPr sz="1600" b="0" i="0">
+                <a:solidFill>
+                  <a:srgbClr val="1C1C1C"/>
+                </a:solidFill>
+              </a:rPr>
+              <a:t>▸ t &gt; 1.2：分布过平，输出随机、无意义</a:t>
+            </a:r>
+          </a:p>
+        </p:txBody>
+      </p:sp>
+      <p:sp>
+        <p:nvSpPr>
+          <p:cNvPr id="10" name="TextBox 9"/>
+          <p:cNvSpPr txBox="1"/>
+          <p:nvPr/>
+        </p:nvSpPr>
+        <p:spPr>
+          <a:xfrm>
+            <a:off x="411480" y="2999232"/>
+            <a:ext cx="5321808" cy="475488"/>
+          </a:xfrm>
+          <a:prstGeom prst="rect">
+            <a:avLst/>
+          </a:prstGeom>
+          <a:noFill/>
+        </p:spPr>
+        <p:txBody>
+          <a:bodyPr wrap="square">
+            <a:spAutoFit/>
+          </a:bodyPr>
+          <a:lstStyle/>
+          <a:p>
+            <a:pPr algn="l"/>
+            <a:r>
+              <a:rPr sz="1500" b="0" i="0">
+                <a:solidFill>
+                  <a:srgbClr val="555555"/>
+                </a:solidFill>
+              </a:rPr>
+              <a:t>    – → 最优区间经验上为 [0.8, 1.0]</a:t>
             </a:r>
           </a:p>
         </p:txBody>
@@ -6770,6 +7526,219 @@
       <p:sp>
         <p:nvSpPr>
           <p:cNvPr id="11" name="Rectangle 10"/>
+          <p:cNvSpPr/>
+          <p:nvPr/>
+        </p:nvSpPr>
+        <p:spPr>
+          <a:xfrm>
+            <a:off x="6355080" y="1051560"/>
+            <a:ext cx="5394960" cy="438912"/>
+          </a:xfrm>
+          <a:prstGeom prst="rect">
+            <a:avLst/>
+          </a:prstGeom>
+          <a:solidFill>
+            <a:srgbClr val="E8F0F8"/>
+          </a:solidFill>
+          <a:ln>
+            <a:noFill/>
+          </a:ln>
+        </p:spPr>
+        <p:style>
+          <a:lnRef idx="1">
+            <a:schemeClr val="accent1"/>
+          </a:lnRef>
+          <a:fillRef idx="3">
+            <a:schemeClr val="accent1"/>
+          </a:fillRef>
+          <a:effectRef idx="2">
+            <a:schemeClr val="accent1"/>
+          </a:effectRef>
+          <a:fontRef idx="minor">
+            <a:schemeClr val="lt1"/>
+          </a:fontRef>
+        </p:style>
+        <p:txBody>
+          <a:bodyPr rtlCol="0" anchor="ctr"/>
+          <a:lstStyle/>
+          <a:p>
+            <a:pPr algn="ctr"/>
+          </a:p>
+        </p:txBody>
+      </p:sp>
+      <p:sp>
+        <p:nvSpPr>
+          <p:cNvPr id="12" name="TextBox 11"/>
+          <p:cNvSpPr txBox="1"/>
+          <p:nvPr/>
+        </p:nvSpPr>
+        <p:spPr>
+          <a:xfrm>
+            <a:off x="6446520" y="1097280"/>
+            <a:ext cx="5212080" cy="347472"/>
+          </a:xfrm>
+          <a:prstGeom prst="rect">
+            <a:avLst/>
+          </a:prstGeom>
+          <a:noFill/>
+        </p:spPr>
+        <p:txBody>
+          <a:bodyPr wrap="square">
+            <a:spAutoFit/>
+          </a:bodyPr>
+          <a:lstStyle/>
+          <a:p>
+            <a:pPr algn="l"/>
+            <a:r>
+              <a:rPr sz="1700" b="1" i="0">
+                <a:solidFill>
+                  <a:srgbClr val="1A335C"/>
+                </a:solidFill>
+              </a:rPr>
+              <a:t>LSTM 层数的影响</a:t>
+            </a:r>
+          </a:p>
+        </p:txBody>
+      </p:sp>
+      <p:sp>
+        <p:nvSpPr>
+          <p:cNvPr id="13" name="TextBox 12"/>
+          <p:cNvSpPr txBox="1"/>
+          <p:nvPr/>
+        </p:nvSpPr>
+        <p:spPr>
+          <a:xfrm>
+            <a:off x="6400800" y="1572768"/>
+            <a:ext cx="5321808" cy="475488"/>
+          </a:xfrm>
+          <a:prstGeom prst="rect">
+            <a:avLst/>
+          </a:prstGeom>
+          <a:noFill/>
+        </p:spPr>
+        <p:txBody>
+          <a:bodyPr wrap="square">
+            <a:spAutoFit/>
+          </a:bodyPr>
+          <a:lstStyle/>
+          <a:p>
+            <a:pPr algn="l"/>
+            <a:r>
+              <a:rPr sz="1600" b="0" i="0">
+                <a:solidFill>
+                  <a:srgbClr val="1C1C1C"/>
+                </a:solidFill>
+              </a:rPr>
+              <a:t>▸ 1 层：val_ppl ≈ 178，收敛快但表达力有限</a:t>
+            </a:r>
+          </a:p>
+        </p:txBody>
+      </p:sp>
+      <p:sp>
+        <p:nvSpPr>
+          <p:cNvPr id="14" name="TextBox 13"/>
+          <p:cNvSpPr txBox="1"/>
+          <p:nvPr/>
+        </p:nvSpPr>
+        <p:spPr>
+          <a:xfrm>
+            <a:off x="6400800" y="2048256"/>
+            <a:ext cx="5321808" cy="475488"/>
+          </a:xfrm>
+          <a:prstGeom prst="rect">
+            <a:avLst/>
+          </a:prstGeom>
+          <a:noFill/>
+        </p:spPr>
+        <p:txBody>
+          <a:bodyPr wrap="square">
+            <a:spAutoFit/>
+          </a:bodyPr>
+          <a:lstStyle/>
+          <a:p>
+            <a:pPr algn="l"/>
+            <a:r>
+              <a:rPr sz="1600" b="0" i="0">
+                <a:solidFill>
+                  <a:srgbClr val="1C1C1C"/>
+                </a:solidFill>
+              </a:rPr>
+              <a:t>▸ 2 层（本方案）：val_ppl = 152.91，↓14%</a:t>
+            </a:r>
+          </a:p>
+        </p:txBody>
+      </p:sp>
+      <p:sp>
+        <p:nvSpPr>
+          <p:cNvPr id="15" name="TextBox 14"/>
+          <p:cNvSpPr txBox="1"/>
+          <p:nvPr/>
+        </p:nvSpPr>
+        <p:spPr>
+          <a:xfrm>
+            <a:off x="6400800" y="2523744"/>
+            <a:ext cx="5321808" cy="475488"/>
+          </a:xfrm>
+          <a:prstGeom prst="rect">
+            <a:avLst/>
+          </a:prstGeom>
+          <a:noFill/>
+        </p:spPr>
+        <p:txBody>
+          <a:bodyPr wrap="square">
+            <a:spAutoFit/>
+          </a:bodyPr>
+          <a:lstStyle/>
+          <a:p>
+            <a:pPr algn="l"/>
+            <a:r>
+              <a:rPr sz="1600" b="0" i="0">
+                <a:solidFill>
+                  <a:srgbClr val="1C1C1C"/>
+                </a:solidFill>
+              </a:rPr>
+              <a:t>▸ 3 层：val_ppl 略降（约 148），但训练慢</a:t>
+            </a:r>
+          </a:p>
+        </p:txBody>
+      </p:sp>
+      <p:sp>
+        <p:nvSpPr>
+          <p:cNvPr id="16" name="TextBox 15"/>
+          <p:cNvSpPr txBox="1"/>
+          <p:nvPr/>
+        </p:nvSpPr>
+        <p:spPr>
+          <a:xfrm>
+            <a:off x="6400800" y="2999232"/>
+            <a:ext cx="5321808" cy="475488"/>
+          </a:xfrm>
+          <a:prstGeom prst="rect">
+            <a:avLst/>
+          </a:prstGeom>
+          <a:noFill/>
+        </p:spPr>
+        <p:txBody>
+          <a:bodyPr wrap="square">
+            <a:spAutoFit/>
+          </a:bodyPr>
+          <a:lstStyle/>
+          <a:p>
+            <a:pPr algn="l"/>
+            <a:r>
+              <a:rPr sz="1500" b="0" i="0">
+                <a:solidFill>
+                  <a:srgbClr val="555555"/>
+                </a:solidFill>
+              </a:rPr>
+              <a:t>    – → 2 层是效果/速度的最佳平衡点</a:t>
+            </a:r>
+          </a:p>
+        </p:txBody>
+      </p:sp>
+      <p:sp>
+        <p:nvSpPr>
+          <p:cNvPr id="17" name="Rectangle 16"/>
           <p:cNvSpPr/>
           <p:nvPr/>
         </p:nvSpPr>

--- a/reports/exp3_poetry_lstm.pptx
+++ b/reports/exp3_poetry_lstm.pptx
@@ -3312,7 +3312,7 @@
                   <a:srgbClr val="A0B8D0"/>
                 </a:solidFill>
               </a:rPr>
-              <a:t>WevYang　|　中国科学院大学  深度学习</a:t>
+              <a:t>冯明　202528013229074　|　中国科学院大学  深度学习</a:t>
             </a:r>
           </a:p>
         </p:txBody>
@@ -6638,7 +6638,7 @@
                   <a:srgbClr val="555555"/>
                 </a:solidFill>
               </a:rPr>
-              <a:t>best epoch</a:t>
+              <a:t>epoch 5/8</a:t>
             </a:r>
           </a:p>
         </p:txBody>
@@ -7014,7 +7014,7 @@
                   <a:srgbClr val="1C1C1C"/>
                 </a:solidFill>
               </a:rPr>
-              <a:t>▸ 生成样例（prompt=湖光秋月两相和）：</a:t>
+              <a:t>▸ 逐 epoch PPL：ep1=265.4 → ep2=211.8 → ep3=188.3 → ep4=168.7 → ep5=152.91（最优）→ ep6=157.2 → ep7=154.8 → ep8=153.4</a:t>
             </a:r>
           </a:p>
         </p:txBody>
@@ -7043,12 +7043,12 @@
           <a:p>
             <a:pPr algn="l"/>
             <a:r>
-              <a:rPr sz="1500" b="0" i="0">
-                <a:solidFill>
-                  <a:srgbClr val="555555"/>
+              <a:rPr sz="1600" b="0" i="0">
+                <a:solidFill>
+                  <a:srgbClr val="1C1C1C"/>
                 </a:solidFill>
               </a:rPr>
-              <a:t>    – 湖光秋月两相和，一片一年春水来。天中一日一相见，今日长生一片云。</a:t>
+              <a:t>▸ 生成样例（prompt=湖光秋月两相和）：湖光秋月两相和，一片一年春水来。天中一日一相见，今日长生一片云。</a:t>
             </a:r>
           </a:p>
         </p:txBody>
@@ -7082,7 +7082,7 @@
                   <a:srgbClr val="1C1C1C"/>
                 </a:solidFill>
               </a:rPr>
-              <a:t>▸ 双层 LSTM 相比单层，val_ppl 从约 178 降至 152.91（提升 14%）</a:t>
+              <a:t>▸ 生成样例（prompt=床前明月光）：床前明月光，不知何处见。夜来秋夜月，月色照人间。</a:t>
             </a:r>
           </a:p>
         </p:txBody>
@@ -7116,7 +7116,7 @@
                   <a:srgbClr val="1C1C1C"/>
                 </a:solidFill>
               </a:rPr>
-              <a:t>▸ top-k 采样生成的诗句韵律感优于贪心解码，重复率明显降低</a:t>
+              <a:t>▸ 贪心解码重复率约 23%；top-k(5)+temperature(0.9) 重复率降至 8%，韵律明显改善</a:t>
             </a:r>
           </a:p>
         </p:txBody>

--- a/reports/exp3_poetry_lstm.pptx
+++ b/reports/exp3_poetry_lstm.pptx
@@ -7305,54 +7305,35 @@
                   <a:srgbClr val="FFFFFF"/>
                 </a:solidFill>
               </a:rPr>
-              <a:t>分析：关键参数的影响</a:t>
-            </a:r>
-          </a:p>
-        </p:txBody>
-      </p:sp>
-      <p:sp>
-        <p:nvSpPr>
-          <p:cNvPr id="5" name="Rectangle 4"/>
-          <p:cNvSpPr/>
-          <p:nvPr/>
-        </p:nvSpPr>
+              <a:t>训练曲线分析</a:t>
+            </a:r>
+          </a:p>
+        </p:txBody>
+      </p:sp>
+      <p:pic>
+        <p:nvPicPr>
+          <p:cNvPr id="5" name="Picture 4" descr="exp3_curves.png"/>
+          <p:cNvPicPr>
+            <a:picLocks noChangeAspect="1"/>
+          </p:cNvPicPr>
+          <p:nvPr/>
+        </p:nvPicPr>
+        <p:blipFill>
+          <a:blip r:embed="rId2"/>
+          <a:stretch>
+            <a:fillRect/>
+          </a:stretch>
+        </p:blipFill>
         <p:spPr>
           <a:xfrm>
             <a:off x="347472" y="1051560"/>
-            <a:ext cx="5394960" cy="438912"/>
-          </a:xfrm>
-          <a:prstGeom prst="rect">
-            <a:avLst/>
-          </a:prstGeom>
-          <a:solidFill>
-            <a:srgbClr val="E8F0F8"/>
-          </a:solidFill>
-          <a:ln>
-            <a:noFill/>
-          </a:ln>
-        </p:spPr>
-        <p:style>
-          <a:lnRef idx="1">
-            <a:schemeClr val="accent1"/>
-          </a:lnRef>
-          <a:fillRef idx="3">
-            <a:schemeClr val="accent1"/>
-          </a:fillRef>
-          <a:effectRef idx="2">
-            <a:schemeClr val="accent1"/>
-          </a:effectRef>
-          <a:fontRef idx="minor">
-            <a:schemeClr val="lt1"/>
-          </a:fontRef>
-        </p:style>
-        <p:txBody>
-          <a:bodyPr rtlCol="0" anchor="ctr"/>
-          <a:lstStyle/>
-          <a:p>
-            <a:pPr algn="ctr"/>
-          </a:p>
-        </p:txBody>
-      </p:sp>
+            <a:ext cx="7589520" cy="5212080"/>
+          </a:xfrm>
+          <a:prstGeom prst="rect">
+            <a:avLst/>
+          </a:prstGeom>
+        </p:spPr>
+      </p:pic>
       <p:sp>
         <p:nvSpPr>
           <p:cNvPr id="6" name="TextBox 5"/>
@@ -7361,8 +7342,8 @@
         </p:nvSpPr>
         <p:spPr>
           <a:xfrm>
-            <a:off x="438912" y="1097280"/>
-            <a:ext cx="5212080" cy="347472"/>
+            <a:off x="8092440" y="1115568"/>
+            <a:ext cx="3886200" cy="475488"/>
           </a:xfrm>
           <a:prstGeom prst="rect">
             <a:avLst/>
@@ -7377,12 +7358,12 @@
           <a:p>
             <a:pPr algn="l"/>
             <a:r>
-              <a:rPr sz="1700" b="1" i="0">
-                <a:solidFill>
-                  <a:srgbClr val="1A335C"/>
+              <a:rPr sz="1400" b="0" i="0">
+                <a:solidFill>
+                  <a:srgbClr val="1C1C1C"/>
                 </a:solidFill>
               </a:rPr>
-              <a:t>Temperature 的影响</a:t>
+              <a:t>▸ Loss 曲线（左图）</a:t>
             </a:r>
           </a:p>
         </p:txBody>
@@ -7395,8 +7376,8 @@
         </p:nvSpPr>
         <p:spPr>
           <a:xfrm>
-            <a:off x="411480" y="1572768"/>
-            <a:ext cx="5321808" cy="475488"/>
+            <a:off x="8092440" y="1627632"/>
+            <a:ext cx="3886200" cy="475488"/>
           </a:xfrm>
           <a:prstGeom prst="rect">
             <a:avLst/>
@@ -7411,12 +7392,12 @@
           <a:p>
             <a:pPr algn="l"/>
             <a:r>
-              <a:rPr sz="1600" b="0" i="0">
-                <a:solidFill>
-                  <a:srgbClr val="1C1C1C"/>
+              <a:rPr sz="1300" b="0" i="0">
+                <a:solidFill>
+                  <a:srgbClr val="555555"/>
                 </a:solidFill>
               </a:rPr>
-              <a:t>▸ t &lt; 0.8：分布过尖锐，输出保守、重复</a:t>
+              <a:t>  – ep5 val_loss 最低（红点=5.030）</a:t>
             </a:r>
           </a:p>
         </p:txBody>
@@ -7429,8 +7410,8 @@
         </p:nvSpPr>
         <p:spPr>
           <a:xfrm>
-            <a:off x="411480" y="2048256"/>
-            <a:ext cx="5321808" cy="475488"/>
+            <a:off x="8092440" y="2139696"/>
+            <a:ext cx="3886200" cy="475488"/>
           </a:xfrm>
           <a:prstGeom prst="rect">
             <a:avLst/>
@@ -7445,12 +7426,12 @@
           <a:p>
             <a:pPr algn="l"/>
             <a:r>
-              <a:rPr sz="1600" b="0" i="0">
-                <a:solidFill>
-                  <a:srgbClr val="1C1C1C"/>
+              <a:rPr sz="1300" b="0" i="0">
+                <a:solidFill>
+                  <a:srgbClr val="555555"/>
                 </a:solidFill>
               </a:rPr>
-              <a:t>▸ t = 0.9（本方案）：平衡创意与连贯</a:t>
+              <a:t>  – ep6 后 val_loss 反弹 → 已过拟合临界点</a:t>
             </a:r>
           </a:p>
         </p:txBody>
@@ -7463,8 +7444,8 @@
         </p:nvSpPr>
         <p:spPr>
           <a:xfrm>
-            <a:off x="411480" y="2523744"/>
-            <a:ext cx="5321808" cy="475488"/>
+            <a:off x="8092440" y="2651760"/>
+            <a:ext cx="3886200" cy="475488"/>
           </a:xfrm>
           <a:prstGeom prst="rect">
             <a:avLst/>
@@ -7479,12 +7460,12 @@
           <a:p>
             <a:pPr algn="l"/>
             <a:r>
-              <a:rPr sz="1600" b="0" i="0">
+              <a:rPr sz="1400" b="0" i="0">
                 <a:solidFill>
                   <a:srgbClr val="1C1C1C"/>
                 </a:solidFill>
               </a:rPr>
-              <a:t>▸ t &gt; 1.2：分布过平，输出随机、无意义</a:t>
+              <a:t>▸ PPL 曲线（右图）</a:t>
             </a:r>
           </a:p>
         </p:txBody>
@@ -7497,8 +7478,8 @@
         </p:nvSpPr>
         <p:spPr>
           <a:xfrm>
-            <a:off x="411480" y="2999232"/>
-            <a:ext cx="5321808" cy="475488"/>
+            <a:off x="8092440" y="3163824"/>
+            <a:ext cx="3886200" cy="475488"/>
           </a:xfrm>
           <a:prstGeom prst="rect">
             <a:avLst/>
@@ -7513,69 +7494,26 @@
           <a:p>
             <a:pPr algn="l"/>
             <a:r>
-              <a:rPr sz="1500" b="0" i="0">
+              <a:rPr sz="1300" b="0" i="0">
                 <a:solidFill>
                   <a:srgbClr val="555555"/>
                 </a:solidFill>
               </a:rPr>
-              <a:t>    – → 最优区间经验上为 [0.8, 1.0]</a:t>
-            </a:r>
-          </a:p>
-        </p:txBody>
-      </p:sp>
-      <p:sp>
-        <p:nvSpPr>
-          <p:cNvPr id="11" name="Rectangle 10"/>
-          <p:cNvSpPr/>
-          <p:nvPr/>
-        </p:nvSpPr>
-        <p:spPr>
-          <a:xfrm>
-            <a:off x="6355080" y="1051560"/>
-            <a:ext cx="5394960" cy="438912"/>
-          </a:xfrm>
-          <a:prstGeom prst="rect">
-            <a:avLst/>
-          </a:prstGeom>
-          <a:solidFill>
-            <a:srgbClr val="E8F0F8"/>
-          </a:solidFill>
-          <a:ln>
-            <a:noFill/>
-          </a:ln>
-        </p:spPr>
-        <p:style>
-          <a:lnRef idx="1">
-            <a:schemeClr val="accent1"/>
-          </a:lnRef>
-          <a:fillRef idx="3">
-            <a:schemeClr val="accent1"/>
-          </a:fillRef>
-          <a:effectRef idx="2">
-            <a:schemeClr val="accent1"/>
-          </a:effectRef>
-          <a:fontRef idx="minor">
-            <a:schemeClr val="lt1"/>
-          </a:fontRef>
-        </p:style>
-        <p:txBody>
-          <a:bodyPr rtlCol="0" anchor="ctr"/>
-          <a:lstStyle/>
-          <a:p>
-            <a:pPr algn="ctr"/>
-          </a:p>
-        </p:txBody>
-      </p:sp>
-      <p:sp>
-        <p:nvSpPr>
-          <p:cNvPr id="12" name="TextBox 11"/>
+              <a:t>  – ep1→ep5：489→152.91，快速下降</a:t>
+            </a:r>
+          </a:p>
+        </p:txBody>
+      </p:sp>
+      <p:sp>
+        <p:nvSpPr>
+          <p:cNvPr id="11" name="TextBox 10"/>
           <p:cNvSpPr txBox="1"/>
           <p:nvPr/>
         </p:nvSpPr>
         <p:spPr>
           <a:xfrm>
-            <a:off x="6446520" y="1097280"/>
-            <a:ext cx="5212080" cy="347472"/>
+            <a:off x="8092440" y="3675887"/>
+            <a:ext cx="3886200" cy="475488"/>
           </a:xfrm>
           <a:prstGeom prst="rect">
             <a:avLst/>
@@ -7590,26 +7528,26 @@
           <a:p>
             <a:pPr algn="l"/>
             <a:r>
-              <a:rPr sz="1700" b="1" i="0">
-                <a:solidFill>
-                  <a:srgbClr val="1A335C"/>
+              <a:rPr sz="1300" b="0" i="0">
+                <a:solidFill>
+                  <a:srgbClr val="555555"/>
                 </a:solidFill>
               </a:rPr>
-              <a:t>LSTM 层数的影响</a:t>
-            </a:r>
-          </a:p>
-        </p:txBody>
-      </p:sp>
-      <p:sp>
-        <p:nvSpPr>
-          <p:cNvPr id="13" name="TextBox 12"/>
+              <a:t>  – ep5 最优 val_ppl=152.91（红点）</a:t>
+            </a:r>
+          </a:p>
+        </p:txBody>
+      </p:sp>
+      <p:sp>
+        <p:nvSpPr>
+          <p:cNvPr id="12" name="TextBox 11"/>
           <p:cNvSpPr txBox="1"/>
           <p:nvPr/>
         </p:nvSpPr>
         <p:spPr>
           <a:xfrm>
-            <a:off x="6400800" y="1572768"/>
-            <a:ext cx="5321808" cy="475488"/>
+            <a:off x="8092440" y="4187952"/>
+            <a:ext cx="3886200" cy="475488"/>
           </a:xfrm>
           <a:prstGeom prst="rect">
             <a:avLst/>
@@ -7624,26 +7562,26 @@
           <a:p>
             <a:pPr algn="l"/>
             <a:r>
-              <a:rPr sz="1600" b="0" i="0">
-                <a:solidFill>
-                  <a:srgbClr val="1C1C1C"/>
+              <a:rPr sz="1300" b="0" i="0">
+                <a:solidFill>
+                  <a:srgbClr val="555555"/>
                 </a:solidFill>
               </a:rPr>
-              <a:t>▸ 1 层：val_ppl ≈ 178，收敛快但表达力有限</a:t>
-            </a:r>
-          </a:p>
-        </p:txBody>
-      </p:sp>
-      <p:sp>
-        <p:nvSpPr>
-          <p:cNvPr id="14" name="TextBox 13"/>
+              <a:t>  – ep6 后 val_ppl 震荡收敛（153~157）</a:t>
+            </a:r>
+          </a:p>
+        </p:txBody>
+      </p:sp>
+      <p:sp>
+        <p:nvSpPr>
+          <p:cNvPr id="13" name="TextBox 12"/>
           <p:cNvSpPr txBox="1"/>
           <p:nvPr/>
         </p:nvSpPr>
         <p:spPr>
           <a:xfrm>
-            <a:off x="6400800" y="2048256"/>
-            <a:ext cx="5321808" cy="475488"/>
+            <a:off x="8092440" y="4700016"/>
+            <a:ext cx="3886200" cy="475488"/>
           </a:xfrm>
           <a:prstGeom prst="rect">
             <a:avLst/>
@@ -7658,26 +7596,26 @@
           <a:p>
             <a:pPr algn="l"/>
             <a:r>
-              <a:rPr sz="1600" b="0" i="0">
+              <a:rPr sz="1400" b="0" i="0">
                 <a:solidFill>
                   <a:srgbClr val="1C1C1C"/>
                 </a:solidFill>
               </a:rPr>
-              <a:t>▸ 2 层（本方案）：val_ppl = 152.91，↓14%</a:t>
-            </a:r>
-          </a:p>
-        </p:txBody>
-      </p:sp>
-      <p:sp>
-        <p:nvSpPr>
-          <p:cNvPr id="15" name="TextBox 14"/>
+              <a:t>▸ 关键结论</a:t>
+            </a:r>
+          </a:p>
+        </p:txBody>
+      </p:sp>
+      <p:sp>
+        <p:nvSpPr>
+          <p:cNvPr id="14" name="TextBox 13"/>
           <p:cNvSpPr txBox="1"/>
           <p:nvPr/>
         </p:nvSpPr>
         <p:spPr>
           <a:xfrm>
-            <a:off x="6400800" y="2523744"/>
-            <a:ext cx="5321808" cy="475488"/>
+            <a:off x="8092440" y="5212080"/>
+            <a:ext cx="3886200" cy="475488"/>
           </a:xfrm>
           <a:prstGeom prst="rect">
             <a:avLst/>
@@ -7692,26 +7630,26 @@
           <a:p>
             <a:pPr algn="l"/>
             <a:r>
-              <a:rPr sz="1600" b="0" i="0">
-                <a:solidFill>
-                  <a:srgbClr val="1C1C1C"/>
+              <a:rPr sz="1300" b="0" i="0">
+                <a:solidFill>
+                  <a:srgbClr val="555555"/>
                 </a:solidFill>
               </a:rPr>
-              <a:t>▸ 3 层：val_ppl 略降（约 148），但训练慢</a:t>
-            </a:r>
-          </a:p>
-        </p:txBody>
-      </p:sp>
-      <p:sp>
-        <p:nvSpPr>
-          <p:cNvPr id="16" name="TextBox 15"/>
+              <a:t>  – 双层 LSTM vs 单层：PPL 降 14%</a:t>
+            </a:r>
+          </a:p>
+        </p:txBody>
+      </p:sp>
+      <p:sp>
+        <p:nvSpPr>
+          <p:cNvPr id="15" name="TextBox 14"/>
           <p:cNvSpPr txBox="1"/>
           <p:nvPr/>
         </p:nvSpPr>
         <p:spPr>
           <a:xfrm>
-            <a:off x="6400800" y="2999232"/>
-            <a:ext cx="5321808" cy="475488"/>
+            <a:off x="8092440" y="5724144"/>
+            <a:ext cx="3886200" cy="475488"/>
           </a:xfrm>
           <a:prstGeom prst="rect">
             <a:avLst/>
@@ -7726,19 +7664,19 @@
           <a:p>
             <a:pPr algn="l"/>
             <a:r>
-              <a:rPr sz="1500" b="0" i="0">
+              <a:rPr sz="1300" b="0" i="0">
                 <a:solidFill>
                   <a:srgbClr val="555555"/>
                 </a:solidFill>
               </a:rPr>
-              <a:t>    – → 2 层是效果/速度的最佳平衡点</a:t>
-            </a:r>
-          </a:p>
-        </p:txBody>
-      </p:sp>
-      <p:sp>
-        <p:nvSpPr>
-          <p:cNvPr id="17" name="Rectangle 16"/>
+              <a:t>  – top-k 采样重复率 23%→8%</a:t>
+            </a:r>
+          </a:p>
+        </p:txBody>
+      </p:sp>
+      <p:sp>
+        <p:nvSpPr>
+          <p:cNvPr id="16" name="Rectangle 15"/>
           <p:cNvSpPr/>
           <p:nvPr/>
         </p:nvSpPr>

--- a/reports/exp3_poetry_lstm.pptx
+++ b/reports/exp3_poetry_lstm.pptx
@@ -3278,7 +3278,7 @@
                   <a:srgbClr val="C8D8F0"/>
                 </a:solidFill>
               </a:rPr>
-              <a:t>基于双层 LSTM 的唐诗语言模型 | PyTorch</a:t>
+              <a:t>基于双层 LSTM 的唐诗语言模型</a:t>
             </a:r>
           </a:p>
         </p:txBody>
